--- a/docs/apresentacao/Dreamy — Apresentação Institucional.pptx
+++ b/docs/apresentacao/Dreamy — Apresentação Institucional.pptx
@@ -4,21 +4,24 @@
   <p:sldMasterIdLst>
     <p:sldMasterId id="2147483648" r:id="rId1"/>
   </p:sldMasterIdLst>
+  <p:notesMasterIdLst>
+    <p:notesMasterId r:id="rId14"/>
+  </p:notesMasterIdLst>
   <p:sldIdLst>
-    <p:sldId id="256" r:id="rId7"/>
-    <p:sldId id="257" r:id="rId9"/>
-    <p:sldId id="258" r:id="rId10"/>
-    <p:sldId id="259" r:id="rId11"/>
-    <p:sldId id="260" r:id="rId12"/>
-    <p:sldId id="261" r:id="rId13"/>
-    <p:sldId id="262" r:id="rId14"/>
-    <p:sldId id="263" r:id="rId15"/>
-    <p:sldId id="264" r:id="rId16"/>
-    <p:sldId id="265" r:id="rId17"/>
-    <p:sldId id="266" r:id="rId18"/>
-    <p:sldId id="267" r:id="rId19"/>
+    <p:sldId id="256" r:id="rId2"/>
+    <p:sldId id="257" r:id="rId3"/>
+    <p:sldId id="258" r:id="rId4"/>
+    <p:sldId id="259" r:id="rId5"/>
+    <p:sldId id="260" r:id="rId6"/>
+    <p:sldId id="261" r:id="rId7"/>
+    <p:sldId id="262" r:id="rId8"/>
+    <p:sldId id="263" r:id="rId9"/>
+    <p:sldId id="264" r:id="rId10"/>
+    <p:sldId id="265" r:id="rId11"/>
+    <p:sldId id="266" r:id="rId12"/>
+    <p:sldId id="267" r:id="rId13"/>
   </p:sldIdLst>
-  <p:sldSz cx="12192000" cy="6858000" type="screen4x3"/>
+  <p:sldSz cx="12192000" cy="6858000"/>
   <p:notesSz cx="6858000" cy="9144000"/>
   <p:defaultTextStyle>
     <a:defPPr>
@@ -115,11 +118,27 @@
       </a:defRPr>
     </a:lvl9pPr>
   </p:defaultTextStyle>
+  <p:extLst>
+    <p:ext uri="{EFAFB233-063F-42B5-8137-9DF3F51BA10A}">
+      <p15:sldGuideLst xmlns:p15="http://schemas.microsoft.com/office/powerpoint/2012/main">
+        <p15:guide id="1" orient="horz" pos="2160">
+          <p15:clr>
+            <a:srgbClr val="A4A3A4"/>
+          </p15:clr>
+        </p15:guide>
+        <p15:guide id="2" pos="2880">
+          <p15:clr>
+            <a:srgbClr val="A4A3A4"/>
+          </p15:clr>
+        </p15:guide>
+      </p15:sldGuideLst>
+    </p:ext>
+  </p:extLst>
 </p:presentation>
 </file>
 
 <file path=ppt/notesMasters/notesMaster1.xml><?xml version="1.0" encoding="utf-8"?>
-<p:notesMaster xmlns:a="http://schemas.openxmlformats.org/drawingml/2006/main" xmlns:p="http://schemas.openxmlformats.org/presentationml/2006/main" xmlns:r="http://schemas.openxmlformats.org/officeDocument/2006/relationships">
+<p:notesMaster xmlns:a="http://schemas.openxmlformats.org/drawingml/2006/main" xmlns:r="http://schemas.openxmlformats.org/officeDocument/2006/relationships" xmlns:p="http://schemas.openxmlformats.org/presentationml/2006/main">
   <p:cSld>
     <p:bg>
       <p:bgRef idx="1001">
@@ -140,241 +159,16 @@
           <a:chExt cx="0" cy="0"/>
         </a:xfrm>
       </p:grpSpPr>
-      <p:sp>
-        <p:nvSpPr>
-          <p:cNvPr id="2" name="Header Placeholder 1"/>
-          <p:cNvSpPr>
-            <a:spLocks noGrp="1"/>
-          </p:cNvSpPr>
-          <p:nvPr>
-            <p:ph type="hdr" sz="quarter"/>
-          </p:nvPr>
-        </p:nvSpPr>
-        <p:spPr>
-          <a:xfrm>
-            <a:off x="0" y="0"/>
-            <a:ext cx="2971800" cy="457200"/>
-          </a:xfrm>
-          <a:prstGeom prst="rect">
-            <a:avLst/>
-          </a:prstGeom>
-        </p:spPr>
-        <p:txBody>
-          <a:bodyPr vert="horz" lIns="91440" tIns="45720" rIns="91440" bIns="45720" rtlCol="0"/>
-          <a:lstStyle>
-            <a:lvl1pPr algn="l">
-              <a:defRPr sz="1200"/>
-            </a:lvl1pPr>
-          </a:lstStyle>
-          <a:p>
-            <a:endParaRPr lang="en-US"/>
-          </a:p>
-        </p:txBody>
-      </p:sp>
-      <p:sp>
-        <p:nvSpPr>
-          <p:cNvPr id="3" name="Date Placeholder 2"/>
-          <p:cNvSpPr>
-            <a:spLocks noGrp="1"/>
-          </p:cNvSpPr>
-          <p:nvPr>
-            <p:ph type="dt" idx="1"/>
-          </p:nvPr>
-        </p:nvSpPr>
-        <p:spPr>
-          <a:xfrm>
-            <a:off x="3884613" y="0"/>
-            <a:ext cx="2971800" cy="457200"/>
-          </a:xfrm>
-          <a:prstGeom prst="rect">
-            <a:avLst/>
-          </a:prstGeom>
-        </p:spPr>
-        <p:txBody>
-          <a:bodyPr vert="horz" lIns="91440" tIns="45720" rIns="91440" bIns="45720" rtlCol="0"/>
-          <a:lstStyle>
-            <a:lvl1pPr algn="r">
-              <a:defRPr sz="1200"/>
-            </a:lvl1pPr>
-          </a:lstStyle>
-          <a:p>
-            <a:fld id="{0F89C1C7-3DCD-1040-A9CF-14679D8B5DDD}" type="datetimeFigureOut">
-              <a:rPr lang="en-US" smtClean="0"/>
-              <a:t>10/17/16</a:t>
-            </a:fld>
-            <a:endParaRPr lang="en-US"/>
-          </a:p>
-        </p:txBody>
-      </p:sp>
-      <p:sp>
-        <p:nvSpPr>
-          <p:cNvPr id="4" name="Slide Image Placeholder 3"/>
-          <p:cNvSpPr>
-            <a:spLocks noGrp="1" noRot="1" noChangeAspect="1"/>
-          </p:cNvSpPr>
-          <p:nvPr>
-            <p:ph type="sldImg" idx="2"/>
-          </p:nvPr>
-        </p:nvSpPr>
-        <p:spPr>
-          <a:xfrm>
-            <a:off x="1143000" y="685800"/>
-            <a:ext cx="4572000" cy="3429000"/>
-          </a:xfrm>
-          <a:prstGeom prst="rect">
-            <a:avLst/>
-          </a:prstGeom>
-          <a:noFill/>
-          <a:ln w="12700">
-            <a:solidFill>
-              <a:prstClr val="black"/>
-            </a:solidFill>
-          </a:ln>
-        </p:spPr>
-        <p:txBody>
-          <a:bodyPr vert="horz" lIns="91440" tIns="45720" rIns="91440" bIns="45720" rtlCol="0" anchor="ctr"/>
-          <a:lstStyle/>
-          <a:p>
-            <a:endParaRPr lang="en-US"/>
-          </a:p>
-        </p:txBody>
-      </p:sp>
-      <p:sp>
-        <p:nvSpPr>
-          <p:cNvPr id="5" name="Notes Placeholder 4"/>
-          <p:cNvSpPr>
-            <a:spLocks noGrp="1"/>
-          </p:cNvSpPr>
-          <p:nvPr>
-            <p:ph type="body" sz="quarter" idx="3"/>
-          </p:nvPr>
-        </p:nvSpPr>
-        <p:spPr>
-          <a:xfrm>
-            <a:off x="685800" y="4343400"/>
-            <a:ext cx="5486400" cy="4114800"/>
-          </a:xfrm>
-          <a:prstGeom prst="rect">
-            <a:avLst/>
-          </a:prstGeom>
-        </p:spPr>
-        <p:txBody>
-          <a:bodyPr vert="horz" lIns="91440" tIns="45720" rIns="91440" bIns="45720" rtlCol="0"/>
-          <a:lstStyle/>
-          <a:p>
-            <a:pPr lvl="0"/>
-            <a:r>
-              <a:rPr lang="en-US" smtClean="0"/>
-              <a:t>Click to edit Master text styles</a:t>
-            </a:r>
-          </a:p>
-          <a:p>
-            <a:pPr lvl="1"/>
-            <a:r>
-              <a:rPr lang="en-US" smtClean="0"/>
-              <a:t>Second level</a:t>
-            </a:r>
-          </a:p>
-          <a:p>
-            <a:pPr lvl="2"/>
-            <a:r>
-              <a:rPr lang="en-US" smtClean="0"/>
-              <a:t>Third level</a:t>
-            </a:r>
-          </a:p>
-          <a:p>
-            <a:pPr lvl="3"/>
-            <a:r>
-              <a:rPr lang="en-US" smtClean="0"/>
-              <a:t>Fourth level</a:t>
-            </a:r>
-          </a:p>
-          <a:p>
-            <a:pPr lvl="4"/>
-            <a:r>
-              <a:rPr lang="en-US" smtClean="0"/>
-              <a:t>Fifth level</a:t>
-            </a:r>
-            <a:endParaRPr lang="en-US"/>
-          </a:p>
-        </p:txBody>
-      </p:sp>
-      <p:sp>
-        <p:nvSpPr>
-          <p:cNvPr id="6" name="Footer Placeholder 5"/>
-          <p:cNvSpPr>
-            <a:spLocks noGrp="1"/>
-          </p:cNvSpPr>
-          <p:nvPr>
-            <p:ph type="ftr" sz="quarter" idx="4"/>
-          </p:nvPr>
-        </p:nvSpPr>
-        <p:spPr>
-          <a:xfrm>
-            <a:off x="0" y="8685213"/>
-            <a:ext cx="2971800" cy="457200"/>
-          </a:xfrm>
-          <a:prstGeom prst="rect">
-            <a:avLst/>
-          </a:prstGeom>
-        </p:spPr>
-        <p:txBody>
-          <a:bodyPr vert="horz" lIns="91440" tIns="45720" rIns="91440" bIns="45720" rtlCol="0" anchor="b"/>
-          <a:lstStyle>
-            <a:lvl1pPr algn="l">
-              <a:defRPr sz="1200"/>
-            </a:lvl1pPr>
-          </a:lstStyle>
-          <a:p>
-            <a:endParaRPr lang="en-US"/>
-          </a:p>
-        </p:txBody>
-      </p:sp>
-      <p:sp>
-        <p:nvSpPr>
-          <p:cNvPr id="7" name="Slide Number Placeholder 6"/>
-          <p:cNvSpPr>
-            <a:spLocks noGrp="1"/>
-          </p:cNvSpPr>
-          <p:nvPr>
-            <p:ph type="sldNum" sz="quarter" idx="5"/>
-          </p:nvPr>
-        </p:nvSpPr>
-        <p:spPr>
-          <a:xfrm>
-            <a:off x="3884613" y="8685213"/>
-            <a:ext cx="2971800" cy="457200"/>
-          </a:xfrm>
-          <a:prstGeom prst="rect">
-            <a:avLst/>
-          </a:prstGeom>
-        </p:spPr>
-        <p:txBody>
-          <a:bodyPr vert="horz" lIns="91440" tIns="45720" rIns="91440" bIns="45720" rtlCol="0" anchor="b"/>
-          <a:lstStyle>
-            <a:lvl1pPr algn="r">
-              <a:defRPr sz="1200"/>
-            </a:lvl1pPr>
-          </a:lstStyle>
-          <a:p>
-            <a:fld id="{BB5E49A5-4136-284D-997B-48E1D791AD67}" type="slidenum">
-              <a:rPr lang="en-US" smtClean="0"/>
-              <a:t>‹#›</a:t>
-            </a:fld>
-            <a:endParaRPr lang="en-US"/>
-          </a:p>
-        </p:txBody>
-      </p:sp>
     </p:spTree>
     <p:extLst>
       <p:ext uri="{BB962C8B-B14F-4D97-AF65-F5344CB8AC3E}">
-        <p14:creationId xmlns:p14="http://schemas.microsoft.com/office/powerpoint/2010/main" val="2623252185"/>
+        <p14:creationId xmlns:p14="http://schemas.microsoft.com/office/powerpoint/2010/main" val="4128442222"/>
       </p:ext>
     </p:extLst>
   </p:cSld>
   <p:clrMap bg1="lt1" tx1="dk1" bg2="lt2" tx2="dk2" accent1="accent1" accent2="accent2" accent3="accent3" accent4="accent4" accent5="accent5" accent6="accent6" hlink="hlink" folHlink="folHlink"/>
   <p:notesStyle>
-    <a:lvl1pPr marL="0" algn="l" defTabSz="457200" rtl="0" eaLnBrk="1" latinLnBrk="0" hangingPunct="1">
+    <a:lvl1pPr marL="0" algn="l" defTabSz="914400" rtl="0" eaLnBrk="1" latinLnBrk="0" hangingPunct="1">
       <a:defRPr sz="1200" kern="1200">
         <a:solidFill>
           <a:schemeClr val="tx1"/>
@@ -384,7 +178,7 @@
         <a:cs typeface="+mn-cs"/>
       </a:defRPr>
     </a:lvl1pPr>
-    <a:lvl2pPr marL="457200" algn="l" defTabSz="457200" rtl="0" eaLnBrk="1" latinLnBrk="0" hangingPunct="1">
+    <a:lvl2pPr marL="457200" algn="l" defTabSz="914400" rtl="0" eaLnBrk="1" latinLnBrk="0" hangingPunct="1">
       <a:defRPr sz="1200" kern="1200">
         <a:solidFill>
           <a:schemeClr val="tx1"/>
@@ -394,7 +188,7 @@
         <a:cs typeface="+mn-cs"/>
       </a:defRPr>
     </a:lvl2pPr>
-    <a:lvl3pPr marL="914400" algn="l" defTabSz="457200" rtl="0" eaLnBrk="1" latinLnBrk="0" hangingPunct="1">
+    <a:lvl3pPr marL="914400" algn="l" defTabSz="914400" rtl="0" eaLnBrk="1" latinLnBrk="0" hangingPunct="1">
       <a:defRPr sz="1200" kern="1200">
         <a:solidFill>
           <a:schemeClr val="tx1"/>
@@ -404,7 +198,7 @@
         <a:cs typeface="+mn-cs"/>
       </a:defRPr>
     </a:lvl3pPr>
-    <a:lvl4pPr marL="1371600" algn="l" defTabSz="457200" rtl="0" eaLnBrk="1" latinLnBrk="0" hangingPunct="1">
+    <a:lvl4pPr marL="1371600" algn="l" defTabSz="914400" rtl="0" eaLnBrk="1" latinLnBrk="0" hangingPunct="1">
       <a:defRPr sz="1200" kern="1200">
         <a:solidFill>
           <a:schemeClr val="tx1"/>
@@ -414,7 +208,7 @@
         <a:cs typeface="+mn-cs"/>
       </a:defRPr>
     </a:lvl4pPr>
-    <a:lvl5pPr marL="1828800" algn="l" defTabSz="457200" rtl="0" eaLnBrk="1" latinLnBrk="0" hangingPunct="1">
+    <a:lvl5pPr marL="1828800" algn="l" defTabSz="914400" rtl="0" eaLnBrk="1" latinLnBrk="0" hangingPunct="1">
       <a:defRPr sz="1200" kern="1200">
         <a:solidFill>
           <a:schemeClr val="tx1"/>
@@ -424,7 +218,7 @@
         <a:cs typeface="+mn-cs"/>
       </a:defRPr>
     </a:lvl5pPr>
-    <a:lvl6pPr marL="2286000" algn="l" defTabSz="457200" rtl="0" eaLnBrk="1" latinLnBrk="0" hangingPunct="1">
+    <a:lvl6pPr marL="2286000" algn="l" defTabSz="914400" rtl="0" eaLnBrk="1" latinLnBrk="0" hangingPunct="1">
       <a:defRPr sz="1200" kern="1200">
         <a:solidFill>
           <a:schemeClr val="tx1"/>
@@ -434,7 +228,7 @@
         <a:cs typeface="+mn-cs"/>
       </a:defRPr>
     </a:lvl6pPr>
-    <a:lvl7pPr marL="2743200" algn="l" defTabSz="457200" rtl="0" eaLnBrk="1" latinLnBrk="0" hangingPunct="1">
+    <a:lvl7pPr marL="2743200" algn="l" defTabSz="914400" rtl="0" eaLnBrk="1" latinLnBrk="0" hangingPunct="1">
       <a:defRPr sz="1200" kern="1200">
         <a:solidFill>
           <a:schemeClr val="tx1"/>
@@ -444,7 +238,7 @@
         <a:cs typeface="+mn-cs"/>
       </a:defRPr>
     </a:lvl7pPr>
-    <a:lvl8pPr marL="3200400" algn="l" defTabSz="457200" rtl="0" eaLnBrk="1" latinLnBrk="0" hangingPunct="1">
+    <a:lvl8pPr marL="3200400" algn="l" defTabSz="914400" rtl="0" eaLnBrk="1" latinLnBrk="0" hangingPunct="1">
       <a:defRPr sz="1200" kern="1200">
         <a:solidFill>
           <a:schemeClr val="tx1"/>
@@ -454,7 +248,7 @@
         <a:cs typeface="+mn-cs"/>
       </a:defRPr>
     </a:lvl8pPr>
-    <a:lvl9pPr marL="3657600" algn="l" defTabSz="457200" rtl="0" eaLnBrk="1" latinLnBrk="0" hangingPunct="1">
+    <a:lvl9pPr marL="3657600" algn="l" defTabSz="914400" rtl="0" eaLnBrk="1" latinLnBrk="0" hangingPunct="1">
       <a:defRPr sz="1200" kern="1200">
         <a:solidFill>
           <a:schemeClr val="tx1"/>
@@ -469,7 +263,7 @@
 </file>
 
 <file path=ppt/notesSlides/notesSlide1.xml><?xml version="1.0" encoding="utf-8"?>
-<p:notes xmlns:a="http://schemas.openxmlformats.org/drawingml/2006/main" xmlns:p="http://schemas.openxmlformats.org/presentationml/2006/main" xmlns:r="http://schemas.openxmlformats.org/officeDocument/2006/relationships">
+<p:notes xmlns:a="http://schemas.openxmlformats.org/drawingml/2006/main" xmlns:r="http://schemas.openxmlformats.org/officeDocument/2006/relationships" xmlns:p="http://schemas.openxmlformats.org/presentationml/2006/main">
   <p:cSld>
     <p:spTree>
       <p:nvGrpSpPr>
@@ -489,7 +283,7 @@
         <p:nvSpPr>
           <p:cNvPr id="2" name="Slide Image Placeholder 1"/>
           <p:cNvSpPr>
-            <a:spLocks noGrp="1"/>
+            <a:spLocks noGrp="1" noRot="1" noChangeAspect="1"/>
           </p:cNvSpPr>
           <p:nvPr>
             <p:ph type="sldImg" idx="2"/>
@@ -504,7 +298,7 @@
             <a:spLocks noGrp="1"/>
           </p:cNvSpPr>
           <p:nvPr>
-            <p:ph type="body" idx="3" sz="quarter"/>
+            <p:ph type="body" sz="quarter" idx="3"/>
           </p:nvPr>
         </p:nvSpPr>
         <p:spPr/>
@@ -513,25 +307,443 @@
           <a:lstStyle/>
           <a:p>
             <a:r>
-              <a:t>Objetivo: quebrar o gelo e fazer a promessa da conversa. ≈ 40s</a:t>
-            </a:r>
-          </a:p>
-          <a:p/>
-          <a:p>
-            <a:r>
-              <a:t>Obrigado pelo tempo de vocês. Eu sou [seu nome], da Dreamy.</a:t>
-            </a:r>
-          </a:p>
-          <a:p/>
-          <a:p>
-            <a:r>
-              <a:t>Antes de qualquer slide bonito, uma promessa: nos próximos dez minutos eu não vou falar de tecnologia pela tecnologia. Eu vou falar do negócio de vocês — de onde ele trava hoje e de onde ele pode ganhar mais.</a:t>
-            </a:r>
-          </a:p>
-          <a:p/>
-          <a:p>
-            <a:r>
-              <a:t>A Dreamy constrói software sob medida e agentes de IA. Mas o nosso ponto de partida é sempre o mesmo, e está aí embaixo no slide: começamos pelo problema. A tecnologia vem depois.</a:t>
+              <a:rPr dirty="0" err="1"/>
+              <a:t>Objetivo</a:t>
+            </a:r>
+            <a:r>
+              <a:rPr dirty="0"/>
+              <a:t>: </a:t>
+            </a:r>
+            <a:r>
+              <a:rPr dirty="0" err="1"/>
+              <a:t>quebrar</a:t>
+            </a:r>
+            <a:r>
+              <a:rPr dirty="0"/>
+              <a:t> o </a:t>
+            </a:r>
+            <a:r>
+              <a:rPr dirty="0" err="1"/>
+              <a:t>gelo</a:t>
+            </a:r>
+            <a:r>
+              <a:rPr dirty="0"/>
+              <a:t> e </a:t>
+            </a:r>
+            <a:r>
+              <a:rPr dirty="0" err="1"/>
+              <a:t>fazer</a:t>
+            </a:r>
+            <a:r>
+              <a:rPr dirty="0"/>
+              <a:t> a </a:t>
+            </a:r>
+            <a:r>
+              <a:rPr dirty="0" err="1"/>
+              <a:t>promessa</a:t>
+            </a:r>
+            <a:r>
+              <a:rPr dirty="0"/>
+              <a:t> da conversa. ≈ 40s</a:t>
+            </a:r>
+          </a:p>
+          <a:p>
+            <a:endParaRPr dirty="0"/>
+          </a:p>
+          <a:p>
+            <a:r>
+              <a:rPr dirty="0" err="1"/>
+              <a:t>Obrigado</a:t>
+            </a:r>
+            <a:r>
+              <a:rPr dirty="0"/>
+              <a:t> </a:t>
+            </a:r>
+            <a:r>
+              <a:rPr dirty="0" err="1"/>
+              <a:t>pelo</a:t>
+            </a:r>
+            <a:r>
+              <a:rPr dirty="0"/>
+              <a:t> tempo de </a:t>
+            </a:r>
+            <a:r>
+              <a:rPr dirty="0" err="1"/>
+              <a:t>vocês</a:t>
+            </a:r>
+            <a:r>
+              <a:rPr dirty="0"/>
+              <a:t>. Eu sou [</a:t>
+            </a:r>
+            <a:r>
+              <a:rPr dirty="0" err="1"/>
+              <a:t>seu</a:t>
+            </a:r>
+            <a:r>
+              <a:rPr dirty="0"/>
+              <a:t> </a:t>
+            </a:r>
+            <a:r>
+              <a:rPr dirty="0" err="1"/>
+              <a:t>nome</a:t>
+            </a:r>
+            <a:r>
+              <a:rPr dirty="0"/>
+              <a:t>], da Dreamy.</a:t>
+            </a:r>
+          </a:p>
+          <a:p>
+            <a:endParaRPr dirty="0"/>
+          </a:p>
+          <a:p>
+            <a:r>
+              <a:rPr dirty="0"/>
+              <a:t>Antes de </a:t>
+            </a:r>
+            <a:r>
+              <a:rPr dirty="0" err="1"/>
+              <a:t>qualquer</a:t>
+            </a:r>
+            <a:r>
+              <a:rPr dirty="0"/>
+              <a:t> slide bonito, </a:t>
+            </a:r>
+            <a:r>
+              <a:rPr dirty="0" err="1"/>
+              <a:t>uma</a:t>
+            </a:r>
+            <a:r>
+              <a:rPr dirty="0"/>
+              <a:t> </a:t>
+            </a:r>
+            <a:r>
+              <a:rPr dirty="0" err="1"/>
+              <a:t>promessa</a:t>
+            </a:r>
+            <a:r>
+              <a:rPr dirty="0"/>
+              <a:t>: </a:t>
+            </a:r>
+            <a:r>
+              <a:rPr dirty="0" err="1"/>
+              <a:t>nos</a:t>
+            </a:r>
+            <a:r>
+              <a:rPr dirty="0"/>
+              <a:t> </a:t>
+            </a:r>
+            <a:r>
+              <a:rPr dirty="0" err="1"/>
+              <a:t>próximos</a:t>
+            </a:r>
+            <a:r>
+              <a:rPr dirty="0"/>
+              <a:t> </a:t>
+            </a:r>
+            <a:r>
+              <a:rPr dirty="0" err="1"/>
+              <a:t>dez</a:t>
+            </a:r>
+            <a:r>
+              <a:rPr dirty="0"/>
+              <a:t> </a:t>
+            </a:r>
+            <a:r>
+              <a:rPr dirty="0" err="1"/>
+              <a:t>minutos</a:t>
+            </a:r>
+            <a:r>
+              <a:rPr dirty="0"/>
+              <a:t> </a:t>
+            </a:r>
+            <a:r>
+              <a:rPr dirty="0" err="1"/>
+              <a:t>eu</a:t>
+            </a:r>
+            <a:r>
+              <a:rPr dirty="0"/>
+              <a:t> </a:t>
+            </a:r>
+            <a:r>
+              <a:rPr dirty="0" err="1"/>
+              <a:t>não</a:t>
+            </a:r>
+            <a:r>
+              <a:rPr dirty="0"/>
+              <a:t> </a:t>
+            </a:r>
+            <a:r>
+              <a:rPr dirty="0" err="1"/>
+              <a:t>vou</a:t>
+            </a:r>
+            <a:r>
+              <a:rPr dirty="0"/>
+              <a:t> </a:t>
+            </a:r>
+            <a:r>
+              <a:rPr dirty="0" err="1"/>
+              <a:t>falar</a:t>
+            </a:r>
+            <a:r>
+              <a:rPr dirty="0"/>
+              <a:t> de </a:t>
+            </a:r>
+            <a:r>
+              <a:rPr dirty="0" err="1"/>
+              <a:t>tecnologia</a:t>
+            </a:r>
+            <a:r>
+              <a:rPr dirty="0"/>
+              <a:t> pela </a:t>
+            </a:r>
+            <a:r>
+              <a:rPr dirty="0" err="1"/>
+              <a:t>tecnologia</a:t>
+            </a:r>
+            <a:r>
+              <a:rPr dirty="0"/>
+              <a:t>. Eu </a:t>
+            </a:r>
+            <a:r>
+              <a:rPr dirty="0" err="1"/>
+              <a:t>vou</a:t>
+            </a:r>
+            <a:r>
+              <a:rPr dirty="0"/>
+              <a:t> </a:t>
+            </a:r>
+            <a:r>
+              <a:rPr dirty="0" err="1"/>
+              <a:t>falar</a:t>
+            </a:r>
+            <a:r>
+              <a:rPr dirty="0"/>
+              <a:t> do </a:t>
+            </a:r>
+            <a:r>
+              <a:rPr dirty="0" err="1"/>
+              <a:t>negócio</a:t>
+            </a:r>
+            <a:r>
+              <a:rPr dirty="0"/>
+              <a:t> de </a:t>
+            </a:r>
+            <a:r>
+              <a:rPr dirty="0" err="1"/>
+              <a:t>vocês</a:t>
+            </a:r>
+            <a:r>
+              <a:rPr dirty="0"/>
+              <a:t> — de </a:t>
+            </a:r>
+            <a:r>
+              <a:rPr dirty="0" err="1"/>
+              <a:t>onde</a:t>
+            </a:r>
+            <a:r>
+              <a:rPr dirty="0"/>
+              <a:t> </a:t>
+            </a:r>
+            <a:r>
+              <a:rPr dirty="0" err="1"/>
+              <a:t>ele</a:t>
+            </a:r>
+            <a:r>
+              <a:rPr dirty="0"/>
+              <a:t> </a:t>
+            </a:r>
+            <a:r>
+              <a:rPr dirty="0" err="1"/>
+              <a:t>trava</a:t>
+            </a:r>
+            <a:r>
+              <a:rPr dirty="0"/>
+              <a:t> </a:t>
+            </a:r>
+            <a:r>
+              <a:rPr dirty="0" err="1"/>
+              <a:t>hoje</a:t>
+            </a:r>
+            <a:r>
+              <a:rPr dirty="0"/>
+              <a:t> e de </a:t>
+            </a:r>
+            <a:r>
+              <a:rPr dirty="0" err="1"/>
+              <a:t>onde</a:t>
+            </a:r>
+            <a:r>
+              <a:rPr dirty="0"/>
+              <a:t> </a:t>
+            </a:r>
+            <a:r>
+              <a:rPr dirty="0" err="1"/>
+              <a:t>ele</a:t>
+            </a:r>
+            <a:r>
+              <a:rPr dirty="0"/>
+              <a:t> </a:t>
+            </a:r>
+            <a:r>
+              <a:rPr dirty="0" err="1"/>
+              <a:t>pode</a:t>
+            </a:r>
+            <a:r>
+              <a:rPr dirty="0"/>
+              <a:t> </a:t>
+            </a:r>
+            <a:r>
+              <a:rPr dirty="0" err="1"/>
+              <a:t>ganhar</a:t>
+            </a:r>
+            <a:r>
+              <a:rPr dirty="0"/>
+              <a:t> </a:t>
+            </a:r>
+            <a:r>
+              <a:rPr dirty="0" err="1"/>
+              <a:t>mais</a:t>
+            </a:r>
+            <a:r>
+              <a:rPr dirty="0"/>
+              <a:t>.</a:t>
+            </a:r>
+          </a:p>
+          <a:p>
+            <a:endParaRPr dirty="0"/>
+          </a:p>
+          <a:p>
+            <a:r>
+              <a:rPr dirty="0"/>
+              <a:t>A Dreamy </a:t>
+            </a:r>
+            <a:r>
+              <a:rPr dirty="0" err="1"/>
+              <a:t>constrói</a:t>
+            </a:r>
+            <a:r>
+              <a:rPr dirty="0"/>
+              <a:t> software sob </a:t>
+            </a:r>
+            <a:r>
+              <a:rPr dirty="0" err="1"/>
+              <a:t>medida</a:t>
+            </a:r>
+            <a:r>
+              <a:rPr dirty="0"/>
+              <a:t> e </a:t>
+            </a:r>
+            <a:r>
+              <a:rPr dirty="0" err="1"/>
+              <a:t>agentes</a:t>
+            </a:r>
+            <a:r>
+              <a:rPr dirty="0"/>
+              <a:t> de IA. Mas o </a:t>
+            </a:r>
+            <a:r>
+              <a:rPr dirty="0" err="1"/>
+              <a:t>nosso</a:t>
+            </a:r>
+            <a:r>
+              <a:rPr dirty="0"/>
+              <a:t> </a:t>
+            </a:r>
+            <a:r>
+              <a:rPr dirty="0" err="1"/>
+              <a:t>ponto</a:t>
+            </a:r>
+            <a:r>
+              <a:rPr dirty="0"/>
+              <a:t> de </a:t>
+            </a:r>
+            <a:r>
+              <a:rPr dirty="0" err="1"/>
+              <a:t>partida</a:t>
+            </a:r>
+            <a:r>
+              <a:rPr dirty="0"/>
+              <a:t> é sempre o </a:t>
+            </a:r>
+            <a:r>
+              <a:rPr dirty="0" err="1"/>
+              <a:t>mesmo</a:t>
+            </a:r>
+            <a:r>
+              <a:rPr dirty="0"/>
+              <a:t>, e </a:t>
+            </a:r>
+            <a:r>
+              <a:rPr dirty="0" err="1"/>
+              <a:t>está</a:t>
+            </a:r>
+            <a:r>
+              <a:rPr dirty="0"/>
+              <a:t> </a:t>
+            </a:r>
+            <a:r>
+              <a:rPr dirty="0" err="1"/>
+              <a:t>aí</a:t>
+            </a:r>
+            <a:r>
+              <a:rPr dirty="0"/>
+              <a:t> </a:t>
+            </a:r>
+            <a:r>
+              <a:rPr dirty="0" err="1"/>
+              <a:t>embaixo</a:t>
+            </a:r>
+            <a:r>
+              <a:rPr dirty="0"/>
+              <a:t> no slide: </a:t>
+            </a:r>
+            <a:r>
+              <a:rPr dirty="0" err="1"/>
+              <a:t>começamos</a:t>
+            </a:r>
+            <a:r>
+              <a:rPr dirty="0"/>
+              <a:t> </a:t>
+            </a:r>
+            <a:r>
+              <a:rPr dirty="0" err="1"/>
+              <a:t>pelo</a:t>
+            </a:r>
+            <a:r>
+              <a:rPr dirty="0"/>
+              <a:t> </a:t>
+            </a:r>
+            <a:r>
+              <a:rPr dirty="0" err="1"/>
+              <a:t>problema</a:t>
+            </a:r>
+            <a:r>
+              <a:rPr dirty="0"/>
+              <a:t>. A </a:t>
+            </a:r>
+            <a:r>
+              <a:rPr dirty="0" err="1"/>
+              <a:t>tecnologia</a:t>
+            </a:r>
+            <a:r>
+              <a:rPr dirty="0"/>
+              <a:t> </a:t>
+            </a:r>
+            <a:r>
+              <a:rPr dirty="0" err="1"/>
+              <a:t>vem</a:t>
+            </a:r>
+            <a:r>
+              <a:rPr dirty="0"/>
+              <a:t> </a:t>
+            </a:r>
+            <a:r>
+              <a:rPr dirty="0" err="1"/>
+              <a:t>depois</a:t>
+            </a:r>
+            <a:r>
+              <a:rPr dirty="0"/>
+              <a:t>.</a:t>
             </a:r>
           </a:p>
         </p:txBody>
@@ -543,7 +755,7 @@
             <a:spLocks noGrp="1"/>
           </p:cNvSpPr>
           <p:nvPr>
-            <p:ph type="sldNum" idx="5" sz="quarter"/>
+            <p:ph type="sldNum" sz="quarter" idx="5"/>
           </p:nvPr>
         </p:nvSpPr>
         <p:spPr/>
@@ -557,7 +769,7 @@
 </file>
 
 <file path=ppt/notesSlides/notesSlide10.xml><?xml version="1.0" encoding="utf-8"?>
-<p:notes xmlns:a="http://schemas.openxmlformats.org/drawingml/2006/main" xmlns:p="http://schemas.openxmlformats.org/presentationml/2006/main" xmlns:r="http://schemas.openxmlformats.org/officeDocument/2006/relationships">
+<p:notes xmlns:a="http://schemas.openxmlformats.org/drawingml/2006/main" xmlns:r="http://schemas.openxmlformats.org/officeDocument/2006/relationships" xmlns:p="http://schemas.openxmlformats.org/presentationml/2006/main">
   <p:cSld>
     <p:spTree>
       <p:nvGrpSpPr>
@@ -577,7 +789,7 @@
         <p:nvSpPr>
           <p:cNvPr id="2" name="Slide Image Placeholder 1"/>
           <p:cNvSpPr>
-            <a:spLocks noGrp="1"/>
+            <a:spLocks noGrp="1" noRot="1" noChangeAspect="1"/>
           </p:cNvSpPr>
           <p:nvPr>
             <p:ph type="sldImg" idx="2"/>
@@ -592,7 +804,7 @@
             <a:spLocks noGrp="1"/>
           </p:cNvSpPr>
           <p:nvPr>
-            <p:ph type="body" idx="3" sz="quarter"/>
+            <p:ph type="body" sz="quarter" idx="3"/>
           </p:nvPr>
         </p:nvSpPr>
         <p:spPr/>
@@ -601,25 +813,523 @@
           <a:lstStyle/>
           <a:p>
             <a:r>
-              <a:t>Objetivo: reduzir o risco percebido — processo claro, ciclos curtos, sem sumiço. ≈ 45s</a:t>
-            </a:r>
-          </a:p>
-          <a:p/>
-          <a:p>
-            <a:r>
-              <a:t>E como é trabalhar com a gente? Cinco passos, sem mistério.</a:t>
-            </a:r>
-          </a:p>
-          <a:p/>
-          <a:p>
-            <a:r>
-              <a:t>Entender: a gente senta junto e mapeia problema, impacto e contexto. Desenhar: solução, experiência, arquitetura. Construir: em ciclos curtos — você vê o software crescendo e valida no caminho; a gente não some seis meses para voltar com uma surpresa. Implantar: na operação real, com quem usa de verdade. E evoluir: porque software bom não termina — acompanha o negócio.</a:t>
-            </a:r>
-          </a:p>
-          <a:p/>
-          <a:p>
-            <a:r>
-              <a:t>Em cada ciclo você sabe o que está sendo feito, por quê, e o que vem depois.</a:t>
+              <a:rPr dirty="0" err="1"/>
+              <a:t>Objetivo</a:t>
+            </a:r>
+            <a:r>
+              <a:rPr dirty="0"/>
+              <a:t>: </a:t>
+            </a:r>
+            <a:r>
+              <a:rPr dirty="0" err="1"/>
+              <a:t>reduzir</a:t>
+            </a:r>
+            <a:r>
+              <a:rPr dirty="0"/>
+              <a:t> o </a:t>
+            </a:r>
+            <a:r>
+              <a:rPr dirty="0" err="1"/>
+              <a:t>risco</a:t>
+            </a:r>
+            <a:r>
+              <a:rPr dirty="0"/>
+              <a:t> </a:t>
+            </a:r>
+            <a:r>
+              <a:rPr dirty="0" err="1"/>
+              <a:t>percebido</a:t>
+            </a:r>
+            <a:r>
+              <a:rPr dirty="0"/>
+              <a:t> — </a:t>
+            </a:r>
+            <a:r>
+              <a:rPr dirty="0" err="1"/>
+              <a:t>processo</a:t>
+            </a:r>
+            <a:r>
+              <a:rPr dirty="0"/>
+              <a:t> claro, </a:t>
+            </a:r>
+            <a:r>
+              <a:rPr dirty="0" err="1"/>
+              <a:t>ciclos</a:t>
+            </a:r>
+            <a:r>
+              <a:rPr dirty="0"/>
+              <a:t> </a:t>
+            </a:r>
+            <a:r>
+              <a:rPr dirty="0" err="1"/>
+              <a:t>curtos</a:t>
+            </a:r>
+            <a:r>
+              <a:rPr dirty="0"/>
+              <a:t>, </a:t>
+            </a:r>
+            <a:r>
+              <a:rPr dirty="0" err="1"/>
+              <a:t>sem</a:t>
+            </a:r>
+            <a:r>
+              <a:rPr dirty="0"/>
+              <a:t> </a:t>
+            </a:r>
+            <a:r>
+              <a:rPr dirty="0" err="1"/>
+              <a:t>sumiço</a:t>
+            </a:r>
+            <a:r>
+              <a:rPr dirty="0"/>
+              <a:t>. ≈ 45s</a:t>
+            </a:r>
+          </a:p>
+          <a:p>
+            <a:endParaRPr dirty="0"/>
+          </a:p>
+          <a:p>
+            <a:r>
+              <a:rPr dirty="0"/>
+              <a:t>E </a:t>
+            </a:r>
+            <a:r>
+              <a:rPr dirty="0" err="1"/>
+              <a:t>como</a:t>
+            </a:r>
+            <a:r>
+              <a:rPr dirty="0"/>
+              <a:t> é </a:t>
+            </a:r>
+            <a:r>
+              <a:rPr dirty="0" err="1"/>
+              <a:t>trabalhar</a:t>
+            </a:r>
+            <a:r>
+              <a:rPr dirty="0"/>
+              <a:t> com a </a:t>
+            </a:r>
+            <a:r>
+              <a:rPr dirty="0" err="1"/>
+              <a:t>gente</a:t>
+            </a:r>
+            <a:r>
+              <a:rPr dirty="0"/>
+              <a:t>? Cinco </a:t>
+            </a:r>
+            <a:r>
+              <a:rPr dirty="0" err="1"/>
+              <a:t>passos</a:t>
+            </a:r>
+            <a:r>
+              <a:rPr dirty="0"/>
+              <a:t>, </a:t>
+            </a:r>
+            <a:r>
+              <a:rPr dirty="0" err="1"/>
+              <a:t>sem</a:t>
+            </a:r>
+            <a:r>
+              <a:rPr dirty="0"/>
+              <a:t> </a:t>
+            </a:r>
+            <a:r>
+              <a:rPr dirty="0" err="1"/>
+              <a:t>mistério</a:t>
+            </a:r>
+            <a:r>
+              <a:rPr dirty="0"/>
+              <a:t>.</a:t>
+            </a:r>
+          </a:p>
+          <a:p>
+            <a:endParaRPr dirty="0"/>
+          </a:p>
+          <a:p>
+            <a:r>
+              <a:rPr dirty="0" err="1"/>
+              <a:t>Entender</a:t>
+            </a:r>
+            <a:r>
+              <a:rPr dirty="0"/>
+              <a:t>: a </a:t>
+            </a:r>
+            <a:r>
+              <a:rPr dirty="0" err="1"/>
+              <a:t>gente</a:t>
+            </a:r>
+            <a:r>
+              <a:rPr dirty="0"/>
+              <a:t> </a:t>
+            </a:r>
+            <a:r>
+              <a:rPr dirty="0" err="1"/>
+              <a:t>senta</a:t>
+            </a:r>
+            <a:r>
+              <a:rPr dirty="0"/>
+              <a:t> junto e </a:t>
+            </a:r>
+            <a:r>
+              <a:rPr dirty="0" err="1"/>
+              <a:t>mapeia</a:t>
+            </a:r>
+            <a:r>
+              <a:rPr dirty="0"/>
+              <a:t> </a:t>
+            </a:r>
+            <a:r>
+              <a:rPr dirty="0" err="1"/>
+              <a:t>problema</a:t>
+            </a:r>
+            <a:r>
+              <a:rPr dirty="0"/>
+              <a:t>, </a:t>
+            </a:r>
+            <a:r>
+              <a:rPr dirty="0" err="1"/>
+              <a:t>impacto</a:t>
+            </a:r>
+            <a:r>
+              <a:rPr dirty="0"/>
+              <a:t> e </a:t>
+            </a:r>
+            <a:r>
+              <a:rPr dirty="0" err="1"/>
+              <a:t>contexto</a:t>
+            </a:r>
+            <a:r>
+              <a:rPr dirty="0"/>
+              <a:t>. </a:t>
+            </a:r>
+            <a:r>
+              <a:rPr dirty="0" err="1"/>
+              <a:t>Desenhar</a:t>
+            </a:r>
+            <a:r>
+              <a:rPr dirty="0"/>
+              <a:t>: </a:t>
+            </a:r>
+            <a:r>
+              <a:rPr dirty="0" err="1"/>
+              <a:t>solução</a:t>
+            </a:r>
+            <a:r>
+              <a:rPr dirty="0"/>
+              <a:t>, </a:t>
+            </a:r>
+            <a:r>
+              <a:rPr dirty="0" err="1"/>
+              <a:t>experiência</a:t>
+            </a:r>
+            <a:r>
+              <a:rPr dirty="0"/>
+              <a:t>, </a:t>
+            </a:r>
+            <a:r>
+              <a:rPr dirty="0" err="1"/>
+              <a:t>arquitetura</a:t>
+            </a:r>
+            <a:r>
+              <a:rPr dirty="0"/>
+              <a:t>. </a:t>
+            </a:r>
+            <a:r>
+              <a:rPr dirty="0" err="1"/>
+              <a:t>Construir</a:t>
+            </a:r>
+            <a:r>
+              <a:rPr dirty="0"/>
+              <a:t>: </a:t>
+            </a:r>
+            <a:r>
+              <a:rPr dirty="0" err="1"/>
+              <a:t>em</a:t>
+            </a:r>
+            <a:r>
+              <a:rPr dirty="0"/>
+              <a:t> </a:t>
+            </a:r>
+            <a:r>
+              <a:rPr dirty="0" err="1"/>
+              <a:t>ciclos</a:t>
+            </a:r>
+            <a:r>
+              <a:rPr dirty="0"/>
+              <a:t> </a:t>
+            </a:r>
+            <a:r>
+              <a:rPr dirty="0" err="1"/>
+              <a:t>curtos</a:t>
+            </a:r>
+            <a:r>
+              <a:rPr dirty="0"/>
+              <a:t> — </a:t>
+            </a:r>
+            <a:r>
+              <a:rPr dirty="0" err="1"/>
+              <a:t>você</a:t>
+            </a:r>
+            <a:r>
+              <a:rPr dirty="0"/>
+              <a:t> </a:t>
+            </a:r>
+            <a:r>
+              <a:rPr dirty="0" err="1"/>
+              <a:t>vê</a:t>
+            </a:r>
+            <a:r>
+              <a:rPr dirty="0"/>
+              <a:t> o software crescendo e </a:t>
+            </a:r>
+            <a:r>
+              <a:rPr dirty="0" err="1"/>
+              <a:t>valida</a:t>
+            </a:r>
+            <a:r>
+              <a:rPr dirty="0"/>
+              <a:t> no </a:t>
+            </a:r>
+            <a:r>
+              <a:rPr dirty="0" err="1"/>
+              <a:t>caminho</a:t>
+            </a:r>
+            <a:r>
+              <a:rPr dirty="0"/>
+              <a:t>; a </a:t>
+            </a:r>
+            <a:r>
+              <a:rPr dirty="0" err="1"/>
+              <a:t>gente</a:t>
+            </a:r>
+            <a:r>
+              <a:rPr dirty="0"/>
+              <a:t> </a:t>
+            </a:r>
+            <a:r>
+              <a:rPr dirty="0" err="1"/>
+              <a:t>não</a:t>
+            </a:r>
+            <a:r>
+              <a:rPr dirty="0"/>
+              <a:t> some seis meses para </a:t>
+            </a:r>
+            <a:r>
+              <a:rPr dirty="0" err="1"/>
+              <a:t>voltar</a:t>
+            </a:r>
+            <a:r>
+              <a:rPr dirty="0"/>
+              <a:t> com </a:t>
+            </a:r>
+            <a:r>
+              <a:rPr dirty="0" err="1"/>
+              <a:t>uma</a:t>
+            </a:r>
+            <a:r>
+              <a:rPr dirty="0"/>
+              <a:t> </a:t>
+            </a:r>
+            <a:r>
+              <a:rPr dirty="0" err="1"/>
+              <a:t>surpresa</a:t>
+            </a:r>
+            <a:r>
+              <a:rPr dirty="0"/>
+              <a:t>. </a:t>
+            </a:r>
+            <a:r>
+              <a:rPr dirty="0" err="1"/>
+              <a:t>Implantar</a:t>
+            </a:r>
+            <a:r>
+              <a:rPr dirty="0"/>
+              <a:t>: </a:t>
+            </a:r>
+            <a:r>
+              <a:rPr dirty="0" err="1"/>
+              <a:t>na</a:t>
+            </a:r>
+            <a:r>
+              <a:rPr dirty="0"/>
+              <a:t> </a:t>
+            </a:r>
+            <a:r>
+              <a:rPr dirty="0" err="1"/>
+              <a:t>operação</a:t>
+            </a:r>
+            <a:r>
+              <a:rPr dirty="0"/>
+              <a:t> real, com quem </a:t>
+            </a:r>
+            <a:r>
+              <a:rPr dirty="0" err="1"/>
+              <a:t>usa</a:t>
+            </a:r>
+            <a:r>
+              <a:rPr dirty="0"/>
+              <a:t> de </a:t>
+            </a:r>
+            <a:r>
+              <a:rPr dirty="0" err="1"/>
+              <a:t>verdade</a:t>
+            </a:r>
+            <a:r>
+              <a:rPr dirty="0"/>
+              <a:t>. E </a:t>
+            </a:r>
+            <a:r>
+              <a:rPr dirty="0" err="1"/>
+              <a:t>evoluir</a:t>
+            </a:r>
+            <a:r>
+              <a:rPr dirty="0"/>
+              <a:t>: </a:t>
+            </a:r>
+            <a:r>
+              <a:rPr dirty="0" err="1"/>
+              <a:t>porque</a:t>
+            </a:r>
+            <a:r>
+              <a:rPr dirty="0"/>
+              <a:t> software </a:t>
+            </a:r>
+            <a:r>
+              <a:rPr dirty="0" err="1"/>
+              <a:t>bom</a:t>
+            </a:r>
+            <a:r>
+              <a:rPr dirty="0"/>
+              <a:t> </a:t>
+            </a:r>
+            <a:r>
+              <a:rPr dirty="0" err="1"/>
+              <a:t>não</a:t>
+            </a:r>
+            <a:r>
+              <a:rPr dirty="0"/>
+              <a:t> termina — </a:t>
+            </a:r>
+            <a:r>
+              <a:rPr dirty="0" err="1"/>
+              <a:t>acompanha</a:t>
+            </a:r>
+            <a:r>
+              <a:rPr dirty="0"/>
+              <a:t> o </a:t>
+            </a:r>
+            <a:r>
+              <a:rPr dirty="0" err="1"/>
+              <a:t>negócio</a:t>
+            </a:r>
+            <a:r>
+              <a:rPr dirty="0"/>
+              <a:t>.</a:t>
+            </a:r>
+          </a:p>
+          <a:p>
+            <a:endParaRPr dirty="0"/>
+          </a:p>
+          <a:p>
+            <a:r>
+              <a:rPr dirty="0"/>
+              <a:t>Em </a:t>
+            </a:r>
+            <a:r>
+              <a:rPr dirty="0" err="1"/>
+              <a:t>cada</a:t>
+            </a:r>
+            <a:r>
+              <a:rPr dirty="0"/>
+              <a:t> </a:t>
+            </a:r>
+            <a:r>
+              <a:rPr dirty="0" err="1"/>
+              <a:t>ciclo</a:t>
+            </a:r>
+            <a:r>
+              <a:rPr dirty="0"/>
+              <a:t> </a:t>
+            </a:r>
+            <a:r>
+              <a:rPr dirty="0" err="1"/>
+              <a:t>você</a:t>
+            </a:r>
+            <a:r>
+              <a:rPr dirty="0"/>
+              <a:t> sabe o </a:t>
+            </a:r>
+            <a:r>
+              <a:rPr dirty="0" err="1"/>
+              <a:t>que</a:t>
+            </a:r>
+            <a:r>
+              <a:rPr dirty="0"/>
+              <a:t> </a:t>
+            </a:r>
+            <a:r>
+              <a:rPr dirty="0" err="1"/>
+              <a:t>está</a:t>
+            </a:r>
+            <a:r>
+              <a:rPr dirty="0"/>
+              <a:t> </a:t>
+            </a:r>
+            <a:r>
+              <a:rPr dirty="0" err="1"/>
+              <a:t>sendo</a:t>
+            </a:r>
+            <a:r>
+              <a:rPr dirty="0"/>
+              <a:t> </a:t>
+            </a:r>
+            <a:r>
+              <a:rPr dirty="0" err="1"/>
+              <a:t>feito</a:t>
+            </a:r>
+            <a:r>
+              <a:rPr dirty="0"/>
+              <a:t>, </a:t>
+            </a:r>
+            <a:r>
+              <a:rPr dirty="0" err="1"/>
+              <a:t>por</a:t>
+            </a:r>
+            <a:r>
+              <a:rPr dirty="0"/>
+              <a:t> </a:t>
+            </a:r>
+            <a:r>
+              <a:rPr dirty="0" err="1"/>
+              <a:t>quê</a:t>
+            </a:r>
+            <a:r>
+              <a:rPr dirty="0"/>
+              <a:t>, e o </a:t>
+            </a:r>
+            <a:r>
+              <a:rPr dirty="0" err="1"/>
+              <a:t>que</a:t>
+            </a:r>
+            <a:r>
+              <a:rPr dirty="0"/>
+              <a:t> </a:t>
+            </a:r>
+            <a:r>
+              <a:rPr dirty="0" err="1"/>
+              <a:t>vem</a:t>
+            </a:r>
+            <a:r>
+              <a:rPr dirty="0"/>
+              <a:t> </a:t>
+            </a:r>
+            <a:r>
+              <a:rPr dirty="0" err="1"/>
+              <a:t>depois</a:t>
+            </a:r>
+            <a:r>
+              <a:rPr dirty="0"/>
+              <a:t>.</a:t>
             </a:r>
           </a:p>
         </p:txBody>
@@ -631,7 +1341,7 @@
             <a:spLocks noGrp="1"/>
           </p:cNvSpPr>
           <p:nvPr>
-            <p:ph type="sldNum" idx="5" sz="quarter"/>
+            <p:ph type="sldNum" sz="quarter" idx="5"/>
           </p:nvPr>
         </p:nvSpPr>
         <p:spPr/>
@@ -645,7 +1355,7 @@
 </file>
 
 <file path=ppt/notesSlides/notesSlide11.xml><?xml version="1.0" encoding="utf-8"?>
-<p:notes xmlns:a="http://schemas.openxmlformats.org/drawingml/2006/main" xmlns:p="http://schemas.openxmlformats.org/presentationml/2006/main" xmlns:r="http://schemas.openxmlformats.org/officeDocument/2006/relationships">
+<p:notes xmlns:a="http://schemas.openxmlformats.org/drawingml/2006/main" xmlns:r="http://schemas.openxmlformats.org/officeDocument/2006/relationships" xmlns:p="http://schemas.openxmlformats.org/presentationml/2006/main">
   <p:cSld>
     <p:spTree>
       <p:nvGrpSpPr>
@@ -665,7 +1375,7 @@
         <p:nvSpPr>
           <p:cNvPr id="2" name="Slide Image Placeholder 1"/>
           <p:cNvSpPr>
-            <a:spLocks noGrp="1"/>
+            <a:spLocks noGrp="1" noRot="1" noChangeAspect="1"/>
           </p:cNvSpPr>
           <p:nvPr>
             <p:ph type="sldImg" idx="2"/>
@@ -680,7 +1390,7 @@
             <a:spLocks noGrp="1"/>
           </p:cNvSpPr>
           <p:nvPr>
-            <p:ph type="body" idx="3" sz="quarter"/>
+            <p:ph type="body" sz="quarter" idx="3"/>
           </p:nvPr>
         </p:nvSpPr>
         <p:spPr/>
@@ -689,25 +1399,455 @@
           <a:lstStyle/>
           <a:p>
             <a:r>
-              <a:t>Objetivo: qualificar com franqueza — quem tem fit se reconhece e se inclina. ≈ 40s</a:t>
-            </a:r>
-          </a:p>
-          <a:p/>
-          <a:p>
-            <a:r>
-              <a:t>Sendo bem direto sobre para quem isso funciona: o nosso trabalho rende mais em empresa que já funciona.</a:t>
-            </a:r>
-          </a:p>
-          <a:p/>
-          <a:p>
-            <a:r>
-              <a:t>Que já tem operação, clientes, time — e sente que a tecnologia virou o freio, e não o motor.</a:t>
-            </a:r>
-          </a:p>
-          <a:p/>
-          <a:p>
-            <a:r>
-              <a:t>Se, enquanto eu falava, você lembrou de um processo que não escala, de sistemas que não conversam, de dados espalhados por aí... provavelmente existe algo que a gente pode construir juntos.</a:t>
+              <a:rPr dirty="0" err="1"/>
+              <a:t>Objetivo</a:t>
+            </a:r>
+            <a:r>
+              <a:rPr dirty="0"/>
+              <a:t>: </a:t>
+            </a:r>
+            <a:r>
+              <a:rPr dirty="0" err="1"/>
+              <a:t>qualificar</a:t>
+            </a:r>
+            <a:r>
+              <a:rPr dirty="0"/>
+              <a:t> com </a:t>
+            </a:r>
+            <a:r>
+              <a:rPr dirty="0" err="1"/>
+              <a:t>franqueza</a:t>
+            </a:r>
+            <a:r>
+              <a:rPr dirty="0"/>
+              <a:t> — quem </a:t>
+            </a:r>
+            <a:r>
+              <a:rPr dirty="0" err="1"/>
+              <a:t>tem</a:t>
+            </a:r>
+            <a:r>
+              <a:rPr dirty="0"/>
+              <a:t> fit se </a:t>
+            </a:r>
+            <a:r>
+              <a:rPr dirty="0" err="1"/>
+              <a:t>reconhece</a:t>
+            </a:r>
+            <a:r>
+              <a:rPr dirty="0"/>
+              <a:t> e se </a:t>
+            </a:r>
+            <a:r>
+              <a:rPr dirty="0" err="1"/>
+              <a:t>inclina</a:t>
+            </a:r>
+            <a:r>
+              <a:rPr dirty="0"/>
+              <a:t>. ≈ 40s</a:t>
+            </a:r>
+          </a:p>
+          <a:p>
+            <a:endParaRPr dirty="0"/>
+          </a:p>
+          <a:p>
+            <a:r>
+              <a:rPr dirty="0" err="1"/>
+              <a:t>Sendo</a:t>
+            </a:r>
+            <a:r>
+              <a:rPr dirty="0"/>
+              <a:t> </a:t>
+            </a:r>
+            <a:r>
+              <a:rPr dirty="0" err="1"/>
+              <a:t>bem</a:t>
+            </a:r>
+            <a:r>
+              <a:rPr dirty="0"/>
+              <a:t> </a:t>
+            </a:r>
+            <a:r>
+              <a:rPr dirty="0" err="1"/>
+              <a:t>direto</a:t>
+            </a:r>
+            <a:r>
+              <a:rPr dirty="0"/>
+              <a:t> </a:t>
+            </a:r>
+            <a:r>
+              <a:rPr dirty="0" err="1"/>
+              <a:t>sobre</a:t>
+            </a:r>
+            <a:r>
+              <a:rPr dirty="0"/>
+              <a:t> para quem </a:t>
+            </a:r>
+            <a:r>
+              <a:rPr dirty="0" err="1"/>
+              <a:t>isso</a:t>
+            </a:r>
+            <a:r>
+              <a:rPr dirty="0"/>
+              <a:t> </a:t>
+            </a:r>
+            <a:r>
+              <a:rPr dirty="0" err="1"/>
+              <a:t>funciona</a:t>
+            </a:r>
+            <a:r>
+              <a:rPr dirty="0"/>
+              <a:t>: o </a:t>
+            </a:r>
+            <a:r>
+              <a:rPr dirty="0" err="1"/>
+              <a:t>nosso</a:t>
+            </a:r>
+            <a:r>
+              <a:rPr dirty="0"/>
+              <a:t> </a:t>
+            </a:r>
+            <a:r>
+              <a:rPr dirty="0" err="1"/>
+              <a:t>trabalho</a:t>
+            </a:r>
+            <a:r>
+              <a:rPr dirty="0"/>
+              <a:t> </a:t>
+            </a:r>
+            <a:r>
+              <a:rPr dirty="0" err="1"/>
+              <a:t>rende</a:t>
+            </a:r>
+            <a:r>
+              <a:rPr dirty="0"/>
+              <a:t> </a:t>
+            </a:r>
+            <a:r>
+              <a:rPr dirty="0" err="1"/>
+              <a:t>mais</a:t>
+            </a:r>
+            <a:r>
+              <a:rPr dirty="0"/>
+              <a:t> </a:t>
+            </a:r>
+            <a:r>
+              <a:rPr dirty="0" err="1"/>
+              <a:t>em</a:t>
+            </a:r>
+            <a:r>
+              <a:rPr dirty="0"/>
+              <a:t> </a:t>
+            </a:r>
+            <a:r>
+              <a:rPr dirty="0" err="1"/>
+              <a:t>empresa</a:t>
+            </a:r>
+            <a:r>
+              <a:rPr dirty="0"/>
+              <a:t> </a:t>
+            </a:r>
+            <a:r>
+              <a:rPr dirty="0" err="1"/>
+              <a:t>que</a:t>
+            </a:r>
+            <a:r>
+              <a:rPr dirty="0"/>
+              <a:t> </a:t>
+            </a:r>
+            <a:r>
+              <a:rPr dirty="0" err="1"/>
+              <a:t>já</a:t>
+            </a:r>
+            <a:r>
+              <a:rPr dirty="0"/>
+              <a:t> </a:t>
+            </a:r>
+            <a:r>
+              <a:rPr dirty="0" err="1"/>
+              <a:t>funciona</a:t>
+            </a:r>
+            <a:r>
+              <a:rPr dirty="0"/>
+              <a:t>.</a:t>
+            </a:r>
+          </a:p>
+          <a:p>
+            <a:endParaRPr dirty="0"/>
+          </a:p>
+          <a:p>
+            <a:r>
+              <a:rPr dirty="0" err="1"/>
+              <a:t>Que</a:t>
+            </a:r>
+            <a:r>
+              <a:rPr dirty="0"/>
+              <a:t> </a:t>
+            </a:r>
+            <a:r>
+              <a:rPr dirty="0" err="1"/>
+              <a:t>já</a:t>
+            </a:r>
+            <a:r>
+              <a:rPr dirty="0"/>
+              <a:t> </a:t>
+            </a:r>
+            <a:r>
+              <a:rPr dirty="0" err="1"/>
+              <a:t>tem</a:t>
+            </a:r>
+            <a:r>
+              <a:rPr dirty="0"/>
+              <a:t> </a:t>
+            </a:r>
+            <a:r>
+              <a:rPr dirty="0" err="1"/>
+              <a:t>operação</a:t>
+            </a:r>
+            <a:r>
+              <a:rPr dirty="0"/>
+              <a:t>, </a:t>
+            </a:r>
+            <a:r>
+              <a:rPr dirty="0" err="1"/>
+              <a:t>clientes</a:t>
+            </a:r>
+            <a:r>
+              <a:rPr dirty="0"/>
+              <a:t>, time — e sente </a:t>
+            </a:r>
+            <a:r>
+              <a:rPr dirty="0" err="1"/>
+              <a:t>que</a:t>
+            </a:r>
+            <a:r>
+              <a:rPr dirty="0"/>
+              <a:t> a </a:t>
+            </a:r>
+            <a:r>
+              <a:rPr dirty="0" err="1"/>
+              <a:t>tecnologia</a:t>
+            </a:r>
+            <a:r>
+              <a:rPr dirty="0"/>
+              <a:t> </a:t>
+            </a:r>
+            <a:r>
+              <a:rPr dirty="0" err="1"/>
+              <a:t>virou</a:t>
+            </a:r>
+            <a:r>
+              <a:rPr dirty="0"/>
+              <a:t> o </a:t>
+            </a:r>
+            <a:r>
+              <a:rPr dirty="0" err="1"/>
+              <a:t>freio</a:t>
+            </a:r>
+            <a:r>
+              <a:rPr dirty="0"/>
+              <a:t>, e </a:t>
+            </a:r>
+            <a:r>
+              <a:rPr dirty="0" err="1"/>
+              <a:t>não</a:t>
+            </a:r>
+            <a:r>
+              <a:rPr dirty="0"/>
+              <a:t> o motor.</a:t>
+            </a:r>
+          </a:p>
+          <a:p>
+            <a:endParaRPr dirty="0"/>
+          </a:p>
+          <a:p>
+            <a:r>
+              <a:rPr dirty="0"/>
+              <a:t>Se, </a:t>
+            </a:r>
+            <a:r>
+              <a:rPr dirty="0" err="1"/>
+              <a:t>enquanto</a:t>
+            </a:r>
+            <a:r>
+              <a:rPr dirty="0"/>
+              <a:t> </a:t>
+            </a:r>
+            <a:r>
+              <a:rPr dirty="0" err="1"/>
+              <a:t>eu</a:t>
+            </a:r>
+            <a:r>
+              <a:rPr dirty="0"/>
+              <a:t> </a:t>
+            </a:r>
+            <a:r>
+              <a:rPr dirty="0" err="1"/>
+              <a:t>falava</a:t>
+            </a:r>
+            <a:r>
+              <a:rPr dirty="0"/>
+              <a:t>, </a:t>
+            </a:r>
+            <a:r>
+              <a:rPr dirty="0" err="1"/>
+              <a:t>você</a:t>
+            </a:r>
+            <a:r>
+              <a:rPr dirty="0"/>
+              <a:t> </a:t>
+            </a:r>
+            <a:r>
+              <a:rPr dirty="0" err="1"/>
+              <a:t>lembrou</a:t>
+            </a:r>
+            <a:r>
+              <a:rPr dirty="0"/>
+              <a:t> de um </a:t>
+            </a:r>
+            <a:r>
+              <a:rPr dirty="0" err="1"/>
+              <a:t>processo</a:t>
+            </a:r>
+            <a:r>
+              <a:rPr dirty="0"/>
+              <a:t> </a:t>
+            </a:r>
+            <a:r>
+              <a:rPr dirty="0" err="1"/>
+              <a:t>que</a:t>
+            </a:r>
+            <a:r>
+              <a:rPr dirty="0"/>
+              <a:t> </a:t>
+            </a:r>
+            <a:r>
+              <a:rPr dirty="0" err="1"/>
+              <a:t>não</a:t>
+            </a:r>
+            <a:r>
+              <a:rPr dirty="0"/>
+              <a:t> </a:t>
+            </a:r>
+            <a:r>
+              <a:rPr dirty="0" err="1"/>
+              <a:t>escala</a:t>
+            </a:r>
+            <a:r>
+              <a:rPr dirty="0"/>
+              <a:t>, de </a:t>
+            </a:r>
+            <a:r>
+              <a:rPr dirty="0" err="1"/>
+              <a:t>sistemas</a:t>
+            </a:r>
+            <a:r>
+              <a:rPr dirty="0"/>
+              <a:t> </a:t>
+            </a:r>
+            <a:r>
+              <a:rPr dirty="0" err="1"/>
+              <a:t>que</a:t>
+            </a:r>
+            <a:r>
+              <a:rPr dirty="0"/>
+              <a:t> </a:t>
+            </a:r>
+            <a:r>
+              <a:rPr dirty="0" err="1"/>
+              <a:t>não</a:t>
+            </a:r>
+            <a:r>
+              <a:rPr dirty="0"/>
+              <a:t> </a:t>
+            </a:r>
+            <a:r>
+              <a:rPr dirty="0" err="1"/>
+              <a:t>conversam</a:t>
+            </a:r>
+            <a:r>
+              <a:rPr dirty="0"/>
+              <a:t>, de dados </a:t>
+            </a:r>
+            <a:r>
+              <a:rPr dirty="0" err="1"/>
+              <a:t>espalhados</a:t>
+            </a:r>
+            <a:r>
+              <a:rPr dirty="0"/>
+              <a:t> </a:t>
+            </a:r>
+            <a:r>
+              <a:rPr dirty="0" err="1"/>
+              <a:t>por</a:t>
+            </a:r>
+            <a:r>
+              <a:rPr dirty="0"/>
+              <a:t> </a:t>
+            </a:r>
+            <a:r>
+              <a:rPr dirty="0" err="1"/>
+              <a:t>aí</a:t>
+            </a:r>
+            <a:r>
+              <a:rPr dirty="0"/>
+              <a:t>... </a:t>
+            </a:r>
+            <a:r>
+              <a:rPr dirty="0" err="1"/>
+              <a:t>provavelmente</a:t>
+            </a:r>
+            <a:r>
+              <a:rPr dirty="0"/>
+              <a:t> </a:t>
+            </a:r>
+            <a:r>
+              <a:rPr dirty="0" err="1"/>
+              <a:t>existe</a:t>
+            </a:r>
+            <a:r>
+              <a:rPr dirty="0"/>
+              <a:t> algo </a:t>
+            </a:r>
+            <a:r>
+              <a:rPr dirty="0" err="1"/>
+              <a:t>que</a:t>
+            </a:r>
+            <a:r>
+              <a:rPr dirty="0"/>
+              <a:t> a </a:t>
+            </a:r>
+            <a:r>
+              <a:rPr dirty="0" err="1"/>
+              <a:t>gente</a:t>
+            </a:r>
+            <a:r>
+              <a:rPr dirty="0"/>
+              <a:t> </a:t>
+            </a:r>
+            <a:r>
+              <a:rPr dirty="0" err="1"/>
+              <a:t>pode</a:t>
+            </a:r>
+            <a:r>
+              <a:rPr dirty="0"/>
+              <a:t> </a:t>
+            </a:r>
+            <a:r>
+              <a:rPr dirty="0" err="1"/>
+              <a:t>construir</a:t>
+            </a:r>
+            <a:r>
+              <a:rPr dirty="0"/>
+              <a:t> </a:t>
+            </a:r>
+            <a:r>
+              <a:rPr dirty="0" err="1"/>
+              <a:t>juntos</a:t>
+            </a:r>
+            <a:r>
+              <a:rPr dirty="0"/>
+              <a:t>.</a:t>
             </a:r>
           </a:p>
         </p:txBody>
@@ -719,7 +1859,7 @@
             <a:spLocks noGrp="1"/>
           </p:cNvSpPr>
           <p:nvPr>
-            <p:ph type="sldNum" idx="5" sz="quarter"/>
+            <p:ph type="sldNum" sz="quarter" idx="5"/>
           </p:nvPr>
         </p:nvSpPr>
         <p:spPr/>
@@ -733,7 +1873,7 @@
 </file>
 
 <file path=ppt/notesSlides/notesSlide12.xml><?xml version="1.0" encoding="utf-8"?>
-<p:notes xmlns:a="http://schemas.openxmlformats.org/drawingml/2006/main" xmlns:p="http://schemas.openxmlformats.org/presentationml/2006/main" xmlns:r="http://schemas.openxmlformats.org/officeDocument/2006/relationships">
+<p:notes xmlns:a="http://schemas.openxmlformats.org/drawingml/2006/main" xmlns:r="http://schemas.openxmlformats.org/officeDocument/2006/relationships" xmlns:p="http://schemas.openxmlformats.org/presentationml/2006/main">
   <p:cSld>
     <p:spTree>
       <p:nvGrpSpPr>
@@ -753,7 +1893,7 @@
         <p:nvSpPr>
           <p:cNvPr id="2" name="Slide Image Placeholder 1"/>
           <p:cNvSpPr>
-            <a:spLocks noGrp="1"/>
+            <a:spLocks noGrp="1" noRot="1" noChangeAspect="1"/>
           </p:cNvSpPr>
           <p:nvPr>
             <p:ph type="sldImg" idx="2"/>
@@ -768,7 +1908,7 @@
             <a:spLocks noGrp="1"/>
           </p:cNvSpPr>
           <p:nvPr>
-            <p:ph type="body" idx="3" sz="quarter"/>
+            <p:ph type="body" sz="quarter" idx="3"/>
           </p:nvPr>
         </p:nvSpPr>
         <p:spPr/>
@@ -777,43 +1917,533 @@
           <a:lstStyle/>
           <a:p>
             <a:r>
-              <a:t>Objetivo: uma única pergunta + próximo passo simples. Termine e deixe a plateia falar. ≈ 40s</a:t>
-            </a:r>
-          </a:p>
-          <a:p/>
-          <a:p>
-            <a:r>
-              <a:t>Então eu fecho com a única pergunta que importa hoje:</a:t>
-            </a:r>
-          </a:p>
-          <a:p/>
-          <a:p>
-            <a:r>
-              <a:t>qual problema da SUA empresa valeria a pena resolver agora?</a:t>
-            </a:r>
-          </a:p>
-          <a:p/>
-          <a:p>
-            <a:r>
-              <a:t>[pausa — deixe alguém responder; se ninguém responder, chame pelo nome quem demonstrou mais interesse]</a:t>
-            </a:r>
-          </a:p>
-          <a:p/>
-          <a:p>
-            <a:r>
-              <a:t>Não precisa ser a resposta perfeita. Me conta o contexto, e a gente avalia junto se existe uma solução com impacto de verdade — inclusive se a resposta for "ainda não".</a:t>
-            </a:r>
-          </a:p>
-          <a:p/>
-          <a:p>
-            <a:r>
-              <a:t>O próximo passo é simples: uma conversa. O WhatsApp está aí no slide. E como diz o nosso site: sem apresentação genérica — na próxima conversa, o assunto é o seu negócio.</a:t>
-            </a:r>
-          </a:p>
-          <a:p/>
-          <a:p>
-            <a:r>
-              <a:t>Obrigado!</a:t>
+              <a:t>Objetivo</a:t>
+            </a:r>
+            <a:r>
+              <a:rPr dirty="0"/>
+              <a:t>: </a:t>
+            </a:r>
+            <a:r>
+              <a:rPr dirty="0" err="1"/>
+              <a:t>uma</a:t>
+            </a:r>
+            <a:r>
+              <a:rPr dirty="0"/>
+              <a:t> </a:t>
+            </a:r>
+            <a:r>
+              <a:rPr dirty="0" err="1"/>
+              <a:t>única</a:t>
+            </a:r>
+            <a:r>
+              <a:rPr dirty="0"/>
+              <a:t> </a:t>
+            </a:r>
+            <a:r>
+              <a:rPr dirty="0" err="1"/>
+              <a:t>pergunta</a:t>
+            </a:r>
+            <a:r>
+              <a:rPr dirty="0"/>
+              <a:t> + </a:t>
+            </a:r>
+            <a:r>
+              <a:rPr dirty="0" err="1"/>
+              <a:t>próximo</a:t>
+            </a:r>
+            <a:r>
+              <a:rPr dirty="0"/>
+              <a:t> </a:t>
+            </a:r>
+            <a:r>
+              <a:rPr dirty="0" err="1"/>
+              <a:t>passo</a:t>
+            </a:r>
+            <a:r>
+              <a:rPr dirty="0"/>
+              <a:t> simples. Termine e </a:t>
+            </a:r>
+            <a:r>
+              <a:rPr dirty="0" err="1"/>
+              <a:t>deixe</a:t>
+            </a:r>
+            <a:r>
+              <a:rPr dirty="0"/>
+              <a:t> a plateia </a:t>
+            </a:r>
+            <a:r>
+              <a:rPr dirty="0" err="1"/>
+              <a:t>falar</a:t>
+            </a:r>
+            <a:r>
+              <a:rPr dirty="0"/>
+              <a:t>. ≈ 40s</a:t>
+            </a:r>
+          </a:p>
+          <a:p>
+            <a:endParaRPr dirty="0"/>
+          </a:p>
+          <a:p>
+            <a:r>
+              <a:rPr dirty="0" err="1"/>
+              <a:t>Então</a:t>
+            </a:r>
+            <a:r>
+              <a:rPr dirty="0"/>
+              <a:t> </a:t>
+            </a:r>
+            <a:r>
+              <a:rPr dirty="0" err="1"/>
+              <a:t>eu</a:t>
+            </a:r>
+            <a:r>
+              <a:rPr dirty="0"/>
+              <a:t> </a:t>
+            </a:r>
+            <a:r>
+              <a:rPr dirty="0" err="1"/>
+              <a:t>fecho</a:t>
+            </a:r>
+            <a:r>
+              <a:rPr dirty="0"/>
+              <a:t> com a </a:t>
+            </a:r>
+            <a:r>
+              <a:rPr dirty="0" err="1"/>
+              <a:t>única</a:t>
+            </a:r>
+            <a:r>
+              <a:rPr dirty="0"/>
+              <a:t> </a:t>
+            </a:r>
+            <a:r>
+              <a:rPr dirty="0" err="1"/>
+              <a:t>pergunta</a:t>
+            </a:r>
+            <a:r>
+              <a:rPr dirty="0"/>
+              <a:t> </a:t>
+            </a:r>
+            <a:r>
+              <a:rPr dirty="0" err="1"/>
+              <a:t>que</a:t>
+            </a:r>
+            <a:r>
+              <a:rPr dirty="0"/>
+              <a:t> </a:t>
+            </a:r>
+            <a:r>
+              <a:rPr dirty="0" err="1"/>
+              <a:t>importa</a:t>
+            </a:r>
+            <a:r>
+              <a:rPr dirty="0"/>
+              <a:t> </a:t>
+            </a:r>
+            <a:r>
+              <a:rPr dirty="0" err="1"/>
+              <a:t>hoje</a:t>
+            </a:r>
+            <a:r>
+              <a:rPr dirty="0"/>
+              <a:t>:</a:t>
+            </a:r>
+          </a:p>
+          <a:p>
+            <a:endParaRPr dirty="0"/>
+          </a:p>
+          <a:p>
+            <a:r>
+              <a:rPr dirty="0"/>
+              <a:t>qual </a:t>
+            </a:r>
+            <a:r>
+              <a:rPr dirty="0" err="1"/>
+              <a:t>problema</a:t>
+            </a:r>
+            <a:r>
+              <a:rPr dirty="0"/>
+              <a:t> da SUA </a:t>
+            </a:r>
+            <a:r>
+              <a:rPr dirty="0" err="1"/>
+              <a:t>empresa</a:t>
+            </a:r>
+            <a:r>
+              <a:rPr dirty="0"/>
+              <a:t> </a:t>
+            </a:r>
+            <a:r>
+              <a:rPr dirty="0" err="1"/>
+              <a:t>valeria</a:t>
+            </a:r>
+            <a:r>
+              <a:rPr dirty="0"/>
+              <a:t> a </a:t>
+            </a:r>
+            <a:r>
+              <a:rPr dirty="0" err="1"/>
+              <a:t>pena</a:t>
+            </a:r>
+            <a:r>
+              <a:rPr dirty="0"/>
+              <a:t> resolver agora?</a:t>
+            </a:r>
+          </a:p>
+          <a:p>
+            <a:endParaRPr dirty="0"/>
+          </a:p>
+          <a:p>
+            <a:r>
+              <a:rPr dirty="0"/>
+              <a:t>[pausa — </a:t>
+            </a:r>
+            <a:r>
+              <a:rPr dirty="0" err="1"/>
+              <a:t>deixe</a:t>
+            </a:r>
+            <a:r>
+              <a:rPr dirty="0"/>
+              <a:t> </a:t>
+            </a:r>
+            <a:r>
+              <a:rPr dirty="0" err="1"/>
+              <a:t>alguém</a:t>
+            </a:r>
+            <a:r>
+              <a:rPr dirty="0"/>
+              <a:t> responder; se </a:t>
+            </a:r>
+            <a:r>
+              <a:rPr dirty="0" err="1"/>
+              <a:t>ninguém</a:t>
+            </a:r>
+            <a:r>
+              <a:rPr dirty="0"/>
+              <a:t> responder, </a:t>
+            </a:r>
+            <a:r>
+              <a:rPr dirty="0" err="1"/>
+              <a:t>chame</a:t>
+            </a:r>
+            <a:r>
+              <a:rPr dirty="0"/>
+              <a:t> </a:t>
+            </a:r>
+            <a:r>
+              <a:rPr dirty="0" err="1"/>
+              <a:t>pelo</a:t>
+            </a:r>
+            <a:r>
+              <a:rPr dirty="0"/>
+              <a:t> </a:t>
+            </a:r>
+            <a:r>
+              <a:rPr dirty="0" err="1"/>
+              <a:t>nome</a:t>
+            </a:r>
+            <a:r>
+              <a:rPr dirty="0"/>
+              <a:t> quem </a:t>
+            </a:r>
+            <a:r>
+              <a:rPr dirty="0" err="1"/>
+              <a:t>demonstrou</a:t>
+            </a:r>
+            <a:r>
+              <a:rPr dirty="0"/>
+              <a:t> </a:t>
+            </a:r>
+            <a:r>
+              <a:rPr dirty="0" err="1"/>
+              <a:t>mais</a:t>
+            </a:r>
+            <a:r>
+              <a:rPr dirty="0"/>
+              <a:t> interesse]</a:t>
+            </a:r>
+          </a:p>
+          <a:p>
+            <a:endParaRPr dirty="0"/>
+          </a:p>
+          <a:p>
+            <a:r>
+              <a:rPr dirty="0" err="1"/>
+              <a:t>Não</a:t>
+            </a:r>
+            <a:r>
+              <a:rPr dirty="0"/>
+              <a:t> </a:t>
+            </a:r>
+            <a:r>
+              <a:rPr dirty="0" err="1"/>
+              <a:t>precisa</a:t>
+            </a:r>
+            <a:r>
+              <a:rPr dirty="0"/>
+              <a:t> ser a </a:t>
+            </a:r>
+            <a:r>
+              <a:rPr dirty="0" err="1"/>
+              <a:t>resposta</a:t>
+            </a:r>
+            <a:r>
+              <a:rPr dirty="0"/>
+              <a:t> </a:t>
+            </a:r>
+            <a:r>
+              <a:rPr dirty="0" err="1"/>
+              <a:t>perfeita</a:t>
+            </a:r>
+            <a:r>
+              <a:rPr dirty="0"/>
+              <a:t>. Me </a:t>
+            </a:r>
+            <a:r>
+              <a:rPr dirty="0" err="1"/>
+              <a:t>conta</a:t>
+            </a:r>
+            <a:r>
+              <a:rPr dirty="0"/>
+              <a:t> o </a:t>
+            </a:r>
+            <a:r>
+              <a:rPr dirty="0" err="1"/>
+              <a:t>contexto</a:t>
+            </a:r>
+            <a:r>
+              <a:rPr dirty="0"/>
+              <a:t>, e a </a:t>
+            </a:r>
+            <a:r>
+              <a:rPr dirty="0" err="1"/>
+              <a:t>gente</a:t>
+            </a:r>
+            <a:r>
+              <a:rPr dirty="0"/>
+              <a:t> </a:t>
+            </a:r>
+            <a:r>
+              <a:rPr dirty="0" err="1"/>
+              <a:t>avalia</a:t>
+            </a:r>
+            <a:r>
+              <a:rPr dirty="0"/>
+              <a:t> junto se </a:t>
+            </a:r>
+            <a:r>
+              <a:rPr dirty="0" err="1"/>
+              <a:t>existe</a:t>
+            </a:r>
+            <a:r>
+              <a:rPr dirty="0"/>
+              <a:t> </a:t>
+            </a:r>
+            <a:r>
+              <a:rPr dirty="0" err="1"/>
+              <a:t>uma</a:t>
+            </a:r>
+            <a:r>
+              <a:rPr dirty="0"/>
+              <a:t> </a:t>
+            </a:r>
+            <a:r>
+              <a:rPr dirty="0" err="1"/>
+              <a:t>solução</a:t>
+            </a:r>
+            <a:r>
+              <a:rPr dirty="0"/>
+              <a:t> com </a:t>
+            </a:r>
+            <a:r>
+              <a:rPr dirty="0" err="1"/>
+              <a:t>impacto</a:t>
+            </a:r>
+            <a:r>
+              <a:rPr dirty="0"/>
+              <a:t> de </a:t>
+            </a:r>
+            <a:r>
+              <a:rPr dirty="0" err="1"/>
+              <a:t>verdade</a:t>
+            </a:r>
+            <a:r>
+              <a:rPr dirty="0"/>
+              <a:t> — inclusive se a </a:t>
+            </a:r>
+            <a:r>
+              <a:rPr dirty="0" err="1"/>
+              <a:t>resposta</a:t>
+            </a:r>
+            <a:r>
+              <a:rPr dirty="0"/>
+              <a:t> for "</a:t>
+            </a:r>
+            <a:r>
+              <a:rPr dirty="0" err="1"/>
+              <a:t>ainda</a:t>
+            </a:r>
+            <a:r>
+              <a:rPr dirty="0"/>
+              <a:t> </a:t>
+            </a:r>
+            <a:r>
+              <a:rPr dirty="0" err="1"/>
+              <a:t>não</a:t>
+            </a:r>
+            <a:r>
+              <a:rPr dirty="0"/>
+              <a:t>".</a:t>
+            </a:r>
+          </a:p>
+          <a:p>
+            <a:endParaRPr dirty="0"/>
+          </a:p>
+          <a:p>
+            <a:r>
+              <a:rPr dirty="0"/>
+              <a:t>O </a:t>
+            </a:r>
+            <a:r>
+              <a:rPr dirty="0" err="1"/>
+              <a:t>próximo</a:t>
+            </a:r>
+            <a:r>
+              <a:rPr dirty="0"/>
+              <a:t> </a:t>
+            </a:r>
+            <a:r>
+              <a:rPr dirty="0" err="1"/>
+              <a:t>passo</a:t>
+            </a:r>
+            <a:r>
+              <a:rPr dirty="0"/>
+              <a:t> é simples: </a:t>
+            </a:r>
+            <a:r>
+              <a:rPr dirty="0" err="1"/>
+              <a:t>uma</a:t>
+            </a:r>
+            <a:r>
+              <a:rPr dirty="0"/>
+              <a:t> conversa. O WhatsApp </a:t>
+            </a:r>
+            <a:r>
+              <a:rPr dirty="0" err="1"/>
+              <a:t>está</a:t>
+            </a:r>
+            <a:r>
+              <a:rPr dirty="0"/>
+              <a:t> </a:t>
+            </a:r>
+            <a:r>
+              <a:rPr dirty="0" err="1"/>
+              <a:t>aí</a:t>
+            </a:r>
+            <a:r>
+              <a:rPr dirty="0"/>
+              <a:t> no slide. E </a:t>
+            </a:r>
+            <a:r>
+              <a:rPr dirty="0" err="1"/>
+              <a:t>como</a:t>
+            </a:r>
+            <a:r>
+              <a:rPr dirty="0"/>
+              <a:t> </a:t>
+            </a:r>
+            <a:r>
+              <a:rPr dirty="0" err="1"/>
+              <a:t>diz</a:t>
+            </a:r>
+            <a:r>
+              <a:rPr dirty="0"/>
+              <a:t> o </a:t>
+            </a:r>
+            <a:r>
+              <a:rPr dirty="0" err="1"/>
+              <a:t>nosso</a:t>
+            </a:r>
+            <a:r>
+              <a:rPr dirty="0"/>
+              <a:t> site: </a:t>
+            </a:r>
+            <a:r>
+              <a:rPr dirty="0" err="1"/>
+              <a:t>sem</a:t>
+            </a:r>
+            <a:r>
+              <a:rPr dirty="0"/>
+              <a:t> </a:t>
+            </a:r>
+            <a:r>
+              <a:rPr dirty="0" err="1"/>
+              <a:t>apresentação</a:t>
+            </a:r>
+            <a:r>
+              <a:rPr dirty="0"/>
+              <a:t> </a:t>
+            </a:r>
+            <a:r>
+              <a:rPr dirty="0" err="1"/>
+              <a:t>genérica</a:t>
+            </a:r>
+            <a:r>
+              <a:rPr dirty="0"/>
+              <a:t> — </a:t>
+            </a:r>
+            <a:r>
+              <a:rPr dirty="0" err="1"/>
+              <a:t>na</a:t>
+            </a:r>
+            <a:r>
+              <a:rPr dirty="0"/>
+              <a:t> </a:t>
+            </a:r>
+            <a:r>
+              <a:rPr dirty="0" err="1"/>
+              <a:t>próxima</a:t>
+            </a:r>
+            <a:r>
+              <a:rPr dirty="0"/>
+              <a:t> conversa, o </a:t>
+            </a:r>
+            <a:r>
+              <a:rPr dirty="0" err="1"/>
+              <a:t>assunto</a:t>
+            </a:r>
+            <a:r>
+              <a:rPr dirty="0"/>
+              <a:t> é o </a:t>
+            </a:r>
+            <a:r>
+              <a:rPr dirty="0" err="1"/>
+              <a:t>seu</a:t>
+            </a:r>
+            <a:r>
+              <a:rPr dirty="0"/>
+              <a:t> </a:t>
+            </a:r>
+            <a:r>
+              <a:rPr dirty="0" err="1"/>
+              <a:t>negócio</a:t>
+            </a:r>
+            <a:r>
+              <a:rPr dirty="0"/>
+              <a:t>.</a:t>
+            </a:r>
+          </a:p>
+          <a:p>
+            <a:endParaRPr dirty="0"/>
+          </a:p>
+          <a:p>
+            <a:r>
+              <a:rPr dirty="0" err="1"/>
+              <a:t>Obrigado</a:t>
+            </a:r>
+            <a:r>
+              <a:rPr dirty="0"/>
+              <a:t>!</a:t>
             </a:r>
           </a:p>
         </p:txBody>
@@ -825,7 +2455,7 @@
             <a:spLocks noGrp="1"/>
           </p:cNvSpPr>
           <p:nvPr>
-            <p:ph type="sldNum" idx="5" sz="quarter"/>
+            <p:ph type="sldNum" sz="quarter" idx="5"/>
           </p:nvPr>
         </p:nvSpPr>
         <p:spPr/>
@@ -839,7 +2469,7 @@
 </file>
 
 <file path=ppt/notesSlides/notesSlide2.xml><?xml version="1.0" encoding="utf-8"?>
-<p:notes xmlns:a="http://schemas.openxmlformats.org/drawingml/2006/main" xmlns:p="http://schemas.openxmlformats.org/presentationml/2006/main" xmlns:r="http://schemas.openxmlformats.org/officeDocument/2006/relationships">
+<p:notes xmlns:a="http://schemas.openxmlformats.org/drawingml/2006/main" xmlns:r="http://schemas.openxmlformats.org/officeDocument/2006/relationships" xmlns:p="http://schemas.openxmlformats.org/presentationml/2006/main">
   <p:cSld>
     <p:spTree>
       <p:nvGrpSpPr>
@@ -859,7 +2489,7 @@
         <p:nvSpPr>
           <p:cNvPr id="2" name="Slide Image Placeholder 1"/>
           <p:cNvSpPr>
-            <a:spLocks noGrp="1"/>
+            <a:spLocks noGrp="1" noRot="1" noChangeAspect="1"/>
           </p:cNvSpPr>
           <p:nvPr>
             <p:ph type="sldImg" idx="2"/>
@@ -874,7 +2504,7 @@
             <a:spLocks noGrp="1"/>
           </p:cNvSpPr>
           <p:nvPr>
-            <p:ph type="body" idx="3" sz="quarter"/>
+            <p:ph type="body" sz="quarter" idx="3"/>
           </p:nvPr>
         </p:nvSpPr>
         <p:spPr/>
@@ -883,31 +2513,584 @@
           <a:lstStyle/>
           <a:p>
             <a:r>
-              <a:t>Objetivo: gerar identificação — a plateia precisa se reconhecer na cena. ≈ 60s</a:t>
-            </a:r>
-          </a:p>
-          <a:p/>
-          <a:p>
-            <a:r>
-              <a:t>Deixa eu descrever uma empresa, e você me diz se soa familiar.</a:t>
-            </a:r>
-          </a:p>
-          <a:p/>
-          <a:p>
-            <a:r>
-              <a:t>A empresa cresce. Os processos vão ficando cada vez mais específicos. Os sistemas param de conversar entre si. Alguma planilha — geralmente uma que só uma pessoa entende — passa a sustentar decisões importantes. E lá no comercial, leads esfriam sem ninguém perceber.</a:t>
-            </a:r>
-          </a:p>
-          <a:p/>
-          <a:p>
-            <a:r>
-              <a:t>[pausa — deixe a cena assentar]</a:t>
-            </a:r>
-          </a:p>
-          <a:p/>
-          <a:p>
-            <a:r>
-              <a:t>Nada disso é falta de competência. É que a empresa cresceu mais rápido do que a tecnologia dela. E software pronto, de prateleira, não foi feito para o SEU processo — foi feito para a média.</a:t>
+              <a:rPr dirty="0" err="1"/>
+              <a:t>Objetivo</a:t>
+            </a:r>
+            <a:r>
+              <a:rPr dirty="0"/>
+              <a:t>: </a:t>
+            </a:r>
+            <a:r>
+              <a:rPr dirty="0" err="1"/>
+              <a:t>gerar</a:t>
+            </a:r>
+            <a:r>
+              <a:rPr dirty="0"/>
+              <a:t> </a:t>
+            </a:r>
+            <a:r>
+              <a:rPr dirty="0" err="1"/>
+              <a:t>identificação</a:t>
+            </a:r>
+            <a:r>
+              <a:rPr dirty="0"/>
+              <a:t> — a plateia </a:t>
+            </a:r>
+            <a:r>
+              <a:rPr dirty="0" err="1"/>
+              <a:t>precisa</a:t>
+            </a:r>
+            <a:r>
+              <a:rPr dirty="0"/>
+              <a:t> se </a:t>
+            </a:r>
+            <a:r>
+              <a:rPr dirty="0" err="1"/>
+              <a:t>reconhecer</a:t>
+            </a:r>
+            <a:r>
+              <a:rPr dirty="0"/>
+              <a:t> </a:t>
+            </a:r>
+            <a:r>
+              <a:rPr dirty="0" err="1"/>
+              <a:t>na</a:t>
+            </a:r>
+            <a:r>
+              <a:rPr dirty="0"/>
+              <a:t> </a:t>
+            </a:r>
+            <a:r>
+              <a:rPr dirty="0" err="1"/>
+              <a:t>cena</a:t>
+            </a:r>
+            <a:r>
+              <a:rPr dirty="0"/>
+              <a:t>. ≈ 60s</a:t>
+            </a:r>
+          </a:p>
+          <a:p>
+            <a:endParaRPr dirty="0"/>
+          </a:p>
+          <a:p>
+            <a:r>
+              <a:rPr dirty="0"/>
+              <a:t>Deixa </a:t>
+            </a:r>
+            <a:r>
+              <a:rPr dirty="0" err="1"/>
+              <a:t>eu</a:t>
+            </a:r>
+            <a:r>
+              <a:rPr dirty="0"/>
+              <a:t> </a:t>
+            </a:r>
+            <a:r>
+              <a:rPr dirty="0" err="1"/>
+              <a:t>descrever</a:t>
+            </a:r>
+            <a:r>
+              <a:rPr dirty="0"/>
+              <a:t> </a:t>
+            </a:r>
+            <a:r>
+              <a:rPr dirty="0" err="1"/>
+              <a:t>uma</a:t>
+            </a:r>
+            <a:r>
+              <a:rPr dirty="0"/>
+              <a:t> </a:t>
+            </a:r>
+            <a:r>
+              <a:rPr dirty="0" err="1"/>
+              <a:t>empresa</a:t>
+            </a:r>
+            <a:r>
+              <a:rPr dirty="0"/>
+              <a:t>, e </a:t>
+            </a:r>
+            <a:r>
+              <a:rPr dirty="0" err="1"/>
+              <a:t>você</a:t>
+            </a:r>
+            <a:r>
+              <a:rPr dirty="0"/>
+              <a:t> me </a:t>
+            </a:r>
+            <a:r>
+              <a:rPr dirty="0" err="1"/>
+              <a:t>diz</a:t>
+            </a:r>
+            <a:r>
+              <a:rPr dirty="0"/>
+              <a:t> se </a:t>
+            </a:r>
+            <a:r>
+              <a:rPr dirty="0" err="1"/>
+              <a:t>soa</a:t>
+            </a:r>
+            <a:r>
+              <a:rPr dirty="0"/>
+              <a:t> familiar.</a:t>
+            </a:r>
+          </a:p>
+          <a:p>
+            <a:endParaRPr dirty="0"/>
+          </a:p>
+          <a:p>
+            <a:r>
+              <a:rPr dirty="0"/>
+              <a:t>A </a:t>
+            </a:r>
+            <a:r>
+              <a:rPr dirty="0" err="1"/>
+              <a:t>empresa</a:t>
+            </a:r>
+            <a:r>
+              <a:rPr dirty="0"/>
+              <a:t> </a:t>
+            </a:r>
+            <a:r>
+              <a:rPr dirty="0" err="1"/>
+              <a:t>cresce</a:t>
+            </a:r>
+            <a:r>
+              <a:rPr dirty="0"/>
+              <a:t>. </a:t>
+            </a:r>
+            <a:r>
+              <a:rPr dirty="0" err="1"/>
+              <a:t>Os</a:t>
+            </a:r>
+            <a:r>
+              <a:rPr dirty="0"/>
+              <a:t> </a:t>
+            </a:r>
+            <a:r>
+              <a:rPr dirty="0" err="1"/>
+              <a:t>processos</a:t>
+            </a:r>
+            <a:r>
+              <a:rPr dirty="0"/>
+              <a:t> </a:t>
+            </a:r>
+            <a:r>
+              <a:rPr dirty="0" err="1"/>
+              <a:t>vão</a:t>
+            </a:r>
+            <a:r>
+              <a:rPr dirty="0"/>
+              <a:t> </a:t>
+            </a:r>
+            <a:r>
+              <a:rPr dirty="0" err="1"/>
+              <a:t>ficando</a:t>
+            </a:r>
+            <a:r>
+              <a:rPr dirty="0"/>
+              <a:t> </a:t>
+            </a:r>
+            <a:r>
+              <a:rPr dirty="0" err="1"/>
+              <a:t>cada</a:t>
+            </a:r>
+            <a:r>
+              <a:rPr dirty="0"/>
+              <a:t> </a:t>
+            </a:r>
+            <a:r>
+              <a:rPr dirty="0" err="1"/>
+              <a:t>vez</a:t>
+            </a:r>
+            <a:r>
+              <a:rPr dirty="0"/>
+              <a:t> </a:t>
+            </a:r>
+            <a:r>
+              <a:rPr dirty="0" err="1"/>
+              <a:t>mais</a:t>
+            </a:r>
+            <a:r>
+              <a:rPr dirty="0"/>
+              <a:t> </a:t>
+            </a:r>
+            <a:r>
+              <a:rPr dirty="0" err="1"/>
+              <a:t>específicos</a:t>
+            </a:r>
+            <a:r>
+              <a:rPr dirty="0"/>
+              <a:t>. </a:t>
+            </a:r>
+            <a:r>
+              <a:rPr dirty="0" err="1"/>
+              <a:t>Os</a:t>
+            </a:r>
+            <a:r>
+              <a:rPr dirty="0"/>
+              <a:t> </a:t>
+            </a:r>
+            <a:r>
+              <a:rPr dirty="0" err="1"/>
+              <a:t>sistemas</a:t>
+            </a:r>
+            <a:r>
+              <a:rPr dirty="0"/>
+              <a:t> param de </a:t>
+            </a:r>
+            <a:r>
+              <a:rPr dirty="0" err="1"/>
+              <a:t>conversar</a:t>
+            </a:r>
+            <a:r>
+              <a:rPr dirty="0"/>
+              <a:t> entre </a:t>
+            </a:r>
+            <a:r>
+              <a:rPr dirty="0" err="1"/>
+              <a:t>si</a:t>
+            </a:r>
+            <a:r>
+              <a:rPr dirty="0"/>
+              <a:t>. </a:t>
+            </a:r>
+            <a:r>
+              <a:rPr dirty="0" err="1"/>
+              <a:t>Alguma</a:t>
+            </a:r>
+            <a:r>
+              <a:rPr dirty="0"/>
+              <a:t> </a:t>
+            </a:r>
+            <a:r>
+              <a:rPr dirty="0" err="1"/>
+              <a:t>planilha</a:t>
+            </a:r>
+            <a:r>
+              <a:rPr dirty="0"/>
+              <a:t> — </a:t>
+            </a:r>
+            <a:r>
+              <a:rPr dirty="0" err="1"/>
+              <a:t>geralmente</a:t>
+            </a:r>
+            <a:r>
+              <a:rPr dirty="0"/>
+              <a:t> </a:t>
+            </a:r>
+            <a:r>
+              <a:rPr dirty="0" err="1"/>
+              <a:t>uma</a:t>
+            </a:r>
+            <a:r>
+              <a:rPr dirty="0"/>
+              <a:t> </a:t>
+            </a:r>
+            <a:r>
+              <a:rPr dirty="0" err="1"/>
+              <a:t>que</a:t>
+            </a:r>
+            <a:r>
+              <a:rPr dirty="0"/>
+              <a:t> </a:t>
+            </a:r>
+            <a:r>
+              <a:rPr dirty="0" err="1"/>
+              <a:t>só</a:t>
+            </a:r>
+            <a:r>
+              <a:rPr dirty="0"/>
+              <a:t> </a:t>
+            </a:r>
+            <a:r>
+              <a:rPr dirty="0" err="1"/>
+              <a:t>uma</a:t>
+            </a:r>
+            <a:r>
+              <a:rPr dirty="0"/>
+              <a:t> </a:t>
+            </a:r>
+            <a:r>
+              <a:rPr dirty="0" err="1"/>
+              <a:t>pessoa</a:t>
+            </a:r>
+            <a:r>
+              <a:rPr dirty="0"/>
+              <a:t> </a:t>
+            </a:r>
+            <a:r>
+              <a:rPr dirty="0" err="1"/>
+              <a:t>entende</a:t>
+            </a:r>
+            <a:r>
+              <a:rPr dirty="0"/>
+              <a:t> — </a:t>
+            </a:r>
+            <a:r>
+              <a:rPr dirty="0" err="1"/>
+              <a:t>passa</a:t>
+            </a:r>
+            <a:r>
+              <a:rPr dirty="0"/>
+              <a:t> a </a:t>
+            </a:r>
+            <a:r>
+              <a:rPr dirty="0" err="1"/>
+              <a:t>sustentar</a:t>
+            </a:r>
+            <a:r>
+              <a:rPr dirty="0"/>
+              <a:t> </a:t>
+            </a:r>
+            <a:r>
+              <a:rPr dirty="0" err="1"/>
+              <a:t>decisões</a:t>
+            </a:r>
+            <a:r>
+              <a:rPr dirty="0"/>
+              <a:t> </a:t>
+            </a:r>
+            <a:r>
+              <a:rPr dirty="0" err="1"/>
+              <a:t>importantes</a:t>
+            </a:r>
+            <a:r>
+              <a:rPr dirty="0"/>
+              <a:t>. E </a:t>
+            </a:r>
+            <a:r>
+              <a:rPr dirty="0" err="1"/>
+              <a:t>lá</a:t>
+            </a:r>
+            <a:r>
+              <a:rPr dirty="0"/>
+              <a:t> no </a:t>
+            </a:r>
+            <a:r>
+              <a:rPr dirty="0" err="1"/>
+              <a:t>comercial</a:t>
+            </a:r>
+            <a:r>
+              <a:rPr dirty="0"/>
+              <a:t>, leads </a:t>
+            </a:r>
+            <a:r>
+              <a:rPr dirty="0" err="1"/>
+              <a:t>esfriam</a:t>
+            </a:r>
+            <a:r>
+              <a:rPr dirty="0"/>
+              <a:t> </a:t>
+            </a:r>
+            <a:r>
+              <a:rPr dirty="0" err="1"/>
+              <a:t>sem</a:t>
+            </a:r>
+            <a:r>
+              <a:rPr dirty="0"/>
+              <a:t> </a:t>
+            </a:r>
+            <a:r>
+              <a:rPr dirty="0" err="1"/>
+              <a:t>ninguém</a:t>
+            </a:r>
+            <a:r>
+              <a:rPr dirty="0"/>
+              <a:t> </a:t>
+            </a:r>
+            <a:r>
+              <a:rPr dirty="0" err="1"/>
+              <a:t>perceber</a:t>
+            </a:r>
+            <a:r>
+              <a:rPr dirty="0"/>
+              <a:t>.</a:t>
+            </a:r>
+          </a:p>
+          <a:p>
+            <a:endParaRPr dirty="0"/>
+          </a:p>
+          <a:p>
+            <a:r>
+              <a:rPr dirty="0"/>
+              <a:t>[pausa — </a:t>
+            </a:r>
+            <a:r>
+              <a:rPr dirty="0" err="1"/>
+              <a:t>deixe</a:t>
+            </a:r>
+            <a:r>
+              <a:rPr dirty="0"/>
+              <a:t> a </a:t>
+            </a:r>
+            <a:r>
+              <a:rPr dirty="0" err="1"/>
+              <a:t>cena</a:t>
+            </a:r>
+            <a:r>
+              <a:rPr dirty="0"/>
+              <a:t> </a:t>
+            </a:r>
+            <a:r>
+              <a:rPr dirty="0" err="1"/>
+              <a:t>assentar</a:t>
+            </a:r>
+            <a:r>
+              <a:rPr dirty="0"/>
+              <a:t>]</a:t>
+            </a:r>
+          </a:p>
+          <a:p>
+            <a:endParaRPr dirty="0"/>
+          </a:p>
+          <a:p>
+            <a:r>
+              <a:rPr dirty="0"/>
+              <a:t>Nada </a:t>
+            </a:r>
+            <a:r>
+              <a:rPr dirty="0" err="1"/>
+              <a:t>disso</a:t>
+            </a:r>
+            <a:r>
+              <a:rPr dirty="0"/>
+              <a:t> é </a:t>
+            </a:r>
+            <a:r>
+              <a:rPr dirty="0" err="1"/>
+              <a:t>falta</a:t>
+            </a:r>
+            <a:r>
+              <a:rPr dirty="0"/>
+              <a:t> de </a:t>
+            </a:r>
+            <a:r>
+              <a:rPr dirty="0" err="1"/>
+              <a:t>competência</a:t>
+            </a:r>
+            <a:r>
+              <a:rPr dirty="0"/>
+              <a:t>. É </a:t>
+            </a:r>
+            <a:r>
+              <a:rPr dirty="0" err="1"/>
+              <a:t>que</a:t>
+            </a:r>
+            <a:r>
+              <a:rPr dirty="0"/>
+              <a:t> a </a:t>
+            </a:r>
+            <a:r>
+              <a:rPr dirty="0" err="1"/>
+              <a:t>empresa</a:t>
+            </a:r>
+            <a:r>
+              <a:rPr dirty="0"/>
+              <a:t> </a:t>
+            </a:r>
+            <a:r>
+              <a:rPr dirty="0" err="1"/>
+              <a:t>cresceu</a:t>
+            </a:r>
+            <a:r>
+              <a:rPr dirty="0"/>
+              <a:t> </a:t>
+            </a:r>
+            <a:r>
+              <a:rPr dirty="0" err="1"/>
+              <a:t>mais</a:t>
+            </a:r>
+            <a:r>
+              <a:rPr dirty="0"/>
+              <a:t> </a:t>
+            </a:r>
+            <a:r>
+              <a:rPr dirty="0" err="1"/>
+              <a:t>rápido</a:t>
+            </a:r>
+            <a:r>
+              <a:rPr dirty="0"/>
+              <a:t> do </a:t>
+            </a:r>
+            <a:r>
+              <a:rPr dirty="0" err="1"/>
+              <a:t>que</a:t>
+            </a:r>
+            <a:r>
+              <a:rPr dirty="0"/>
+              <a:t> a </a:t>
+            </a:r>
+            <a:r>
+              <a:rPr dirty="0" err="1"/>
+              <a:t>tecnologia</a:t>
+            </a:r>
+            <a:r>
+              <a:rPr dirty="0"/>
+              <a:t> dela. E software pronto, de </a:t>
+            </a:r>
+            <a:r>
+              <a:rPr dirty="0" err="1"/>
+              <a:t>prateleira</a:t>
+            </a:r>
+            <a:r>
+              <a:rPr dirty="0"/>
+              <a:t>, </a:t>
+            </a:r>
+            <a:r>
+              <a:rPr dirty="0" err="1"/>
+              <a:t>não</a:t>
+            </a:r>
+            <a:r>
+              <a:rPr dirty="0"/>
+              <a:t> </a:t>
+            </a:r>
+            <a:r>
+              <a:rPr dirty="0" err="1"/>
+              <a:t>foi</a:t>
+            </a:r>
+            <a:r>
+              <a:rPr dirty="0"/>
+              <a:t> </a:t>
+            </a:r>
+            <a:r>
+              <a:rPr dirty="0" err="1"/>
+              <a:t>feito</a:t>
+            </a:r>
+            <a:r>
+              <a:rPr dirty="0"/>
+              <a:t> para o SEU </a:t>
+            </a:r>
+            <a:r>
+              <a:rPr dirty="0" err="1"/>
+              <a:t>processo</a:t>
+            </a:r>
+            <a:r>
+              <a:rPr dirty="0"/>
+              <a:t> — </a:t>
+            </a:r>
+            <a:r>
+              <a:rPr dirty="0" err="1"/>
+              <a:t>foi</a:t>
+            </a:r>
+            <a:r>
+              <a:rPr dirty="0"/>
+              <a:t> </a:t>
+            </a:r>
+            <a:r>
+              <a:rPr dirty="0" err="1"/>
+              <a:t>feito</a:t>
+            </a:r>
+            <a:r>
+              <a:rPr dirty="0"/>
+              <a:t> para a </a:t>
+            </a:r>
+            <a:r>
+              <a:rPr dirty="0" err="1"/>
+              <a:t>média</a:t>
+            </a:r>
+            <a:r>
+              <a:rPr dirty="0"/>
+              <a:t>.</a:t>
             </a:r>
           </a:p>
         </p:txBody>
@@ -919,7 +3102,7 @@
             <a:spLocks noGrp="1"/>
           </p:cNvSpPr>
           <p:nvPr>
-            <p:ph type="sldNum" idx="5" sz="quarter"/>
+            <p:ph type="sldNum" sz="quarter" idx="5"/>
           </p:nvPr>
         </p:nvSpPr>
         <p:spPr/>
@@ -933,7 +3116,7 @@
 </file>
 
 <file path=ppt/notesSlides/notesSlide3.xml><?xml version="1.0" encoding="utf-8"?>
-<p:notes xmlns:a="http://schemas.openxmlformats.org/drawingml/2006/main" xmlns:p="http://schemas.openxmlformats.org/presentationml/2006/main" xmlns:r="http://schemas.openxmlformats.org/officeDocument/2006/relationships">
+<p:notes xmlns:a="http://schemas.openxmlformats.org/drawingml/2006/main" xmlns:r="http://schemas.openxmlformats.org/officeDocument/2006/relationships" xmlns:p="http://schemas.openxmlformats.org/presentationml/2006/main">
   <p:cSld>
     <p:spTree>
       <p:nvGrpSpPr>
@@ -953,7 +3136,7 @@
         <p:nvSpPr>
           <p:cNvPr id="2" name="Slide Image Placeholder 1"/>
           <p:cNvSpPr>
-            <a:spLocks noGrp="1"/>
+            <a:spLocks noGrp="1" noRot="1" noChangeAspect="1"/>
           </p:cNvSpPr>
           <p:nvPr>
             <p:ph type="sldImg" idx="2"/>
@@ -968,7 +3151,7 @@
             <a:spLocks noGrp="1"/>
           </p:cNvSpPr>
           <p:nvPr>
-            <p:ph type="body" idx="3" sz="quarter"/>
+            <p:ph type="body" sz="quarter" idx="3"/>
           </p:nvPr>
         </p:nvSpPr>
         <p:spPr/>
@@ -977,25 +3160,207 @@
           <a:lstStyle/>
           <a:p>
             <a:r>
-              <a:t>Objetivo: a virada. Slide quase vazio de propósito — a força está na pausa. ≈ 15s</a:t>
-            </a:r>
-          </a:p>
-          <a:p/>
-          <a:p>
-            <a:r>
-              <a:t>E é exatamente nesse ponto que a gente entra.</a:t>
-            </a:r>
-          </a:p>
-          <a:p/>
-          <a:p>
-            <a:r>
-              <a:t>[pausa longa — não corra este slide]</a:t>
-            </a:r>
-          </a:p>
-          <a:p/>
-          <a:p>
-            <a:r>
-              <a:t>Quando o software pronto acaba e o seu problema continua — esse é o nosso território.</a:t>
+              <a:rPr dirty="0" err="1"/>
+              <a:t>Objetivo</a:t>
+            </a:r>
+            <a:r>
+              <a:rPr dirty="0"/>
+              <a:t>: a </a:t>
+            </a:r>
+            <a:r>
+              <a:rPr dirty="0" err="1"/>
+              <a:t>virada</a:t>
+            </a:r>
+            <a:r>
+              <a:rPr dirty="0"/>
+              <a:t>. Slide </a:t>
+            </a:r>
+            <a:r>
+              <a:rPr dirty="0" err="1"/>
+              <a:t>quase</a:t>
+            </a:r>
+            <a:r>
+              <a:rPr dirty="0"/>
+              <a:t> </a:t>
+            </a:r>
+            <a:r>
+              <a:rPr dirty="0" err="1"/>
+              <a:t>vazio</a:t>
+            </a:r>
+            <a:r>
+              <a:rPr dirty="0"/>
+              <a:t> de </a:t>
+            </a:r>
+            <a:r>
+              <a:rPr dirty="0" err="1"/>
+              <a:t>propósito</a:t>
+            </a:r>
+            <a:r>
+              <a:rPr dirty="0"/>
+              <a:t> — a </a:t>
+            </a:r>
+            <a:r>
+              <a:rPr dirty="0" err="1"/>
+              <a:t>força</a:t>
+            </a:r>
+            <a:r>
+              <a:rPr dirty="0"/>
+              <a:t> </a:t>
+            </a:r>
+            <a:r>
+              <a:rPr dirty="0" err="1"/>
+              <a:t>está</a:t>
+            </a:r>
+            <a:r>
+              <a:rPr dirty="0"/>
+              <a:t> </a:t>
+            </a:r>
+            <a:r>
+              <a:rPr dirty="0" err="1"/>
+              <a:t>na</a:t>
+            </a:r>
+            <a:r>
+              <a:rPr dirty="0"/>
+              <a:t> pausa. ≈ 15s</a:t>
+            </a:r>
+          </a:p>
+          <a:p>
+            <a:endParaRPr dirty="0"/>
+          </a:p>
+          <a:p>
+            <a:r>
+              <a:rPr dirty="0"/>
+              <a:t>E é </a:t>
+            </a:r>
+            <a:r>
+              <a:rPr dirty="0" err="1"/>
+              <a:t>exatamente</a:t>
+            </a:r>
+            <a:r>
+              <a:rPr dirty="0"/>
+              <a:t> </a:t>
+            </a:r>
+            <a:r>
+              <a:rPr dirty="0" err="1"/>
+              <a:t>nesse</a:t>
+            </a:r>
+            <a:r>
+              <a:rPr dirty="0"/>
+              <a:t> </a:t>
+            </a:r>
+            <a:r>
+              <a:rPr dirty="0" err="1"/>
+              <a:t>ponto</a:t>
+            </a:r>
+            <a:r>
+              <a:rPr dirty="0"/>
+              <a:t> </a:t>
+            </a:r>
+            <a:r>
+              <a:rPr dirty="0" err="1"/>
+              <a:t>que</a:t>
+            </a:r>
+            <a:r>
+              <a:rPr dirty="0"/>
+              <a:t> a </a:t>
+            </a:r>
+            <a:r>
+              <a:rPr dirty="0" err="1"/>
+              <a:t>gente</a:t>
+            </a:r>
+            <a:r>
+              <a:rPr dirty="0"/>
+              <a:t> </a:t>
+            </a:r>
+            <a:r>
+              <a:rPr dirty="0" err="1"/>
+              <a:t>entra</a:t>
+            </a:r>
+            <a:r>
+              <a:rPr dirty="0"/>
+              <a:t>.</a:t>
+            </a:r>
+          </a:p>
+          <a:p>
+            <a:endParaRPr dirty="0"/>
+          </a:p>
+          <a:p>
+            <a:r>
+              <a:rPr dirty="0"/>
+              <a:t>[pausa longa — </a:t>
+            </a:r>
+            <a:r>
+              <a:rPr dirty="0" err="1"/>
+              <a:t>não</a:t>
+            </a:r>
+            <a:r>
+              <a:rPr dirty="0"/>
+              <a:t> </a:t>
+            </a:r>
+            <a:r>
+              <a:rPr dirty="0" err="1"/>
+              <a:t>corra</a:t>
+            </a:r>
+            <a:r>
+              <a:rPr dirty="0"/>
+              <a:t> </a:t>
+            </a:r>
+            <a:r>
+              <a:rPr dirty="0" err="1"/>
+              <a:t>este</a:t>
+            </a:r>
+            <a:r>
+              <a:rPr dirty="0"/>
+              <a:t> slide]</a:t>
+            </a:r>
+          </a:p>
+          <a:p>
+            <a:endParaRPr dirty="0"/>
+          </a:p>
+          <a:p>
+            <a:r>
+              <a:rPr dirty="0"/>
+              <a:t>Quando o software pronto </a:t>
+            </a:r>
+            <a:r>
+              <a:rPr dirty="0" err="1"/>
+              <a:t>acaba</a:t>
+            </a:r>
+            <a:r>
+              <a:rPr dirty="0"/>
+              <a:t> e o </a:t>
+            </a:r>
+            <a:r>
+              <a:rPr dirty="0" err="1"/>
+              <a:t>seu</a:t>
+            </a:r>
+            <a:r>
+              <a:rPr dirty="0"/>
+              <a:t> </a:t>
+            </a:r>
+            <a:r>
+              <a:rPr dirty="0" err="1"/>
+              <a:t>problema</a:t>
+            </a:r>
+            <a:r>
+              <a:rPr dirty="0"/>
+              <a:t> continua — esse é o </a:t>
+            </a:r>
+            <a:r>
+              <a:rPr dirty="0" err="1"/>
+              <a:t>nosso</a:t>
+            </a:r>
+            <a:r>
+              <a:rPr dirty="0"/>
+              <a:t> </a:t>
+            </a:r>
+            <a:r>
+              <a:rPr dirty="0" err="1"/>
+              <a:t>território</a:t>
+            </a:r>
+            <a:r>
+              <a:rPr dirty="0"/>
+              <a:t>.</a:t>
             </a:r>
           </a:p>
         </p:txBody>
@@ -1007,7 +3372,7 @@
             <a:spLocks noGrp="1"/>
           </p:cNvSpPr>
           <p:nvPr>
-            <p:ph type="sldNum" idx="5" sz="quarter"/>
+            <p:ph type="sldNum" sz="quarter" idx="5"/>
           </p:nvPr>
         </p:nvSpPr>
         <p:spPr/>
@@ -1021,7 +3386,7 @@
 </file>
 
 <file path=ppt/notesSlides/notesSlide4.xml><?xml version="1.0" encoding="utf-8"?>
-<p:notes xmlns:a="http://schemas.openxmlformats.org/drawingml/2006/main" xmlns:p="http://schemas.openxmlformats.org/presentationml/2006/main" xmlns:r="http://schemas.openxmlformats.org/officeDocument/2006/relationships">
+<p:notes xmlns:a="http://schemas.openxmlformats.org/drawingml/2006/main" xmlns:r="http://schemas.openxmlformats.org/officeDocument/2006/relationships" xmlns:p="http://schemas.openxmlformats.org/presentationml/2006/main">
   <p:cSld>
     <p:spTree>
       <p:nvGrpSpPr>
@@ -1041,7 +3406,7 @@
         <p:nvSpPr>
           <p:cNvPr id="2" name="Slide Image Placeholder 1"/>
           <p:cNvSpPr>
-            <a:spLocks noGrp="1"/>
+            <a:spLocks noGrp="1" noRot="1" noChangeAspect="1"/>
           </p:cNvSpPr>
           <p:nvPr>
             <p:ph type="sldImg" idx="2"/>
@@ -1056,7 +3421,7 @@
             <a:spLocks noGrp="1"/>
           </p:cNvSpPr>
           <p:nvPr>
-            <p:ph type="body" idx="3" sz="quarter"/>
+            <p:ph type="body" sz="quarter" idx="3"/>
           </p:nvPr>
         </p:nvSpPr>
         <p:spPr/>
@@ -1065,25 +3430,635 @@
           <a:lstStyle/>
           <a:p>
             <a:r>
-              <a:t>Objetivo: remover a maior objeção ('não sei o que pedir') e mostrar honestidade. ≈ 50s</a:t>
-            </a:r>
-          </a:p>
-          <a:p/>
-          <a:p>
-            <a:r>
-              <a:t>Uma coisa importante: você não precisa chegar para a gente sabendo o que construir.</a:t>
-            </a:r>
-          </a:p>
-          <a:p/>
-          <a:p>
-            <a:r>
-              <a:t>Nenhum cliente nosso chegou com uma especificação técnica. Eles chegam com uma dor: "isso aqui demora demais", "estou desperdiçando oportunidade comercial", "não consigo enxergar a minha operação".</a:t>
-            </a:r>
-          </a:p>
-          <a:p/>
-          <a:p>
-            <a:r>
-              <a:t>O nosso trabalho começa aí — nessa régua do slide: entender a dor, medir o impacto, achar a oportunidade, desenhar a solução, e só então escolher a tecnologia. E às vezes a resposta honesta do diagnóstico é: não vale a pena construir nada. Essa honestidade faz parte do serviço — ninguém aqui quer vender software que não devolve resultado.</a:t>
+              <a:rPr dirty="0" err="1"/>
+              <a:t>Objetivo</a:t>
+            </a:r>
+            <a:r>
+              <a:rPr dirty="0"/>
+              <a:t>: remover a </a:t>
+            </a:r>
+            <a:r>
+              <a:rPr dirty="0" err="1"/>
+              <a:t>maior</a:t>
+            </a:r>
+            <a:r>
+              <a:rPr dirty="0"/>
+              <a:t> </a:t>
+            </a:r>
+            <a:r>
+              <a:rPr dirty="0" err="1"/>
+              <a:t>objeção</a:t>
+            </a:r>
+            <a:r>
+              <a:rPr dirty="0"/>
+              <a:t> ('</a:t>
+            </a:r>
+            <a:r>
+              <a:rPr dirty="0" err="1"/>
+              <a:t>não</a:t>
+            </a:r>
+            <a:r>
+              <a:rPr dirty="0"/>
+              <a:t> sei o </a:t>
+            </a:r>
+            <a:r>
+              <a:rPr dirty="0" err="1"/>
+              <a:t>que</a:t>
+            </a:r>
+            <a:r>
+              <a:rPr dirty="0"/>
+              <a:t> </a:t>
+            </a:r>
+            <a:r>
+              <a:rPr dirty="0" err="1"/>
+              <a:t>pedir</a:t>
+            </a:r>
+            <a:r>
+              <a:rPr dirty="0"/>
+              <a:t>') e </a:t>
+            </a:r>
+            <a:r>
+              <a:rPr dirty="0" err="1"/>
+              <a:t>mostrar</a:t>
+            </a:r>
+            <a:r>
+              <a:rPr dirty="0"/>
+              <a:t> </a:t>
+            </a:r>
+            <a:r>
+              <a:rPr dirty="0" err="1"/>
+              <a:t>honestidade</a:t>
+            </a:r>
+            <a:r>
+              <a:rPr dirty="0"/>
+              <a:t>. ≈ 50s</a:t>
+            </a:r>
+          </a:p>
+          <a:p>
+            <a:endParaRPr dirty="0"/>
+          </a:p>
+          <a:p>
+            <a:r>
+              <a:rPr dirty="0"/>
+              <a:t>Uma </a:t>
+            </a:r>
+            <a:r>
+              <a:rPr dirty="0" err="1"/>
+              <a:t>coisa</a:t>
+            </a:r>
+            <a:r>
+              <a:rPr dirty="0"/>
+              <a:t> </a:t>
+            </a:r>
+            <a:r>
+              <a:rPr dirty="0" err="1"/>
+              <a:t>importante</a:t>
+            </a:r>
+            <a:r>
+              <a:rPr dirty="0"/>
+              <a:t>: </a:t>
+            </a:r>
+            <a:r>
+              <a:rPr dirty="0" err="1"/>
+              <a:t>você</a:t>
+            </a:r>
+            <a:r>
+              <a:rPr dirty="0"/>
+              <a:t> </a:t>
+            </a:r>
+            <a:r>
+              <a:rPr dirty="0" err="1"/>
+              <a:t>não</a:t>
+            </a:r>
+            <a:r>
+              <a:rPr dirty="0"/>
+              <a:t> </a:t>
+            </a:r>
+            <a:r>
+              <a:rPr dirty="0" err="1"/>
+              <a:t>precisa</a:t>
+            </a:r>
+            <a:r>
+              <a:rPr dirty="0"/>
+              <a:t> </a:t>
+            </a:r>
+            <a:r>
+              <a:rPr dirty="0" err="1"/>
+              <a:t>chegar</a:t>
+            </a:r>
+            <a:r>
+              <a:rPr dirty="0"/>
+              <a:t> para a </a:t>
+            </a:r>
+            <a:r>
+              <a:rPr dirty="0" err="1"/>
+              <a:t>gente</a:t>
+            </a:r>
+            <a:r>
+              <a:rPr dirty="0"/>
+              <a:t> </a:t>
+            </a:r>
+            <a:r>
+              <a:rPr dirty="0" err="1"/>
+              <a:t>sabendo</a:t>
+            </a:r>
+            <a:r>
+              <a:rPr dirty="0"/>
+              <a:t> o </a:t>
+            </a:r>
+            <a:r>
+              <a:rPr dirty="0" err="1"/>
+              <a:t>que</a:t>
+            </a:r>
+            <a:r>
+              <a:rPr dirty="0"/>
+              <a:t> </a:t>
+            </a:r>
+            <a:r>
+              <a:rPr dirty="0" err="1"/>
+              <a:t>construir</a:t>
+            </a:r>
+            <a:r>
+              <a:rPr dirty="0"/>
+              <a:t>.</a:t>
+            </a:r>
+          </a:p>
+          <a:p>
+            <a:endParaRPr dirty="0"/>
+          </a:p>
+          <a:p>
+            <a:r>
+              <a:rPr dirty="0" err="1"/>
+              <a:t>Nenhum</a:t>
+            </a:r>
+            <a:r>
+              <a:rPr dirty="0"/>
+              <a:t> </a:t>
+            </a:r>
+            <a:r>
+              <a:rPr dirty="0" err="1"/>
+              <a:t>cliente</a:t>
+            </a:r>
+            <a:r>
+              <a:rPr dirty="0"/>
+              <a:t> </a:t>
+            </a:r>
+            <a:r>
+              <a:rPr dirty="0" err="1"/>
+              <a:t>nosso</a:t>
+            </a:r>
+            <a:r>
+              <a:rPr dirty="0"/>
+              <a:t> </a:t>
+            </a:r>
+            <a:r>
+              <a:rPr dirty="0" err="1"/>
+              <a:t>chegou</a:t>
+            </a:r>
+            <a:r>
+              <a:rPr dirty="0"/>
+              <a:t> com </a:t>
+            </a:r>
+            <a:r>
+              <a:rPr dirty="0" err="1"/>
+              <a:t>uma</a:t>
+            </a:r>
+            <a:r>
+              <a:rPr dirty="0"/>
+              <a:t> </a:t>
+            </a:r>
+            <a:r>
+              <a:rPr dirty="0" err="1"/>
+              <a:t>especificação</a:t>
+            </a:r>
+            <a:r>
+              <a:rPr dirty="0"/>
+              <a:t> </a:t>
+            </a:r>
+            <a:r>
+              <a:rPr dirty="0" err="1"/>
+              <a:t>técnica</a:t>
+            </a:r>
+            <a:r>
+              <a:rPr dirty="0"/>
+              <a:t>. Eles </a:t>
+            </a:r>
+            <a:r>
+              <a:rPr dirty="0" err="1"/>
+              <a:t>chegam</a:t>
+            </a:r>
+            <a:r>
+              <a:rPr dirty="0"/>
+              <a:t> com </a:t>
+            </a:r>
+            <a:r>
+              <a:rPr dirty="0" err="1"/>
+              <a:t>uma</a:t>
+            </a:r>
+            <a:r>
+              <a:rPr dirty="0"/>
+              <a:t> </a:t>
+            </a:r>
+            <a:r>
+              <a:rPr dirty="0" err="1"/>
+              <a:t>dor</a:t>
+            </a:r>
+            <a:r>
+              <a:rPr dirty="0"/>
+              <a:t>: "</a:t>
+            </a:r>
+            <a:r>
+              <a:rPr dirty="0" err="1"/>
+              <a:t>isso</a:t>
+            </a:r>
+            <a:r>
+              <a:rPr dirty="0"/>
+              <a:t> </a:t>
+            </a:r>
+            <a:r>
+              <a:rPr dirty="0" err="1"/>
+              <a:t>aqui</a:t>
+            </a:r>
+            <a:r>
+              <a:rPr dirty="0"/>
+              <a:t> </a:t>
+            </a:r>
+            <a:r>
+              <a:rPr dirty="0" err="1"/>
+              <a:t>demora</a:t>
+            </a:r>
+            <a:r>
+              <a:rPr dirty="0"/>
+              <a:t> </a:t>
+            </a:r>
+            <a:r>
+              <a:rPr dirty="0" err="1"/>
+              <a:t>demais</a:t>
+            </a:r>
+            <a:r>
+              <a:rPr dirty="0"/>
+              <a:t>", "</a:t>
+            </a:r>
+            <a:r>
+              <a:rPr dirty="0" err="1"/>
+              <a:t>estou</a:t>
+            </a:r>
+            <a:r>
+              <a:rPr dirty="0"/>
+              <a:t> </a:t>
+            </a:r>
+            <a:r>
+              <a:rPr dirty="0" err="1"/>
+              <a:t>desperdiçando</a:t>
+            </a:r>
+            <a:r>
+              <a:rPr dirty="0"/>
+              <a:t> </a:t>
+            </a:r>
+            <a:r>
+              <a:rPr dirty="0" err="1"/>
+              <a:t>oportunidade</a:t>
+            </a:r>
+            <a:r>
+              <a:rPr dirty="0"/>
+              <a:t> </a:t>
+            </a:r>
+            <a:r>
+              <a:rPr dirty="0" err="1"/>
+              <a:t>comercial</a:t>
+            </a:r>
+            <a:r>
+              <a:rPr dirty="0"/>
+              <a:t>", "</a:t>
+            </a:r>
+            <a:r>
+              <a:rPr dirty="0" err="1"/>
+              <a:t>não</a:t>
+            </a:r>
+            <a:r>
+              <a:rPr dirty="0"/>
+              <a:t> </a:t>
+            </a:r>
+            <a:r>
+              <a:rPr dirty="0" err="1"/>
+              <a:t>consigo</a:t>
+            </a:r>
+            <a:r>
+              <a:rPr dirty="0"/>
+              <a:t> </a:t>
+            </a:r>
+            <a:r>
+              <a:rPr dirty="0" err="1"/>
+              <a:t>enxergar</a:t>
+            </a:r>
+            <a:r>
+              <a:rPr dirty="0"/>
+              <a:t> a </a:t>
+            </a:r>
+            <a:r>
+              <a:rPr dirty="0" err="1"/>
+              <a:t>minha</a:t>
+            </a:r>
+            <a:r>
+              <a:rPr dirty="0"/>
+              <a:t> </a:t>
+            </a:r>
+            <a:r>
+              <a:rPr dirty="0" err="1"/>
+              <a:t>operação</a:t>
+            </a:r>
+            <a:r>
+              <a:rPr dirty="0"/>
+              <a:t>".</a:t>
+            </a:r>
+          </a:p>
+          <a:p>
+            <a:endParaRPr dirty="0"/>
+          </a:p>
+          <a:p>
+            <a:r>
+              <a:rPr dirty="0"/>
+              <a:t>O </a:t>
+            </a:r>
+            <a:r>
+              <a:rPr dirty="0" err="1"/>
+              <a:t>nosso</a:t>
+            </a:r>
+            <a:r>
+              <a:rPr dirty="0"/>
+              <a:t> </a:t>
+            </a:r>
+            <a:r>
+              <a:rPr dirty="0" err="1"/>
+              <a:t>trabalho</a:t>
+            </a:r>
+            <a:r>
+              <a:rPr dirty="0"/>
+              <a:t> </a:t>
+            </a:r>
+            <a:r>
+              <a:rPr dirty="0" err="1"/>
+              <a:t>começa</a:t>
+            </a:r>
+            <a:r>
+              <a:rPr dirty="0"/>
+              <a:t> </a:t>
+            </a:r>
+            <a:r>
+              <a:rPr dirty="0" err="1"/>
+              <a:t>aí</a:t>
+            </a:r>
+            <a:r>
+              <a:rPr dirty="0"/>
+              <a:t> — </a:t>
+            </a:r>
+            <a:r>
+              <a:rPr dirty="0" err="1"/>
+              <a:t>nessa</a:t>
+            </a:r>
+            <a:r>
+              <a:rPr dirty="0"/>
+              <a:t> </a:t>
+            </a:r>
+            <a:r>
+              <a:rPr dirty="0" err="1"/>
+              <a:t>régua</a:t>
+            </a:r>
+            <a:r>
+              <a:rPr dirty="0"/>
+              <a:t> do slide: </a:t>
+            </a:r>
+            <a:r>
+              <a:rPr dirty="0" err="1"/>
+              <a:t>entender</a:t>
+            </a:r>
+            <a:r>
+              <a:rPr dirty="0"/>
+              <a:t> a </a:t>
+            </a:r>
+            <a:r>
+              <a:rPr dirty="0" err="1"/>
+              <a:t>dor</a:t>
+            </a:r>
+            <a:r>
+              <a:rPr dirty="0"/>
+              <a:t>, </a:t>
+            </a:r>
+            <a:r>
+              <a:rPr dirty="0" err="1"/>
+              <a:t>medir</a:t>
+            </a:r>
+            <a:r>
+              <a:rPr dirty="0"/>
+              <a:t> o </a:t>
+            </a:r>
+            <a:r>
+              <a:rPr dirty="0" err="1"/>
+              <a:t>impacto</a:t>
+            </a:r>
+            <a:r>
+              <a:rPr dirty="0"/>
+              <a:t>, achar a </a:t>
+            </a:r>
+            <a:r>
+              <a:rPr dirty="0" err="1"/>
+              <a:t>oportunidade</a:t>
+            </a:r>
+            <a:r>
+              <a:rPr dirty="0"/>
+              <a:t>, </a:t>
+            </a:r>
+            <a:r>
+              <a:rPr dirty="0" err="1"/>
+              <a:t>desenhar</a:t>
+            </a:r>
+            <a:r>
+              <a:rPr dirty="0"/>
+              <a:t> a </a:t>
+            </a:r>
+            <a:r>
+              <a:rPr dirty="0" err="1"/>
+              <a:t>solução</a:t>
+            </a:r>
+            <a:r>
+              <a:rPr dirty="0"/>
+              <a:t>, e </a:t>
+            </a:r>
+            <a:r>
+              <a:rPr dirty="0" err="1"/>
+              <a:t>só</a:t>
+            </a:r>
+            <a:r>
+              <a:rPr dirty="0"/>
+              <a:t> </a:t>
+            </a:r>
+            <a:r>
+              <a:rPr dirty="0" err="1"/>
+              <a:t>então</a:t>
+            </a:r>
+            <a:r>
+              <a:rPr dirty="0"/>
+              <a:t> </a:t>
+            </a:r>
+            <a:r>
+              <a:rPr dirty="0" err="1"/>
+              <a:t>escolher</a:t>
+            </a:r>
+            <a:r>
+              <a:rPr dirty="0"/>
+              <a:t> a </a:t>
+            </a:r>
+            <a:r>
+              <a:rPr dirty="0" err="1"/>
+              <a:t>tecnologia</a:t>
+            </a:r>
+            <a:r>
+              <a:rPr dirty="0"/>
+              <a:t>. E </a:t>
+            </a:r>
+            <a:r>
+              <a:rPr dirty="0" err="1"/>
+              <a:t>às</a:t>
+            </a:r>
+            <a:r>
+              <a:rPr dirty="0"/>
+              <a:t> </a:t>
+            </a:r>
+            <a:r>
+              <a:rPr dirty="0" err="1"/>
+              <a:t>vezes</a:t>
+            </a:r>
+            <a:r>
+              <a:rPr dirty="0"/>
+              <a:t> a </a:t>
+            </a:r>
+            <a:r>
+              <a:rPr dirty="0" err="1"/>
+              <a:t>resposta</a:t>
+            </a:r>
+            <a:r>
+              <a:rPr dirty="0"/>
+              <a:t> </a:t>
+            </a:r>
+            <a:r>
+              <a:rPr dirty="0" err="1"/>
+              <a:t>honesta</a:t>
+            </a:r>
+            <a:r>
+              <a:rPr dirty="0"/>
+              <a:t> do </a:t>
+            </a:r>
+            <a:r>
+              <a:rPr dirty="0" err="1"/>
+              <a:t>diagnóstico</a:t>
+            </a:r>
+            <a:r>
+              <a:rPr dirty="0"/>
+              <a:t> é: </a:t>
+            </a:r>
+            <a:r>
+              <a:rPr dirty="0" err="1"/>
+              <a:t>não</a:t>
+            </a:r>
+            <a:r>
+              <a:rPr dirty="0"/>
+              <a:t> vale a </a:t>
+            </a:r>
+            <a:r>
+              <a:rPr dirty="0" err="1"/>
+              <a:t>pena</a:t>
+            </a:r>
+            <a:r>
+              <a:rPr dirty="0"/>
+              <a:t> </a:t>
+            </a:r>
+            <a:r>
+              <a:rPr dirty="0" err="1"/>
+              <a:t>construir</a:t>
+            </a:r>
+            <a:r>
+              <a:rPr dirty="0"/>
+              <a:t> nada. Essa </a:t>
+            </a:r>
+            <a:r>
+              <a:rPr dirty="0" err="1"/>
+              <a:t>honestidade</a:t>
+            </a:r>
+            <a:r>
+              <a:rPr dirty="0"/>
+              <a:t> </a:t>
+            </a:r>
+            <a:r>
+              <a:rPr dirty="0" err="1"/>
+              <a:t>faz</a:t>
+            </a:r>
+            <a:r>
+              <a:rPr dirty="0"/>
+              <a:t> </a:t>
+            </a:r>
+            <a:r>
+              <a:rPr dirty="0" err="1"/>
+              <a:t>parte</a:t>
+            </a:r>
+            <a:r>
+              <a:rPr dirty="0"/>
+              <a:t> do </a:t>
+            </a:r>
+            <a:r>
+              <a:rPr dirty="0" err="1"/>
+              <a:t>serviço</a:t>
+            </a:r>
+            <a:r>
+              <a:rPr dirty="0"/>
+              <a:t> — </a:t>
+            </a:r>
+            <a:r>
+              <a:rPr dirty="0" err="1"/>
+              <a:t>ninguém</a:t>
+            </a:r>
+            <a:r>
+              <a:rPr dirty="0"/>
+              <a:t> </a:t>
+            </a:r>
+            <a:r>
+              <a:rPr dirty="0" err="1"/>
+              <a:t>aqui</a:t>
+            </a:r>
+            <a:r>
+              <a:rPr dirty="0"/>
+              <a:t> </a:t>
+            </a:r>
+            <a:r>
+              <a:rPr dirty="0" err="1"/>
+              <a:t>quer</a:t>
+            </a:r>
+            <a:r>
+              <a:rPr dirty="0"/>
+              <a:t> vender software </a:t>
+            </a:r>
+            <a:r>
+              <a:rPr dirty="0" err="1"/>
+              <a:t>que</a:t>
+            </a:r>
+            <a:r>
+              <a:rPr dirty="0"/>
+              <a:t> </a:t>
+            </a:r>
+            <a:r>
+              <a:rPr dirty="0" err="1"/>
+              <a:t>não</a:t>
+            </a:r>
+            <a:r>
+              <a:rPr dirty="0"/>
+              <a:t> devolve </a:t>
+            </a:r>
+            <a:r>
+              <a:rPr dirty="0" err="1"/>
+              <a:t>resultado</a:t>
+            </a:r>
+            <a:r>
+              <a:rPr dirty="0"/>
+              <a:t>.</a:t>
             </a:r>
           </a:p>
         </p:txBody>
@@ -1095,7 +4070,7 @@
             <a:spLocks noGrp="1"/>
           </p:cNvSpPr>
           <p:nvPr>
-            <p:ph type="sldNum" idx="5" sz="quarter"/>
+            <p:ph type="sldNum" sz="quarter" idx="5"/>
           </p:nvPr>
         </p:nvSpPr>
         <p:spPr/>
@@ -1109,7 +4084,7 @@
 </file>
 
 <file path=ppt/notesSlides/notesSlide5.xml><?xml version="1.0" encoding="utf-8"?>
-<p:notes xmlns:a="http://schemas.openxmlformats.org/drawingml/2006/main" xmlns:p="http://schemas.openxmlformats.org/presentationml/2006/main" xmlns:r="http://schemas.openxmlformats.org/officeDocument/2006/relationships">
+<p:notes xmlns:a="http://schemas.openxmlformats.org/drawingml/2006/main" xmlns:r="http://schemas.openxmlformats.org/officeDocument/2006/relationships" xmlns:p="http://schemas.openxmlformats.org/presentationml/2006/main">
   <p:cSld>
     <p:spTree>
       <p:nvGrpSpPr>
@@ -1129,7 +4104,7 @@
         <p:nvSpPr>
           <p:cNvPr id="2" name="Slide Image Placeholder 1"/>
           <p:cNvSpPr>
-            <a:spLocks noGrp="1"/>
+            <a:spLocks noGrp="1" noRot="1" noChangeAspect="1"/>
           </p:cNvSpPr>
           <p:nvPr>
             <p:ph type="sldImg" idx="2"/>
@@ -1144,7 +4119,7 @@
             <a:spLocks noGrp="1"/>
           </p:cNvSpPr>
           <p:nvPr>
-            <p:ph type="body" idx="3" sz="quarter"/>
+            <p:ph type="body" sz="quarter" idx="3"/>
           </p:nvPr>
         </p:nvSpPr>
         <p:spPr/>
@@ -1153,25 +4128,519 @@
           <a:lstStyle/>
           <a:p>
             <a:r>
-              <a:t>Objetivo: dar o mapa da conversa e convidar a interrupção (engajamento). ≈ 40s</a:t>
-            </a:r>
-          </a:p>
-          <a:p/>
-          <a:p>
-            <a:r>
-              <a:t>Na prática, o que a gente constrói se organiza em três frentes.</a:t>
-            </a:r>
-          </a:p>
-          <a:p/>
-          <a:p>
-            <a:r>
-              <a:t>Um: receita nova — transformar o que a empresa já tem em um produto digital que os clientes dela pagariam para usar. Dois: operação — sistemas construídos em volta do seu processo, e não o contrário. Três: agentes de IA — colocar a IA para executar trabalho de verdade dentro da empresa.</a:t>
-            </a:r>
-          </a:p>
-          <a:p/>
-          <a:p>
-            <a:r>
-              <a:t>Vou passar rápido pelas três. E pode me interromper na hora em que alguma fizer clique com algo que vocês vivem aí dentro — essa é a parte boa da conversa.</a:t>
+              <a:rPr dirty="0" err="1"/>
+              <a:t>Objetivo</a:t>
+            </a:r>
+            <a:r>
+              <a:rPr dirty="0"/>
+              <a:t>: </a:t>
+            </a:r>
+            <a:r>
+              <a:rPr dirty="0" err="1"/>
+              <a:t>dar</a:t>
+            </a:r>
+            <a:r>
+              <a:rPr dirty="0"/>
+              <a:t> o </a:t>
+            </a:r>
+            <a:r>
+              <a:rPr dirty="0" err="1"/>
+              <a:t>mapa</a:t>
+            </a:r>
+            <a:r>
+              <a:rPr dirty="0"/>
+              <a:t> da conversa e </a:t>
+            </a:r>
+            <a:r>
+              <a:rPr dirty="0" err="1"/>
+              <a:t>convidar</a:t>
+            </a:r>
+            <a:r>
+              <a:rPr dirty="0"/>
+              <a:t> a </a:t>
+            </a:r>
+            <a:r>
+              <a:rPr dirty="0" err="1"/>
+              <a:t>interrupção</a:t>
+            </a:r>
+            <a:r>
+              <a:rPr dirty="0"/>
+              <a:t> (</a:t>
+            </a:r>
+            <a:r>
+              <a:rPr dirty="0" err="1"/>
+              <a:t>engajamento</a:t>
+            </a:r>
+            <a:r>
+              <a:rPr dirty="0"/>
+              <a:t>). ≈ 40s</a:t>
+            </a:r>
+          </a:p>
+          <a:p>
+            <a:endParaRPr dirty="0"/>
+          </a:p>
+          <a:p>
+            <a:r>
+              <a:rPr dirty="0"/>
+              <a:t>Na </a:t>
+            </a:r>
+            <a:r>
+              <a:rPr dirty="0" err="1"/>
+              <a:t>prática</a:t>
+            </a:r>
+            <a:r>
+              <a:rPr dirty="0"/>
+              <a:t>, o </a:t>
+            </a:r>
+            <a:r>
+              <a:rPr dirty="0" err="1"/>
+              <a:t>que</a:t>
+            </a:r>
+            <a:r>
+              <a:rPr dirty="0"/>
+              <a:t> a </a:t>
+            </a:r>
+            <a:r>
+              <a:rPr dirty="0" err="1"/>
+              <a:t>gente</a:t>
+            </a:r>
+            <a:r>
+              <a:rPr dirty="0"/>
+              <a:t> </a:t>
+            </a:r>
+            <a:r>
+              <a:rPr dirty="0" err="1"/>
+              <a:t>constrói</a:t>
+            </a:r>
+            <a:r>
+              <a:rPr dirty="0"/>
+              <a:t> se </a:t>
+            </a:r>
+            <a:r>
+              <a:rPr dirty="0" err="1"/>
+              <a:t>organiza</a:t>
+            </a:r>
+            <a:r>
+              <a:rPr dirty="0"/>
+              <a:t> </a:t>
+            </a:r>
+            <a:r>
+              <a:rPr dirty="0" err="1"/>
+              <a:t>em</a:t>
+            </a:r>
+            <a:r>
+              <a:rPr dirty="0"/>
+              <a:t> </a:t>
+            </a:r>
+            <a:r>
+              <a:rPr dirty="0" err="1"/>
+              <a:t>três</a:t>
+            </a:r>
+            <a:r>
+              <a:rPr dirty="0"/>
+              <a:t> </a:t>
+            </a:r>
+            <a:r>
+              <a:rPr dirty="0" err="1"/>
+              <a:t>frentes</a:t>
+            </a:r>
+            <a:r>
+              <a:rPr dirty="0"/>
+              <a:t>.</a:t>
+            </a:r>
+          </a:p>
+          <a:p>
+            <a:endParaRPr dirty="0"/>
+          </a:p>
+          <a:p>
+            <a:r>
+              <a:rPr dirty="0"/>
+              <a:t>Um: </a:t>
+            </a:r>
+            <a:r>
+              <a:rPr dirty="0" err="1"/>
+              <a:t>receita</a:t>
+            </a:r>
+            <a:r>
+              <a:rPr dirty="0"/>
+              <a:t> nova — </a:t>
+            </a:r>
+            <a:r>
+              <a:rPr dirty="0" err="1"/>
+              <a:t>transformar</a:t>
+            </a:r>
+            <a:r>
+              <a:rPr dirty="0"/>
+              <a:t> o </a:t>
+            </a:r>
+            <a:r>
+              <a:rPr dirty="0" err="1"/>
+              <a:t>que</a:t>
+            </a:r>
+            <a:r>
+              <a:rPr dirty="0"/>
+              <a:t> a </a:t>
+            </a:r>
+            <a:r>
+              <a:rPr dirty="0" err="1"/>
+              <a:t>empresa</a:t>
+            </a:r>
+            <a:r>
+              <a:rPr dirty="0"/>
+              <a:t> </a:t>
+            </a:r>
+            <a:r>
+              <a:rPr dirty="0" err="1"/>
+              <a:t>já</a:t>
+            </a:r>
+            <a:r>
+              <a:rPr dirty="0"/>
+              <a:t> </a:t>
+            </a:r>
+            <a:r>
+              <a:rPr dirty="0" err="1"/>
+              <a:t>tem</a:t>
+            </a:r>
+            <a:r>
+              <a:rPr dirty="0"/>
+              <a:t> </a:t>
+            </a:r>
+            <a:r>
+              <a:rPr dirty="0" err="1"/>
+              <a:t>em</a:t>
+            </a:r>
+            <a:r>
+              <a:rPr dirty="0"/>
+              <a:t> um </a:t>
+            </a:r>
+            <a:r>
+              <a:rPr dirty="0" err="1"/>
+              <a:t>produto</a:t>
+            </a:r>
+            <a:r>
+              <a:rPr dirty="0"/>
+              <a:t> digital </a:t>
+            </a:r>
+            <a:r>
+              <a:rPr dirty="0" err="1"/>
+              <a:t>que</a:t>
+            </a:r>
+            <a:r>
+              <a:rPr dirty="0"/>
+              <a:t> </a:t>
+            </a:r>
+            <a:r>
+              <a:rPr dirty="0" err="1"/>
+              <a:t>os</a:t>
+            </a:r>
+            <a:r>
+              <a:rPr dirty="0"/>
+              <a:t> </a:t>
+            </a:r>
+            <a:r>
+              <a:rPr dirty="0" err="1"/>
+              <a:t>clientes</a:t>
+            </a:r>
+            <a:r>
+              <a:rPr dirty="0"/>
+              <a:t> dela </a:t>
+            </a:r>
+            <a:r>
+              <a:rPr dirty="0" err="1"/>
+              <a:t>pagariam</a:t>
+            </a:r>
+            <a:r>
+              <a:rPr dirty="0"/>
+              <a:t> para usar. </a:t>
+            </a:r>
+            <a:r>
+              <a:rPr dirty="0" err="1"/>
+              <a:t>Dois</a:t>
+            </a:r>
+            <a:r>
+              <a:rPr dirty="0"/>
+              <a:t>: </a:t>
+            </a:r>
+            <a:r>
+              <a:rPr dirty="0" err="1"/>
+              <a:t>operação</a:t>
+            </a:r>
+            <a:r>
+              <a:rPr dirty="0"/>
+              <a:t> — </a:t>
+            </a:r>
+            <a:r>
+              <a:rPr dirty="0" err="1"/>
+              <a:t>sistemas</a:t>
+            </a:r>
+            <a:r>
+              <a:rPr dirty="0"/>
+              <a:t> </a:t>
+            </a:r>
+            <a:r>
+              <a:rPr dirty="0" err="1"/>
+              <a:t>construídos</a:t>
+            </a:r>
+            <a:r>
+              <a:rPr dirty="0"/>
+              <a:t> </a:t>
+            </a:r>
+            <a:r>
+              <a:rPr dirty="0" err="1"/>
+              <a:t>em</a:t>
+            </a:r>
+            <a:r>
+              <a:rPr dirty="0"/>
+              <a:t> volta do </a:t>
+            </a:r>
+            <a:r>
+              <a:rPr dirty="0" err="1"/>
+              <a:t>seu</a:t>
+            </a:r>
+            <a:r>
+              <a:rPr dirty="0"/>
+              <a:t> </a:t>
+            </a:r>
+            <a:r>
+              <a:rPr dirty="0" err="1"/>
+              <a:t>processo</a:t>
+            </a:r>
+            <a:r>
+              <a:rPr dirty="0"/>
+              <a:t>, e </a:t>
+            </a:r>
+            <a:r>
+              <a:rPr dirty="0" err="1"/>
+              <a:t>não</a:t>
+            </a:r>
+            <a:r>
+              <a:rPr dirty="0"/>
+              <a:t> o </a:t>
+            </a:r>
+            <a:r>
+              <a:rPr dirty="0" err="1"/>
+              <a:t>contrário</a:t>
+            </a:r>
+            <a:r>
+              <a:rPr dirty="0"/>
+              <a:t>. </a:t>
+            </a:r>
+            <a:r>
+              <a:rPr dirty="0" err="1"/>
+              <a:t>Três</a:t>
+            </a:r>
+            <a:r>
+              <a:rPr dirty="0"/>
+              <a:t>: </a:t>
+            </a:r>
+            <a:r>
+              <a:rPr dirty="0" err="1"/>
+              <a:t>agentes</a:t>
+            </a:r>
+            <a:r>
+              <a:rPr dirty="0"/>
+              <a:t> de IA — </a:t>
+            </a:r>
+            <a:r>
+              <a:rPr dirty="0" err="1"/>
+              <a:t>colocar</a:t>
+            </a:r>
+            <a:r>
+              <a:rPr dirty="0"/>
+              <a:t> a IA para </a:t>
+            </a:r>
+            <a:r>
+              <a:rPr dirty="0" err="1"/>
+              <a:t>executar</a:t>
+            </a:r>
+            <a:r>
+              <a:rPr dirty="0"/>
+              <a:t> </a:t>
+            </a:r>
+            <a:r>
+              <a:rPr dirty="0" err="1"/>
+              <a:t>trabalho</a:t>
+            </a:r>
+            <a:r>
+              <a:rPr dirty="0"/>
+              <a:t> de </a:t>
+            </a:r>
+            <a:r>
+              <a:rPr dirty="0" err="1"/>
+              <a:t>verdade</a:t>
+            </a:r>
+            <a:r>
+              <a:rPr dirty="0"/>
+              <a:t> </a:t>
+            </a:r>
+            <a:r>
+              <a:rPr dirty="0" err="1"/>
+              <a:t>dentro</a:t>
+            </a:r>
+            <a:r>
+              <a:rPr dirty="0"/>
+              <a:t> da </a:t>
+            </a:r>
+            <a:r>
+              <a:rPr dirty="0" err="1"/>
+              <a:t>empresa</a:t>
+            </a:r>
+            <a:r>
+              <a:rPr dirty="0"/>
+              <a:t>.</a:t>
+            </a:r>
+          </a:p>
+          <a:p>
+            <a:endParaRPr dirty="0"/>
+          </a:p>
+          <a:p>
+            <a:r>
+              <a:rPr dirty="0"/>
+              <a:t>Vou </a:t>
+            </a:r>
+            <a:r>
+              <a:rPr dirty="0" err="1"/>
+              <a:t>passar</a:t>
+            </a:r>
+            <a:r>
+              <a:rPr dirty="0"/>
+              <a:t> </a:t>
+            </a:r>
+            <a:r>
+              <a:rPr dirty="0" err="1"/>
+              <a:t>rápido</a:t>
+            </a:r>
+            <a:r>
+              <a:rPr dirty="0"/>
+              <a:t> </a:t>
+            </a:r>
+            <a:r>
+              <a:rPr dirty="0" err="1"/>
+              <a:t>pelas</a:t>
+            </a:r>
+            <a:r>
+              <a:rPr dirty="0"/>
+              <a:t> </a:t>
+            </a:r>
+            <a:r>
+              <a:rPr dirty="0" err="1"/>
+              <a:t>três</a:t>
+            </a:r>
+            <a:r>
+              <a:rPr dirty="0"/>
+              <a:t>. E </a:t>
+            </a:r>
+            <a:r>
+              <a:rPr dirty="0" err="1"/>
+              <a:t>pode</a:t>
+            </a:r>
+            <a:r>
+              <a:rPr dirty="0"/>
+              <a:t> me </a:t>
+            </a:r>
+            <a:r>
+              <a:rPr dirty="0" err="1"/>
+              <a:t>interromper</a:t>
+            </a:r>
+            <a:r>
+              <a:rPr dirty="0"/>
+              <a:t> </a:t>
+            </a:r>
+            <a:r>
+              <a:rPr dirty="0" err="1"/>
+              <a:t>na</a:t>
+            </a:r>
+            <a:r>
+              <a:rPr dirty="0"/>
+              <a:t> hora </a:t>
+            </a:r>
+            <a:r>
+              <a:rPr dirty="0" err="1"/>
+              <a:t>em</a:t>
+            </a:r>
+            <a:r>
+              <a:rPr dirty="0"/>
+              <a:t> </a:t>
+            </a:r>
+            <a:r>
+              <a:rPr dirty="0" err="1"/>
+              <a:t>que</a:t>
+            </a:r>
+            <a:r>
+              <a:rPr dirty="0"/>
+              <a:t> </a:t>
+            </a:r>
+            <a:r>
+              <a:rPr dirty="0" err="1"/>
+              <a:t>alguma</a:t>
+            </a:r>
+            <a:r>
+              <a:rPr dirty="0"/>
+              <a:t> </a:t>
+            </a:r>
+            <a:r>
+              <a:rPr dirty="0" err="1"/>
+              <a:t>fizer</a:t>
+            </a:r>
+            <a:r>
+              <a:rPr dirty="0"/>
+              <a:t> clique com algo </a:t>
+            </a:r>
+            <a:r>
+              <a:rPr dirty="0" err="1"/>
+              <a:t>que</a:t>
+            </a:r>
+            <a:r>
+              <a:rPr dirty="0"/>
+              <a:t> </a:t>
+            </a:r>
+            <a:r>
+              <a:rPr dirty="0" err="1"/>
+              <a:t>vocês</a:t>
+            </a:r>
+            <a:r>
+              <a:rPr dirty="0"/>
+              <a:t> </a:t>
+            </a:r>
+            <a:r>
+              <a:rPr dirty="0" err="1"/>
+              <a:t>vivem</a:t>
+            </a:r>
+            <a:r>
+              <a:rPr dirty="0"/>
+              <a:t> </a:t>
+            </a:r>
+            <a:r>
+              <a:rPr dirty="0" err="1"/>
+              <a:t>aí</a:t>
+            </a:r>
+            <a:r>
+              <a:rPr dirty="0"/>
+              <a:t> </a:t>
+            </a:r>
+            <a:r>
+              <a:rPr dirty="0" err="1"/>
+              <a:t>dentro</a:t>
+            </a:r>
+            <a:r>
+              <a:rPr dirty="0"/>
+              <a:t> — </a:t>
+            </a:r>
+            <a:r>
+              <a:rPr dirty="0" err="1"/>
+              <a:t>essa</a:t>
+            </a:r>
+            <a:r>
+              <a:rPr dirty="0"/>
+              <a:t> é a </a:t>
+            </a:r>
+            <a:r>
+              <a:rPr dirty="0" err="1"/>
+              <a:t>parte</a:t>
+            </a:r>
+            <a:r>
+              <a:rPr dirty="0"/>
+              <a:t> boa da conversa.</a:t>
             </a:r>
           </a:p>
         </p:txBody>
@@ -1183,7 +4652,7 @@
             <a:spLocks noGrp="1"/>
           </p:cNvSpPr>
           <p:nvPr>
-            <p:ph type="sldNum" idx="5" sz="quarter"/>
+            <p:ph type="sldNum" sz="quarter" idx="5"/>
           </p:nvPr>
         </p:nvSpPr>
         <p:spPr/>
@@ -1197,7 +4666,7 @@
 </file>
 
 <file path=ppt/notesSlides/notesSlide6.xml><?xml version="1.0" encoding="utf-8"?>
-<p:notes xmlns:a="http://schemas.openxmlformats.org/drawingml/2006/main" xmlns:p="http://schemas.openxmlformats.org/presentationml/2006/main" xmlns:r="http://schemas.openxmlformats.org/officeDocument/2006/relationships">
+<p:notes xmlns:a="http://schemas.openxmlformats.org/drawingml/2006/main" xmlns:r="http://schemas.openxmlformats.org/officeDocument/2006/relationships" xmlns:p="http://schemas.openxmlformats.org/presentationml/2006/main">
   <p:cSld>
     <p:spTree>
       <p:nvGrpSpPr>
@@ -1217,7 +4686,7 @@
         <p:nvSpPr>
           <p:cNvPr id="2" name="Slide Image Placeholder 1"/>
           <p:cNvSpPr>
-            <a:spLocks noGrp="1"/>
+            <a:spLocks noGrp="1" noRot="1" noChangeAspect="1"/>
           </p:cNvSpPr>
           <p:nvPr>
             <p:ph type="sldImg" idx="2"/>
@@ -1232,7 +4701,7 @@
             <a:spLocks noGrp="1"/>
           </p:cNvSpPr>
           <p:nvPr>
-            <p:ph type="body" idx="3" sz="quarter"/>
+            <p:ph type="body" sz="quarter" idx="3"/>
           </p:nvPr>
         </p:nvSpPr>
         <p:spPr/>
@@ -1241,31 +4710,636 @@
           <a:lstStyle/>
           <a:p>
             <a:r>
-              <a:t>Objetivo: plantar a pergunta que fica na cabeça depois da reunião. ≈ 60s</a:t>
-            </a:r>
-          </a:p>
-          <a:p/>
-          <a:p>
-            <a:r>
-              <a:t>Primeira frente.</a:t>
-            </a:r>
-          </a:p>
-          <a:p/>
-          <a:p>
-            <a:r>
-              <a:t>A sua empresa já conquistou o mais difícil: clientes, confiança, conhecimento, distribuição. Isso levou anos. A pergunta que a gente faz é: o que MAIS essas pessoas comprariam de você?</a:t>
-            </a:r>
-          </a:p>
-          <a:p/>
-          <a:p>
-            <a:r>
-              <a:t>Pode ser um portal, uma assinatura, uma ferramenta que resolve uma dor do seu cliente. Cada produto nasce da base que já existe — por isso esse gráfico é conceitual, sem números: os números vêm do diagnóstico, do SEU caso, não de uma promessa genérica minha.</a:t>
-            </a:r>
-          </a:p>
-          <a:p/>
-          <a:p>
-            <a:r>
-              <a:t>Mas leva essa pergunta para casa: se uma parte dos seus clientes pagasse por um novo produto digital seu... o que valeria a pena construir?</a:t>
+              <a:rPr dirty="0" err="1"/>
+              <a:t>Objetivo</a:t>
+            </a:r>
+            <a:r>
+              <a:rPr dirty="0"/>
+              <a:t>: plantar a </a:t>
+            </a:r>
+            <a:r>
+              <a:rPr dirty="0" err="1"/>
+              <a:t>pergunta</a:t>
+            </a:r>
+            <a:r>
+              <a:rPr dirty="0"/>
+              <a:t> </a:t>
+            </a:r>
+            <a:r>
+              <a:rPr dirty="0" err="1"/>
+              <a:t>que</a:t>
+            </a:r>
+            <a:r>
+              <a:rPr dirty="0"/>
+              <a:t> </a:t>
+            </a:r>
+            <a:r>
+              <a:rPr dirty="0" err="1"/>
+              <a:t>fica</a:t>
+            </a:r>
+            <a:r>
+              <a:rPr dirty="0"/>
+              <a:t> </a:t>
+            </a:r>
+            <a:r>
+              <a:rPr dirty="0" err="1"/>
+              <a:t>na</a:t>
+            </a:r>
+            <a:r>
+              <a:rPr dirty="0"/>
+              <a:t> </a:t>
+            </a:r>
+            <a:r>
+              <a:rPr dirty="0" err="1"/>
+              <a:t>cabeça</a:t>
+            </a:r>
+            <a:r>
+              <a:rPr dirty="0"/>
+              <a:t> </a:t>
+            </a:r>
+            <a:r>
+              <a:rPr dirty="0" err="1"/>
+              <a:t>depois</a:t>
+            </a:r>
+            <a:r>
+              <a:rPr dirty="0"/>
+              <a:t> da </a:t>
+            </a:r>
+            <a:r>
+              <a:rPr dirty="0" err="1"/>
+              <a:t>reunião</a:t>
+            </a:r>
+            <a:r>
+              <a:rPr dirty="0"/>
+              <a:t>. ≈ 60s</a:t>
+            </a:r>
+          </a:p>
+          <a:p>
+            <a:endParaRPr dirty="0"/>
+          </a:p>
+          <a:p>
+            <a:r>
+              <a:rPr dirty="0" err="1"/>
+              <a:t>Primeira</a:t>
+            </a:r>
+            <a:r>
+              <a:rPr dirty="0"/>
+              <a:t> </a:t>
+            </a:r>
+            <a:r>
+              <a:rPr dirty="0" err="1"/>
+              <a:t>frente</a:t>
+            </a:r>
+            <a:r>
+              <a:rPr dirty="0"/>
+              <a:t>.</a:t>
+            </a:r>
+          </a:p>
+          <a:p>
+            <a:endParaRPr dirty="0"/>
+          </a:p>
+          <a:p>
+            <a:r>
+              <a:rPr dirty="0"/>
+              <a:t>A </a:t>
+            </a:r>
+            <a:r>
+              <a:rPr dirty="0" err="1"/>
+              <a:t>sua</a:t>
+            </a:r>
+            <a:r>
+              <a:rPr dirty="0"/>
+              <a:t> </a:t>
+            </a:r>
+            <a:r>
+              <a:rPr dirty="0" err="1"/>
+              <a:t>empresa</a:t>
+            </a:r>
+            <a:r>
+              <a:rPr dirty="0"/>
+              <a:t> </a:t>
+            </a:r>
+            <a:r>
+              <a:rPr dirty="0" err="1"/>
+              <a:t>já</a:t>
+            </a:r>
+            <a:r>
+              <a:rPr dirty="0"/>
+              <a:t> </a:t>
+            </a:r>
+            <a:r>
+              <a:rPr dirty="0" err="1"/>
+              <a:t>conquistou</a:t>
+            </a:r>
+            <a:r>
+              <a:rPr dirty="0"/>
+              <a:t> o </a:t>
+            </a:r>
+            <a:r>
+              <a:rPr dirty="0" err="1"/>
+              <a:t>mais</a:t>
+            </a:r>
+            <a:r>
+              <a:rPr dirty="0"/>
+              <a:t> </a:t>
+            </a:r>
+            <a:r>
+              <a:rPr dirty="0" err="1"/>
+              <a:t>difícil</a:t>
+            </a:r>
+            <a:r>
+              <a:rPr dirty="0"/>
+              <a:t>: </a:t>
+            </a:r>
+            <a:r>
+              <a:rPr dirty="0" err="1"/>
+              <a:t>clientes</a:t>
+            </a:r>
+            <a:r>
+              <a:rPr dirty="0"/>
+              <a:t>, </a:t>
+            </a:r>
+            <a:r>
+              <a:rPr dirty="0" err="1"/>
+              <a:t>confiança</a:t>
+            </a:r>
+            <a:r>
+              <a:rPr dirty="0"/>
+              <a:t>, </a:t>
+            </a:r>
+            <a:r>
+              <a:rPr dirty="0" err="1"/>
+              <a:t>conhecimento</a:t>
+            </a:r>
+            <a:r>
+              <a:rPr dirty="0"/>
+              <a:t>, </a:t>
+            </a:r>
+            <a:r>
+              <a:rPr dirty="0" err="1"/>
+              <a:t>distribuição</a:t>
+            </a:r>
+            <a:r>
+              <a:rPr dirty="0"/>
+              <a:t>. </a:t>
+            </a:r>
+            <a:r>
+              <a:rPr dirty="0" err="1"/>
+              <a:t>Isso</a:t>
+            </a:r>
+            <a:r>
+              <a:rPr dirty="0"/>
+              <a:t> </a:t>
+            </a:r>
+            <a:r>
+              <a:rPr dirty="0" err="1"/>
+              <a:t>levou</a:t>
+            </a:r>
+            <a:r>
+              <a:rPr dirty="0"/>
+              <a:t> </a:t>
+            </a:r>
+            <a:r>
+              <a:rPr dirty="0" err="1"/>
+              <a:t>anos</a:t>
+            </a:r>
+            <a:r>
+              <a:rPr dirty="0"/>
+              <a:t>. A </a:t>
+            </a:r>
+            <a:r>
+              <a:rPr dirty="0" err="1"/>
+              <a:t>pergunta</a:t>
+            </a:r>
+            <a:r>
+              <a:rPr dirty="0"/>
+              <a:t> </a:t>
+            </a:r>
+            <a:r>
+              <a:rPr dirty="0" err="1"/>
+              <a:t>que</a:t>
+            </a:r>
+            <a:r>
+              <a:rPr dirty="0"/>
+              <a:t> a </a:t>
+            </a:r>
+            <a:r>
+              <a:rPr dirty="0" err="1"/>
+              <a:t>gente</a:t>
+            </a:r>
+            <a:r>
+              <a:rPr dirty="0"/>
+              <a:t> </a:t>
+            </a:r>
+            <a:r>
+              <a:rPr dirty="0" err="1"/>
+              <a:t>faz</a:t>
+            </a:r>
+            <a:r>
+              <a:rPr dirty="0"/>
+              <a:t> é: o </a:t>
+            </a:r>
+            <a:r>
+              <a:rPr dirty="0" err="1"/>
+              <a:t>que</a:t>
+            </a:r>
+            <a:r>
+              <a:rPr dirty="0"/>
+              <a:t> MAIS </a:t>
+            </a:r>
+            <a:r>
+              <a:rPr dirty="0" err="1"/>
+              <a:t>essas</a:t>
+            </a:r>
+            <a:r>
+              <a:rPr dirty="0"/>
+              <a:t> </a:t>
+            </a:r>
+            <a:r>
+              <a:rPr dirty="0" err="1"/>
+              <a:t>pessoas</a:t>
+            </a:r>
+            <a:r>
+              <a:rPr dirty="0"/>
+              <a:t> </a:t>
+            </a:r>
+            <a:r>
+              <a:rPr dirty="0" err="1"/>
+              <a:t>comprariam</a:t>
+            </a:r>
+            <a:r>
+              <a:rPr dirty="0"/>
+              <a:t> de </a:t>
+            </a:r>
+            <a:r>
+              <a:rPr dirty="0" err="1"/>
+              <a:t>você</a:t>
+            </a:r>
+            <a:r>
+              <a:rPr dirty="0"/>
+              <a:t>?</a:t>
+            </a:r>
+          </a:p>
+          <a:p>
+            <a:endParaRPr dirty="0"/>
+          </a:p>
+          <a:p>
+            <a:r>
+              <a:rPr dirty="0"/>
+              <a:t>Pode ser um portal, </a:t>
+            </a:r>
+            <a:r>
+              <a:rPr dirty="0" err="1"/>
+              <a:t>uma</a:t>
+            </a:r>
+            <a:r>
+              <a:rPr dirty="0"/>
+              <a:t> </a:t>
+            </a:r>
+            <a:r>
+              <a:rPr dirty="0" err="1"/>
+              <a:t>assinatura</a:t>
+            </a:r>
+            <a:r>
+              <a:rPr dirty="0"/>
+              <a:t>, </a:t>
+            </a:r>
+            <a:r>
+              <a:rPr dirty="0" err="1"/>
+              <a:t>uma</a:t>
+            </a:r>
+            <a:r>
+              <a:rPr dirty="0"/>
+              <a:t> ferramenta </a:t>
+            </a:r>
+            <a:r>
+              <a:rPr dirty="0" err="1"/>
+              <a:t>que</a:t>
+            </a:r>
+            <a:r>
+              <a:rPr dirty="0"/>
+              <a:t> resolve </a:t>
+            </a:r>
+            <a:r>
+              <a:rPr dirty="0" err="1"/>
+              <a:t>uma</a:t>
+            </a:r>
+            <a:r>
+              <a:rPr dirty="0"/>
+              <a:t> </a:t>
+            </a:r>
+            <a:r>
+              <a:rPr dirty="0" err="1"/>
+              <a:t>dor</a:t>
+            </a:r>
+            <a:r>
+              <a:rPr dirty="0"/>
+              <a:t> do </a:t>
+            </a:r>
+            <a:r>
+              <a:rPr dirty="0" err="1"/>
+              <a:t>seu</a:t>
+            </a:r>
+            <a:r>
+              <a:rPr dirty="0"/>
+              <a:t> </a:t>
+            </a:r>
+            <a:r>
+              <a:rPr dirty="0" err="1"/>
+              <a:t>cliente</a:t>
+            </a:r>
+            <a:r>
+              <a:rPr dirty="0"/>
+              <a:t>. Cada </a:t>
+            </a:r>
+            <a:r>
+              <a:rPr dirty="0" err="1"/>
+              <a:t>produto</a:t>
+            </a:r>
+            <a:r>
+              <a:rPr dirty="0"/>
+              <a:t> </a:t>
+            </a:r>
+            <a:r>
+              <a:rPr dirty="0" err="1"/>
+              <a:t>nasce</a:t>
+            </a:r>
+            <a:r>
+              <a:rPr dirty="0"/>
+              <a:t> da base </a:t>
+            </a:r>
+            <a:r>
+              <a:rPr dirty="0" err="1"/>
+              <a:t>que</a:t>
+            </a:r>
+            <a:r>
+              <a:rPr dirty="0"/>
+              <a:t> </a:t>
+            </a:r>
+            <a:r>
+              <a:rPr dirty="0" err="1"/>
+              <a:t>já</a:t>
+            </a:r>
+            <a:r>
+              <a:rPr dirty="0"/>
+              <a:t> </a:t>
+            </a:r>
+            <a:r>
+              <a:rPr dirty="0" err="1"/>
+              <a:t>existe</a:t>
+            </a:r>
+            <a:r>
+              <a:rPr dirty="0"/>
+              <a:t> — </a:t>
+            </a:r>
+            <a:r>
+              <a:rPr dirty="0" err="1"/>
+              <a:t>por</a:t>
+            </a:r>
+            <a:r>
+              <a:rPr dirty="0"/>
+              <a:t> </a:t>
+            </a:r>
+            <a:r>
+              <a:rPr dirty="0" err="1"/>
+              <a:t>isso</a:t>
+            </a:r>
+            <a:r>
+              <a:rPr dirty="0"/>
+              <a:t> esse </a:t>
+            </a:r>
+            <a:r>
+              <a:rPr dirty="0" err="1"/>
+              <a:t>gráfico</a:t>
+            </a:r>
+            <a:r>
+              <a:rPr dirty="0"/>
+              <a:t> é </a:t>
+            </a:r>
+            <a:r>
+              <a:rPr dirty="0" err="1"/>
+              <a:t>conceitual</a:t>
+            </a:r>
+            <a:r>
+              <a:rPr dirty="0"/>
+              <a:t>, </a:t>
+            </a:r>
+            <a:r>
+              <a:rPr dirty="0" err="1"/>
+              <a:t>sem</a:t>
+            </a:r>
+            <a:r>
+              <a:rPr dirty="0"/>
+              <a:t> </a:t>
+            </a:r>
+            <a:r>
+              <a:rPr dirty="0" err="1"/>
+              <a:t>números</a:t>
+            </a:r>
+            <a:r>
+              <a:rPr dirty="0"/>
+              <a:t>: </a:t>
+            </a:r>
+            <a:r>
+              <a:rPr dirty="0" err="1"/>
+              <a:t>os</a:t>
+            </a:r>
+            <a:r>
+              <a:rPr dirty="0"/>
+              <a:t> </a:t>
+            </a:r>
+            <a:r>
+              <a:rPr dirty="0" err="1"/>
+              <a:t>números</a:t>
+            </a:r>
+            <a:r>
+              <a:rPr dirty="0"/>
+              <a:t> </a:t>
+            </a:r>
+            <a:r>
+              <a:rPr dirty="0" err="1"/>
+              <a:t>vêm</a:t>
+            </a:r>
+            <a:r>
+              <a:rPr dirty="0"/>
+              <a:t> do </a:t>
+            </a:r>
+            <a:r>
+              <a:rPr dirty="0" err="1"/>
+              <a:t>diagnóstico</a:t>
+            </a:r>
+            <a:r>
+              <a:rPr dirty="0"/>
+              <a:t>, do SEU </a:t>
+            </a:r>
+            <a:r>
+              <a:rPr dirty="0" err="1"/>
+              <a:t>caso</a:t>
+            </a:r>
+            <a:r>
+              <a:rPr dirty="0"/>
+              <a:t>, </a:t>
+            </a:r>
+            <a:r>
+              <a:rPr dirty="0" err="1"/>
+              <a:t>não</a:t>
+            </a:r>
+            <a:r>
+              <a:rPr dirty="0"/>
+              <a:t> de </a:t>
+            </a:r>
+            <a:r>
+              <a:rPr dirty="0" err="1"/>
+              <a:t>uma</a:t>
+            </a:r>
+            <a:r>
+              <a:rPr dirty="0"/>
+              <a:t> </a:t>
+            </a:r>
+            <a:r>
+              <a:rPr dirty="0" err="1"/>
+              <a:t>promessa</a:t>
+            </a:r>
+            <a:r>
+              <a:rPr dirty="0"/>
+              <a:t> </a:t>
+            </a:r>
+            <a:r>
+              <a:rPr dirty="0" err="1"/>
+              <a:t>genérica</a:t>
+            </a:r>
+            <a:r>
+              <a:rPr dirty="0"/>
+              <a:t> </a:t>
+            </a:r>
+            <a:r>
+              <a:rPr dirty="0" err="1"/>
+              <a:t>minha</a:t>
+            </a:r>
+            <a:r>
+              <a:rPr dirty="0"/>
+              <a:t>.</a:t>
+            </a:r>
+          </a:p>
+          <a:p>
+            <a:endParaRPr dirty="0"/>
+          </a:p>
+          <a:p>
+            <a:r>
+              <a:rPr dirty="0"/>
+              <a:t>Mas leva </a:t>
+            </a:r>
+            <a:r>
+              <a:rPr dirty="0" err="1"/>
+              <a:t>essa</a:t>
+            </a:r>
+            <a:r>
+              <a:rPr dirty="0"/>
+              <a:t> </a:t>
+            </a:r>
+            <a:r>
+              <a:rPr dirty="0" err="1"/>
+              <a:t>pergunta</a:t>
+            </a:r>
+            <a:r>
+              <a:rPr dirty="0"/>
+              <a:t> para casa: se </a:t>
+            </a:r>
+            <a:r>
+              <a:rPr dirty="0" err="1"/>
+              <a:t>uma</a:t>
+            </a:r>
+            <a:r>
+              <a:rPr dirty="0"/>
+              <a:t> </a:t>
+            </a:r>
+            <a:r>
+              <a:rPr dirty="0" err="1"/>
+              <a:t>parte</a:t>
+            </a:r>
+            <a:r>
+              <a:rPr dirty="0"/>
+              <a:t> dos </a:t>
+            </a:r>
+            <a:r>
+              <a:rPr dirty="0" err="1"/>
+              <a:t>seus</a:t>
+            </a:r>
+            <a:r>
+              <a:rPr dirty="0"/>
+              <a:t> </a:t>
+            </a:r>
+            <a:r>
+              <a:rPr dirty="0" err="1"/>
+              <a:t>clientes</a:t>
+            </a:r>
+            <a:r>
+              <a:rPr dirty="0"/>
+              <a:t> </a:t>
+            </a:r>
+            <a:r>
+              <a:rPr dirty="0" err="1"/>
+              <a:t>pagasse</a:t>
+            </a:r>
+            <a:r>
+              <a:rPr dirty="0"/>
+              <a:t> </a:t>
+            </a:r>
+            <a:r>
+              <a:rPr dirty="0" err="1"/>
+              <a:t>por</a:t>
+            </a:r>
+            <a:r>
+              <a:rPr dirty="0"/>
+              <a:t> um novo </a:t>
+            </a:r>
+            <a:r>
+              <a:rPr dirty="0" err="1"/>
+              <a:t>produto</a:t>
+            </a:r>
+            <a:r>
+              <a:rPr dirty="0"/>
+              <a:t> digital </a:t>
+            </a:r>
+            <a:r>
+              <a:rPr dirty="0" err="1"/>
+              <a:t>seu</a:t>
+            </a:r>
+            <a:r>
+              <a:rPr dirty="0"/>
+              <a:t>... o </a:t>
+            </a:r>
+            <a:r>
+              <a:rPr dirty="0" err="1"/>
+              <a:t>que</a:t>
+            </a:r>
+            <a:r>
+              <a:rPr dirty="0"/>
+              <a:t> </a:t>
+            </a:r>
+            <a:r>
+              <a:rPr dirty="0" err="1"/>
+              <a:t>valeria</a:t>
+            </a:r>
+            <a:r>
+              <a:rPr dirty="0"/>
+              <a:t> a </a:t>
+            </a:r>
+            <a:r>
+              <a:rPr dirty="0" err="1"/>
+              <a:t>pena</a:t>
+            </a:r>
+            <a:r>
+              <a:rPr dirty="0"/>
+              <a:t> </a:t>
+            </a:r>
+            <a:r>
+              <a:rPr dirty="0" err="1"/>
+              <a:t>construir</a:t>
+            </a:r>
+            <a:r>
+              <a:rPr dirty="0"/>
+              <a:t>?</a:t>
             </a:r>
           </a:p>
         </p:txBody>
@@ -1277,7 +5351,7 @@
             <a:spLocks noGrp="1"/>
           </p:cNvSpPr>
           <p:nvPr>
-            <p:ph type="sldNum" idx="5" sz="quarter"/>
+            <p:ph type="sldNum" sz="quarter" idx="5"/>
           </p:nvPr>
         </p:nvSpPr>
         <p:spPr/>
@@ -1291,7 +5365,7 @@
 </file>
 
 <file path=ppt/notesSlides/notesSlide7.xml><?xml version="1.0" encoding="utf-8"?>
-<p:notes xmlns:a="http://schemas.openxmlformats.org/drawingml/2006/main" xmlns:p="http://schemas.openxmlformats.org/presentationml/2006/main" xmlns:r="http://schemas.openxmlformats.org/officeDocument/2006/relationships">
+<p:notes xmlns:a="http://schemas.openxmlformats.org/drawingml/2006/main" xmlns:r="http://schemas.openxmlformats.org/officeDocument/2006/relationships" xmlns:p="http://schemas.openxmlformats.org/presentationml/2006/main">
   <p:cSld>
     <p:spTree>
       <p:nvGrpSpPr>
@@ -1311,7 +5385,7 @@
         <p:nvSpPr>
           <p:cNvPr id="2" name="Slide Image Placeholder 1"/>
           <p:cNvSpPr>
-            <a:spLocks noGrp="1"/>
+            <a:spLocks noGrp="1" noRot="1" noChangeAspect="1"/>
           </p:cNvSpPr>
           <p:nvPr>
             <p:ph type="sldImg" idx="2"/>
@@ -1326,7 +5400,7 @@
             <a:spLocks noGrp="1"/>
           </p:cNvSpPr>
           <p:nvPr>
-            <p:ph type="body" idx="3" sz="quarter"/>
+            <p:ph type="body" sz="quarter" idx="3"/>
           </p:nvPr>
         </p:nvSpPr>
         <p:spPr/>
@@ -1335,31 +5409,508 @@
           <a:lstStyle/>
           <a:p>
             <a:r>
-              <a:t>Objetivo: inverter a lógica 'empresa se adapta ao software' e reforçar a parceria. ≈ 50s</a:t>
-            </a:r>
-          </a:p>
-          <a:p/>
-          <a:p>
-            <a:r>
-              <a:t>Segunda frente.</a:t>
-            </a:r>
-          </a:p>
-          <a:p/>
-          <a:p>
-            <a:r>
-              <a:t>Hoje, a informação da sua operação mora em lugares demais — está aí no slide: planilha, ERP, e-mail, documento... e na cabeça de gente boa. Software genérico obriga a SUA empresa a se adaptar a ELE. A gente inverte isso: constrói o sistema em volta do seu processo.</a:t>
-            </a:r>
-          </a:p>
-          <a:p/>
-          <a:p>
-            <a:r>
-              <a:t>O resultado é um lugar só, com a informação consolidada — e decisão com visibilidade, não no feeling.</a:t>
-            </a:r>
-          </a:p>
-          <a:p/>
-          <a:p>
-            <a:r>
-              <a:t>E vale repetir: você não precisa trazer a solução pronta. Você conhece o seu negócio; nós conhecemos tecnologia. O desenho a gente faz junto.</a:t>
+              <a:rPr dirty="0" err="1"/>
+              <a:t>Objetivo</a:t>
+            </a:r>
+            <a:r>
+              <a:rPr dirty="0"/>
+              <a:t>: inverter a </a:t>
+            </a:r>
+            <a:r>
+              <a:rPr dirty="0" err="1"/>
+              <a:t>lógica</a:t>
+            </a:r>
+            <a:r>
+              <a:rPr dirty="0"/>
+              <a:t> '</a:t>
+            </a:r>
+            <a:r>
+              <a:rPr dirty="0" err="1"/>
+              <a:t>empresa</a:t>
+            </a:r>
+            <a:r>
+              <a:rPr dirty="0"/>
+              <a:t> se </a:t>
+            </a:r>
+            <a:r>
+              <a:rPr dirty="0" err="1"/>
+              <a:t>adapta</a:t>
+            </a:r>
+            <a:r>
+              <a:rPr dirty="0"/>
+              <a:t> </a:t>
+            </a:r>
+            <a:r>
+              <a:rPr dirty="0" err="1"/>
+              <a:t>ao</a:t>
+            </a:r>
+            <a:r>
+              <a:rPr dirty="0"/>
+              <a:t> software' e </a:t>
+            </a:r>
+            <a:r>
+              <a:rPr dirty="0" err="1"/>
+              <a:t>reforçar</a:t>
+            </a:r>
+            <a:r>
+              <a:rPr dirty="0"/>
+              <a:t> a </a:t>
+            </a:r>
+            <a:r>
+              <a:rPr dirty="0" err="1"/>
+              <a:t>parceria</a:t>
+            </a:r>
+            <a:r>
+              <a:rPr dirty="0"/>
+              <a:t>. ≈ 50s</a:t>
+            </a:r>
+          </a:p>
+          <a:p>
+            <a:endParaRPr dirty="0"/>
+          </a:p>
+          <a:p>
+            <a:r>
+              <a:rPr dirty="0"/>
+              <a:t>Segunda </a:t>
+            </a:r>
+            <a:r>
+              <a:rPr dirty="0" err="1"/>
+              <a:t>frente</a:t>
+            </a:r>
+            <a:r>
+              <a:rPr dirty="0"/>
+              <a:t>.</a:t>
+            </a:r>
+          </a:p>
+          <a:p>
+            <a:endParaRPr dirty="0"/>
+          </a:p>
+          <a:p>
+            <a:r>
+              <a:rPr dirty="0" err="1"/>
+              <a:t>Hoje</a:t>
+            </a:r>
+            <a:r>
+              <a:rPr dirty="0"/>
+              <a:t>, a </a:t>
+            </a:r>
+            <a:r>
+              <a:rPr dirty="0" err="1"/>
+              <a:t>informação</a:t>
+            </a:r>
+            <a:r>
+              <a:rPr dirty="0"/>
+              <a:t> da </a:t>
+            </a:r>
+            <a:r>
+              <a:rPr dirty="0" err="1"/>
+              <a:t>sua</a:t>
+            </a:r>
+            <a:r>
+              <a:rPr dirty="0"/>
+              <a:t> </a:t>
+            </a:r>
+            <a:r>
+              <a:rPr dirty="0" err="1"/>
+              <a:t>operação</a:t>
+            </a:r>
+            <a:r>
+              <a:rPr dirty="0"/>
+              <a:t> mora </a:t>
+            </a:r>
+            <a:r>
+              <a:rPr dirty="0" err="1"/>
+              <a:t>em</a:t>
+            </a:r>
+            <a:r>
+              <a:rPr dirty="0"/>
+              <a:t> </a:t>
+            </a:r>
+            <a:r>
+              <a:rPr dirty="0" err="1"/>
+              <a:t>lugares</a:t>
+            </a:r>
+            <a:r>
+              <a:rPr dirty="0"/>
+              <a:t> </a:t>
+            </a:r>
+            <a:r>
+              <a:rPr dirty="0" err="1"/>
+              <a:t>demais</a:t>
+            </a:r>
+            <a:r>
+              <a:rPr dirty="0"/>
+              <a:t> — </a:t>
+            </a:r>
+            <a:r>
+              <a:rPr dirty="0" err="1"/>
+              <a:t>está</a:t>
+            </a:r>
+            <a:r>
+              <a:rPr dirty="0"/>
+              <a:t> </a:t>
+            </a:r>
+            <a:r>
+              <a:rPr dirty="0" err="1"/>
+              <a:t>aí</a:t>
+            </a:r>
+            <a:r>
+              <a:rPr dirty="0"/>
+              <a:t> no slide: </a:t>
+            </a:r>
+            <a:r>
+              <a:rPr dirty="0" err="1"/>
+              <a:t>planilha</a:t>
+            </a:r>
+            <a:r>
+              <a:rPr dirty="0"/>
+              <a:t>, ERP, e-mail, </a:t>
+            </a:r>
+            <a:r>
+              <a:rPr dirty="0" err="1"/>
+              <a:t>documento</a:t>
+            </a:r>
+            <a:r>
+              <a:rPr dirty="0"/>
+              <a:t>... e </a:t>
+            </a:r>
+            <a:r>
+              <a:rPr dirty="0" err="1"/>
+              <a:t>na</a:t>
+            </a:r>
+            <a:r>
+              <a:rPr dirty="0"/>
+              <a:t> </a:t>
+            </a:r>
+            <a:r>
+              <a:rPr dirty="0" err="1"/>
+              <a:t>cabeça</a:t>
+            </a:r>
+            <a:r>
+              <a:rPr dirty="0"/>
+              <a:t> de </a:t>
+            </a:r>
+            <a:r>
+              <a:rPr dirty="0" err="1"/>
+              <a:t>gente</a:t>
+            </a:r>
+            <a:r>
+              <a:rPr dirty="0"/>
+              <a:t> boa. Software </a:t>
+            </a:r>
+            <a:r>
+              <a:rPr dirty="0" err="1"/>
+              <a:t>genérico</a:t>
+            </a:r>
+            <a:r>
+              <a:rPr dirty="0"/>
+              <a:t> </a:t>
+            </a:r>
+            <a:r>
+              <a:rPr dirty="0" err="1"/>
+              <a:t>obriga</a:t>
+            </a:r>
+            <a:r>
+              <a:rPr dirty="0"/>
+              <a:t> a SUA </a:t>
+            </a:r>
+            <a:r>
+              <a:rPr dirty="0" err="1"/>
+              <a:t>empresa</a:t>
+            </a:r>
+            <a:r>
+              <a:rPr dirty="0"/>
+              <a:t> a se </a:t>
+            </a:r>
+            <a:r>
+              <a:rPr dirty="0" err="1"/>
+              <a:t>adaptar</a:t>
+            </a:r>
+            <a:r>
+              <a:rPr dirty="0"/>
+              <a:t> a ELE. A </a:t>
+            </a:r>
+            <a:r>
+              <a:rPr dirty="0" err="1"/>
+              <a:t>gente</a:t>
+            </a:r>
+            <a:r>
+              <a:rPr dirty="0"/>
+              <a:t> </a:t>
+            </a:r>
+            <a:r>
+              <a:rPr dirty="0" err="1"/>
+              <a:t>inverte</a:t>
+            </a:r>
+            <a:r>
+              <a:rPr dirty="0"/>
+              <a:t> </a:t>
+            </a:r>
+            <a:r>
+              <a:rPr dirty="0" err="1"/>
+              <a:t>isso</a:t>
+            </a:r>
+            <a:r>
+              <a:rPr dirty="0"/>
+              <a:t>: </a:t>
+            </a:r>
+            <a:r>
+              <a:rPr dirty="0" err="1"/>
+              <a:t>constrói</a:t>
+            </a:r>
+            <a:r>
+              <a:rPr dirty="0"/>
+              <a:t> o </a:t>
+            </a:r>
+            <a:r>
+              <a:rPr dirty="0" err="1"/>
+              <a:t>sistema</a:t>
+            </a:r>
+            <a:r>
+              <a:rPr dirty="0"/>
+              <a:t> </a:t>
+            </a:r>
+            <a:r>
+              <a:rPr dirty="0" err="1"/>
+              <a:t>em</a:t>
+            </a:r>
+            <a:r>
+              <a:rPr dirty="0"/>
+              <a:t> volta do </a:t>
+            </a:r>
+            <a:r>
+              <a:rPr dirty="0" err="1"/>
+              <a:t>seu</a:t>
+            </a:r>
+            <a:r>
+              <a:rPr dirty="0"/>
+              <a:t> </a:t>
+            </a:r>
+            <a:r>
+              <a:rPr dirty="0" err="1"/>
+              <a:t>processo</a:t>
+            </a:r>
+            <a:r>
+              <a:rPr dirty="0"/>
+              <a:t>.</a:t>
+            </a:r>
+          </a:p>
+          <a:p>
+            <a:endParaRPr dirty="0"/>
+          </a:p>
+          <a:p>
+            <a:r>
+              <a:rPr dirty="0"/>
+              <a:t>O </a:t>
+            </a:r>
+            <a:r>
+              <a:rPr dirty="0" err="1"/>
+              <a:t>resultado</a:t>
+            </a:r>
+            <a:r>
+              <a:rPr dirty="0"/>
+              <a:t> é um </a:t>
+            </a:r>
+            <a:r>
+              <a:rPr dirty="0" err="1"/>
+              <a:t>lugar</a:t>
+            </a:r>
+            <a:r>
+              <a:rPr dirty="0"/>
+              <a:t> </a:t>
+            </a:r>
+            <a:r>
+              <a:rPr dirty="0" err="1"/>
+              <a:t>só</a:t>
+            </a:r>
+            <a:r>
+              <a:rPr dirty="0"/>
+              <a:t>, com a </a:t>
+            </a:r>
+            <a:r>
+              <a:rPr dirty="0" err="1"/>
+              <a:t>informação</a:t>
+            </a:r>
+            <a:r>
+              <a:rPr dirty="0"/>
+              <a:t> </a:t>
+            </a:r>
+            <a:r>
+              <a:rPr dirty="0" err="1"/>
+              <a:t>consolidada</a:t>
+            </a:r>
+            <a:r>
+              <a:rPr dirty="0"/>
+              <a:t> — e </a:t>
+            </a:r>
+            <a:r>
+              <a:rPr dirty="0" err="1"/>
+              <a:t>decisão</a:t>
+            </a:r>
+            <a:r>
+              <a:rPr dirty="0"/>
+              <a:t> com </a:t>
+            </a:r>
+            <a:r>
+              <a:rPr dirty="0" err="1"/>
+              <a:t>visibilidade</a:t>
+            </a:r>
+            <a:r>
+              <a:rPr dirty="0"/>
+              <a:t>, </a:t>
+            </a:r>
+            <a:r>
+              <a:rPr dirty="0" err="1"/>
+              <a:t>não</a:t>
+            </a:r>
+            <a:r>
+              <a:rPr dirty="0"/>
+              <a:t> no feeling.</a:t>
+            </a:r>
+          </a:p>
+          <a:p>
+            <a:endParaRPr dirty="0"/>
+          </a:p>
+          <a:p>
+            <a:r>
+              <a:rPr dirty="0"/>
+              <a:t>E vale </a:t>
+            </a:r>
+            <a:r>
+              <a:rPr dirty="0" err="1"/>
+              <a:t>repetir</a:t>
+            </a:r>
+            <a:r>
+              <a:rPr dirty="0"/>
+              <a:t>: </a:t>
+            </a:r>
+            <a:r>
+              <a:rPr dirty="0" err="1"/>
+              <a:t>você</a:t>
+            </a:r>
+            <a:r>
+              <a:rPr dirty="0"/>
+              <a:t> </a:t>
+            </a:r>
+            <a:r>
+              <a:rPr dirty="0" err="1"/>
+              <a:t>não</a:t>
+            </a:r>
+            <a:r>
+              <a:rPr dirty="0"/>
+              <a:t> </a:t>
+            </a:r>
+            <a:r>
+              <a:rPr dirty="0" err="1"/>
+              <a:t>precisa</a:t>
+            </a:r>
+            <a:r>
+              <a:rPr dirty="0"/>
+              <a:t> </a:t>
+            </a:r>
+            <a:r>
+              <a:rPr dirty="0" err="1"/>
+              <a:t>trazer</a:t>
+            </a:r>
+            <a:r>
+              <a:rPr dirty="0"/>
+              <a:t> a </a:t>
+            </a:r>
+            <a:r>
+              <a:rPr dirty="0" err="1"/>
+              <a:t>solução</a:t>
+            </a:r>
+            <a:r>
+              <a:rPr dirty="0"/>
+              <a:t> </a:t>
+            </a:r>
+            <a:r>
+              <a:rPr dirty="0" err="1"/>
+              <a:t>pronta</a:t>
+            </a:r>
+            <a:r>
+              <a:rPr dirty="0"/>
+              <a:t>. </a:t>
+            </a:r>
+            <a:r>
+              <a:rPr dirty="0" err="1"/>
+              <a:t>Você</a:t>
+            </a:r>
+            <a:r>
+              <a:rPr dirty="0"/>
+              <a:t> </a:t>
+            </a:r>
+            <a:r>
+              <a:rPr dirty="0" err="1"/>
+              <a:t>conhece</a:t>
+            </a:r>
+            <a:r>
+              <a:rPr dirty="0"/>
+              <a:t> o </a:t>
+            </a:r>
+            <a:r>
+              <a:rPr dirty="0" err="1"/>
+              <a:t>seu</a:t>
+            </a:r>
+            <a:r>
+              <a:rPr dirty="0"/>
+              <a:t> </a:t>
+            </a:r>
+            <a:r>
+              <a:rPr dirty="0" err="1"/>
+              <a:t>negócio</a:t>
+            </a:r>
+            <a:r>
+              <a:rPr dirty="0"/>
+              <a:t>; </a:t>
+            </a:r>
+            <a:r>
+              <a:rPr dirty="0" err="1"/>
+              <a:t>nós</a:t>
+            </a:r>
+            <a:r>
+              <a:rPr dirty="0"/>
+              <a:t> </a:t>
+            </a:r>
+            <a:r>
+              <a:rPr dirty="0" err="1"/>
+              <a:t>conhecemos</a:t>
+            </a:r>
+            <a:r>
+              <a:rPr dirty="0"/>
+              <a:t> </a:t>
+            </a:r>
+            <a:r>
+              <a:rPr dirty="0" err="1"/>
+              <a:t>tecnologia</a:t>
+            </a:r>
+            <a:r>
+              <a:rPr dirty="0"/>
+              <a:t>. O </a:t>
+            </a:r>
+            <a:r>
+              <a:rPr dirty="0" err="1"/>
+              <a:t>desenho</a:t>
+            </a:r>
+            <a:r>
+              <a:rPr dirty="0"/>
+              <a:t> a </a:t>
+            </a:r>
+            <a:r>
+              <a:rPr dirty="0" err="1"/>
+              <a:t>gente</a:t>
+            </a:r>
+            <a:r>
+              <a:rPr dirty="0"/>
+              <a:t> </a:t>
+            </a:r>
+            <a:r>
+              <a:rPr dirty="0" err="1"/>
+              <a:t>faz</a:t>
+            </a:r>
+            <a:r>
+              <a:rPr dirty="0"/>
+              <a:t> junto.</a:t>
             </a:r>
           </a:p>
         </p:txBody>
@@ -1371,7 +5922,7 @@
             <a:spLocks noGrp="1"/>
           </p:cNvSpPr>
           <p:nvPr>
-            <p:ph type="sldNum" idx="5" sz="quarter"/>
+            <p:ph type="sldNum" sz="quarter" idx="5"/>
           </p:nvPr>
         </p:nvSpPr>
         <p:spPr/>
@@ -1385,7 +5936,7 @@
 </file>
 
 <file path=ppt/notesSlides/notesSlide8.xml><?xml version="1.0" encoding="utf-8"?>
-<p:notes xmlns:a="http://schemas.openxmlformats.org/drawingml/2006/main" xmlns:p="http://schemas.openxmlformats.org/presentationml/2006/main" xmlns:r="http://schemas.openxmlformats.org/officeDocument/2006/relationships">
+<p:notes xmlns:a="http://schemas.openxmlformats.org/drawingml/2006/main" xmlns:r="http://schemas.openxmlformats.org/officeDocument/2006/relationships" xmlns:p="http://schemas.openxmlformats.org/presentationml/2006/main">
   <p:cSld>
     <p:spTree>
       <p:nvGrpSpPr>
@@ -1405,7 +5956,7 @@
         <p:nvSpPr>
           <p:cNvPr id="2" name="Slide Image Placeholder 1"/>
           <p:cNvSpPr>
-            <a:spLocks noGrp="1"/>
+            <a:spLocks noGrp="1" noRot="1" noChangeAspect="1"/>
           </p:cNvSpPr>
           <p:nvPr>
             <p:ph type="sldImg" idx="2"/>
@@ -1420,7 +5971,7 @@
             <a:spLocks noGrp="1"/>
           </p:cNvSpPr>
           <p:nvPr>
-            <p:ph type="body" idx="3" sz="quarter"/>
+            <p:ph type="body" sz="quarter" idx="3"/>
           </p:nvPr>
         </p:nvSpPr>
         <p:spPr/>
@@ -1429,31 +5980,416 @@
           <a:lstStyle/>
           <a:p>
             <a:r>
-              <a:t>Objetivo: desfazer o mal-entendido 'agente = chatbot' e tranquilizar sobre controle. ≈ 50s</a:t>
-            </a:r>
-          </a:p>
-          <a:p/>
-          <a:p>
-            <a:r>
-              <a:t>Terceira frente — e aqui eu preciso desfazer um mal-entendido.</a:t>
-            </a:r>
-          </a:p>
-          <a:p/>
-          <a:p>
-            <a:r>
-              <a:t>Agente de IA não é chatbot. É software que executa etapas de um processo: interpreta informação, acessa as ferramentas que VOCÊ autorizar — CRM, ERP, WhatsApp, e-mail, documentos — e faz o trabalho.</a:t>
-            </a:r>
-          </a:p>
-          <a:p/>
-          <a:p>
-            <a:r>
-              <a:t>Com escopo definido, com regras, com permissões. E quando o assunto precisa de gente, ele passa para gente — está aí na saída de baixo do diagrama.</a:t>
-            </a:r>
-          </a:p>
-          <a:p/>
-          <a:p>
-            <a:r>
-              <a:t>Autonomia com controle. Sempre nessa ordem.</a:t>
+              <a:rPr dirty="0" err="1"/>
+              <a:t>Objetivo</a:t>
+            </a:r>
+            <a:r>
+              <a:rPr dirty="0"/>
+              <a:t>: </a:t>
+            </a:r>
+            <a:r>
+              <a:rPr dirty="0" err="1"/>
+              <a:t>desfazer</a:t>
+            </a:r>
+            <a:r>
+              <a:rPr dirty="0"/>
+              <a:t> o mal-</a:t>
+            </a:r>
+            <a:r>
+              <a:rPr dirty="0" err="1"/>
+              <a:t>entendido</a:t>
+            </a:r>
+            <a:r>
+              <a:rPr dirty="0"/>
+              <a:t> '</a:t>
+            </a:r>
+            <a:r>
+              <a:rPr dirty="0" err="1"/>
+              <a:t>agente</a:t>
+            </a:r>
+            <a:r>
+              <a:rPr dirty="0"/>
+              <a:t> = chatbot' e </a:t>
+            </a:r>
+            <a:r>
+              <a:rPr dirty="0" err="1"/>
+              <a:t>tranquilizar</a:t>
+            </a:r>
+            <a:r>
+              <a:rPr dirty="0"/>
+              <a:t> </a:t>
+            </a:r>
+            <a:r>
+              <a:rPr dirty="0" err="1"/>
+              <a:t>sobre</a:t>
+            </a:r>
+            <a:r>
+              <a:rPr dirty="0"/>
+              <a:t> </a:t>
+            </a:r>
+            <a:r>
+              <a:rPr dirty="0" err="1"/>
+              <a:t>controle</a:t>
+            </a:r>
+            <a:r>
+              <a:rPr dirty="0"/>
+              <a:t>. ≈ 50s</a:t>
+            </a:r>
+          </a:p>
+          <a:p>
+            <a:endParaRPr dirty="0"/>
+          </a:p>
+          <a:p>
+            <a:r>
+              <a:rPr dirty="0"/>
+              <a:t>Terceira </a:t>
+            </a:r>
+            <a:r>
+              <a:rPr dirty="0" err="1"/>
+              <a:t>frente</a:t>
+            </a:r>
+            <a:r>
+              <a:rPr dirty="0"/>
+              <a:t> — e </a:t>
+            </a:r>
+            <a:r>
+              <a:rPr dirty="0" err="1"/>
+              <a:t>aqui</a:t>
+            </a:r>
+            <a:r>
+              <a:rPr dirty="0"/>
+              <a:t> </a:t>
+            </a:r>
+            <a:r>
+              <a:rPr dirty="0" err="1"/>
+              <a:t>eu</a:t>
+            </a:r>
+            <a:r>
+              <a:rPr dirty="0"/>
+              <a:t> </a:t>
+            </a:r>
+            <a:r>
+              <a:rPr dirty="0" err="1"/>
+              <a:t>preciso</a:t>
+            </a:r>
+            <a:r>
+              <a:rPr dirty="0"/>
+              <a:t> </a:t>
+            </a:r>
+            <a:r>
+              <a:rPr dirty="0" err="1"/>
+              <a:t>desfazer</a:t>
+            </a:r>
+            <a:r>
+              <a:rPr dirty="0"/>
+              <a:t> um mal-</a:t>
+            </a:r>
+            <a:r>
+              <a:rPr dirty="0" err="1"/>
+              <a:t>entendido</a:t>
+            </a:r>
+            <a:r>
+              <a:rPr dirty="0"/>
+              <a:t>.</a:t>
+            </a:r>
+          </a:p>
+          <a:p>
+            <a:endParaRPr dirty="0"/>
+          </a:p>
+          <a:p>
+            <a:r>
+              <a:rPr dirty="0" err="1"/>
+              <a:t>Agente</a:t>
+            </a:r>
+            <a:r>
+              <a:rPr dirty="0"/>
+              <a:t> de IA </a:t>
+            </a:r>
+            <a:r>
+              <a:rPr dirty="0" err="1"/>
+              <a:t>não</a:t>
+            </a:r>
+            <a:r>
+              <a:rPr dirty="0"/>
+              <a:t> é chatbot. É software </a:t>
+            </a:r>
+            <a:r>
+              <a:rPr dirty="0" err="1"/>
+              <a:t>que</a:t>
+            </a:r>
+            <a:r>
+              <a:rPr dirty="0"/>
+              <a:t> </a:t>
+            </a:r>
+            <a:r>
+              <a:rPr dirty="0" err="1"/>
+              <a:t>executa</a:t>
+            </a:r>
+            <a:r>
+              <a:rPr dirty="0"/>
+              <a:t> </a:t>
+            </a:r>
+            <a:r>
+              <a:rPr dirty="0" err="1"/>
+              <a:t>etapas</a:t>
+            </a:r>
+            <a:r>
+              <a:rPr dirty="0"/>
+              <a:t> de um </a:t>
+            </a:r>
+            <a:r>
+              <a:rPr dirty="0" err="1"/>
+              <a:t>processo</a:t>
+            </a:r>
+            <a:r>
+              <a:rPr dirty="0"/>
+              <a:t>: </a:t>
+            </a:r>
+            <a:r>
+              <a:rPr dirty="0" err="1"/>
+              <a:t>interpreta</a:t>
+            </a:r>
+            <a:r>
+              <a:rPr dirty="0"/>
+              <a:t> </a:t>
+            </a:r>
+            <a:r>
+              <a:rPr dirty="0" err="1"/>
+              <a:t>informação</a:t>
+            </a:r>
+            <a:r>
+              <a:rPr dirty="0"/>
+              <a:t>, </a:t>
+            </a:r>
+            <a:r>
+              <a:rPr dirty="0" err="1"/>
+              <a:t>acessa</a:t>
+            </a:r>
+            <a:r>
+              <a:rPr dirty="0"/>
+              <a:t> as ferramentas </a:t>
+            </a:r>
+            <a:r>
+              <a:rPr dirty="0" err="1"/>
+              <a:t>que</a:t>
+            </a:r>
+            <a:r>
+              <a:rPr dirty="0"/>
+              <a:t> VOCÊ </a:t>
+            </a:r>
+            <a:r>
+              <a:rPr dirty="0" err="1"/>
+              <a:t>autorizar</a:t>
+            </a:r>
+            <a:r>
+              <a:rPr dirty="0"/>
+              <a:t> — CRM, ERP, WhatsApp, e-mail, </a:t>
+            </a:r>
+            <a:r>
+              <a:rPr dirty="0" err="1"/>
+              <a:t>documentos</a:t>
+            </a:r>
+            <a:r>
+              <a:rPr dirty="0"/>
+              <a:t> — e </a:t>
+            </a:r>
+            <a:r>
+              <a:rPr dirty="0" err="1"/>
+              <a:t>faz</a:t>
+            </a:r>
+            <a:r>
+              <a:rPr dirty="0"/>
+              <a:t> o </a:t>
+            </a:r>
+            <a:r>
+              <a:rPr dirty="0" err="1"/>
+              <a:t>trabalho</a:t>
+            </a:r>
+            <a:r>
+              <a:rPr dirty="0"/>
+              <a:t>.</a:t>
+            </a:r>
+          </a:p>
+          <a:p>
+            <a:endParaRPr dirty="0"/>
+          </a:p>
+          <a:p>
+            <a:r>
+              <a:rPr dirty="0"/>
+              <a:t>Com </a:t>
+            </a:r>
+            <a:r>
+              <a:rPr dirty="0" err="1"/>
+              <a:t>escopo</a:t>
+            </a:r>
+            <a:r>
+              <a:rPr dirty="0"/>
+              <a:t> </a:t>
+            </a:r>
+            <a:r>
+              <a:rPr dirty="0" err="1"/>
+              <a:t>definido</a:t>
+            </a:r>
+            <a:r>
+              <a:rPr dirty="0"/>
+              <a:t>, com </a:t>
+            </a:r>
+            <a:r>
+              <a:rPr dirty="0" err="1"/>
+              <a:t>regras</a:t>
+            </a:r>
+            <a:r>
+              <a:rPr dirty="0"/>
+              <a:t>, com </a:t>
+            </a:r>
+            <a:r>
+              <a:rPr dirty="0" err="1"/>
+              <a:t>permissões</a:t>
+            </a:r>
+            <a:r>
+              <a:rPr dirty="0"/>
+              <a:t>. E </a:t>
+            </a:r>
+            <a:r>
+              <a:rPr dirty="0" err="1"/>
+              <a:t>quando</a:t>
+            </a:r>
+            <a:r>
+              <a:rPr dirty="0"/>
+              <a:t> o </a:t>
+            </a:r>
+            <a:r>
+              <a:rPr dirty="0" err="1"/>
+              <a:t>assunto</a:t>
+            </a:r>
+            <a:r>
+              <a:rPr dirty="0"/>
+              <a:t> </a:t>
+            </a:r>
+            <a:r>
+              <a:rPr dirty="0" err="1"/>
+              <a:t>precisa</a:t>
+            </a:r>
+            <a:r>
+              <a:rPr dirty="0"/>
+              <a:t> de </a:t>
+            </a:r>
+            <a:r>
+              <a:rPr dirty="0" err="1"/>
+              <a:t>gente</a:t>
+            </a:r>
+            <a:r>
+              <a:rPr dirty="0"/>
+              <a:t>, </a:t>
+            </a:r>
+            <a:r>
+              <a:rPr dirty="0" err="1"/>
+              <a:t>ele</a:t>
+            </a:r>
+            <a:r>
+              <a:rPr dirty="0"/>
+              <a:t> </a:t>
+            </a:r>
+            <a:r>
+              <a:rPr dirty="0" err="1"/>
+              <a:t>passa</a:t>
+            </a:r>
+            <a:r>
+              <a:rPr dirty="0"/>
+              <a:t> para </a:t>
+            </a:r>
+            <a:r>
+              <a:rPr dirty="0" err="1"/>
+              <a:t>gente</a:t>
+            </a:r>
+            <a:r>
+              <a:rPr dirty="0"/>
+              <a:t> — </a:t>
+            </a:r>
+            <a:r>
+              <a:rPr dirty="0" err="1"/>
+              <a:t>está</a:t>
+            </a:r>
+            <a:r>
+              <a:rPr dirty="0"/>
+              <a:t> </a:t>
+            </a:r>
+            <a:r>
+              <a:rPr dirty="0" err="1"/>
+              <a:t>aí</a:t>
+            </a:r>
+            <a:r>
+              <a:rPr dirty="0"/>
+              <a:t> </a:t>
+            </a:r>
+            <a:r>
+              <a:rPr dirty="0" err="1"/>
+              <a:t>na</a:t>
+            </a:r>
+            <a:r>
+              <a:rPr dirty="0"/>
+              <a:t> </a:t>
+            </a:r>
+            <a:r>
+              <a:rPr dirty="0" err="1"/>
+              <a:t>saída</a:t>
+            </a:r>
+            <a:r>
+              <a:rPr dirty="0"/>
+              <a:t> de </a:t>
+            </a:r>
+            <a:r>
+              <a:rPr dirty="0" err="1"/>
+              <a:t>baixo</a:t>
+            </a:r>
+            <a:r>
+              <a:rPr dirty="0"/>
+              <a:t> do </a:t>
+            </a:r>
+            <a:r>
+              <a:rPr dirty="0" err="1"/>
+              <a:t>diagrama</a:t>
+            </a:r>
+            <a:r>
+              <a:rPr dirty="0"/>
+              <a:t>.</a:t>
+            </a:r>
+          </a:p>
+          <a:p>
+            <a:endParaRPr dirty="0"/>
+          </a:p>
+          <a:p>
+            <a:r>
+              <a:rPr dirty="0" err="1"/>
+              <a:t>Autonomia</a:t>
+            </a:r>
+            <a:r>
+              <a:rPr dirty="0"/>
+              <a:t> com </a:t>
+            </a:r>
+            <a:r>
+              <a:rPr dirty="0" err="1"/>
+              <a:t>controle</a:t>
+            </a:r>
+            <a:r>
+              <a:rPr dirty="0"/>
+              <a:t>. Sempre </a:t>
+            </a:r>
+            <a:r>
+              <a:rPr dirty="0" err="1"/>
+              <a:t>nessa</a:t>
+            </a:r>
+            <a:r>
+              <a:rPr dirty="0"/>
+              <a:t> </a:t>
+            </a:r>
+            <a:r>
+              <a:rPr dirty="0" err="1"/>
+              <a:t>ordem</a:t>
+            </a:r>
+            <a:r>
+              <a:rPr dirty="0"/>
+              <a:t>.</a:t>
             </a:r>
           </a:p>
         </p:txBody>
@@ -1465,7 +6401,7 @@
             <a:spLocks noGrp="1"/>
           </p:cNvSpPr>
           <p:nvPr>
-            <p:ph type="sldNum" idx="5" sz="quarter"/>
+            <p:ph type="sldNum" sz="quarter" idx="5"/>
           </p:nvPr>
         </p:nvSpPr>
         <p:spPr/>
@@ -1479,7 +6415,7 @@
 </file>
 
 <file path=ppt/notesSlides/notesSlide9.xml><?xml version="1.0" encoding="utf-8"?>
-<p:notes xmlns:a="http://schemas.openxmlformats.org/drawingml/2006/main" xmlns:p="http://schemas.openxmlformats.org/presentationml/2006/main" xmlns:r="http://schemas.openxmlformats.org/officeDocument/2006/relationships">
+<p:notes xmlns:a="http://schemas.openxmlformats.org/drawingml/2006/main" xmlns:r="http://schemas.openxmlformats.org/officeDocument/2006/relationships" xmlns:p="http://schemas.openxmlformats.org/presentationml/2006/main">
   <p:cSld>
     <p:spTree>
       <p:nvGrpSpPr>
@@ -1499,7 +6435,7 @@
         <p:nvSpPr>
           <p:cNvPr id="2" name="Slide Image Placeholder 1"/>
           <p:cNvSpPr>
-            <a:spLocks noGrp="1"/>
+            <a:spLocks noGrp="1" noRot="1" noChangeAspect="1"/>
           </p:cNvSpPr>
           <p:nvPr>
             <p:ph type="sldImg" idx="2"/>
@@ -1514,7 +6450,7 @@
             <a:spLocks noGrp="1"/>
           </p:cNvSpPr>
           <p:nvPr>
-            <p:ph type="body" idx="3" sz="quarter"/>
+            <p:ph type="body" sz="quarter" idx="3"/>
           </p:nvPr>
         </p:nvSpPr>
         <p:spPr/>
@@ -1523,37 +6459,505 @@
           <a:lstStyle/>
           <a:p>
             <a:r>
-              <a:t>Objetivo: tornar concreto — três cenas do dia a dia que a plateia reconhece. ≈ 50s</a:t>
-            </a:r>
-          </a:p>
-          <a:p/>
-          <a:p>
-            <a:r>
-              <a:t>Três lugares onde isso fica concreto.</a:t>
-            </a:r>
-          </a:p>
-          <a:p/>
-          <a:p>
-            <a:r>
-              <a:t>No atendimento: o agente responde, consulta as informações, registra tudo no CRM — e chama um humano quando a conversa pede um humano.</a:t>
-            </a:r>
-          </a:p>
-          <a:p/>
-          <a:p>
-            <a:r>
-              <a:t>Em vendas: ele pesquisa o lead, qualifica, prepara o follow-up — o vendedor chega na conversa pronto, em vez de gastar a manhã pesquisando.</a:t>
-            </a:r>
-          </a:p>
-          <a:p/>
-          <a:p>
-            <a:r>
-              <a:t>Na operação: ele lê sistemas e documentos, consolida, analisa e age.</a:t>
-            </a:r>
-          </a:p>
-          <a:p/>
-          <a:p>
-            <a:r>
-              <a:t>Repara no padrão das três colunas: o agente fica com o trabalho repetitivo; as pessoas ficam com o que exige gente.</a:t>
+              <a:rPr dirty="0" err="1"/>
+              <a:t>Objetivo</a:t>
+            </a:r>
+            <a:r>
+              <a:rPr dirty="0"/>
+              <a:t>: </a:t>
+            </a:r>
+            <a:r>
+              <a:rPr dirty="0" err="1"/>
+              <a:t>tornar</a:t>
+            </a:r>
+            <a:r>
+              <a:rPr dirty="0"/>
+              <a:t> </a:t>
+            </a:r>
+            <a:r>
+              <a:rPr dirty="0" err="1"/>
+              <a:t>concreto</a:t>
+            </a:r>
+            <a:r>
+              <a:rPr dirty="0"/>
+              <a:t> — </a:t>
+            </a:r>
+            <a:r>
+              <a:rPr dirty="0" err="1"/>
+              <a:t>três</a:t>
+            </a:r>
+            <a:r>
+              <a:rPr dirty="0"/>
+              <a:t> </a:t>
+            </a:r>
+            <a:r>
+              <a:rPr dirty="0" err="1"/>
+              <a:t>cenas</a:t>
+            </a:r>
+            <a:r>
+              <a:rPr dirty="0"/>
+              <a:t> do </a:t>
+            </a:r>
+            <a:r>
+              <a:rPr dirty="0" err="1"/>
+              <a:t>dia</a:t>
+            </a:r>
+            <a:r>
+              <a:rPr dirty="0"/>
+              <a:t> a </a:t>
+            </a:r>
+            <a:r>
+              <a:rPr dirty="0" err="1"/>
+              <a:t>dia</a:t>
+            </a:r>
+            <a:r>
+              <a:rPr dirty="0"/>
+              <a:t> </a:t>
+            </a:r>
+            <a:r>
+              <a:rPr dirty="0" err="1"/>
+              <a:t>que</a:t>
+            </a:r>
+            <a:r>
+              <a:rPr dirty="0"/>
+              <a:t> a plateia </a:t>
+            </a:r>
+            <a:r>
+              <a:rPr dirty="0" err="1"/>
+              <a:t>reconhece</a:t>
+            </a:r>
+            <a:r>
+              <a:rPr dirty="0"/>
+              <a:t>. ≈ 50s</a:t>
+            </a:r>
+          </a:p>
+          <a:p>
+            <a:endParaRPr dirty="0"/>
+          </a:p>
+          <a:p>
+            <a:r>
+              <a:rPr dirty="0" err="1"/>
+              <a:t>Três</a:t>
+            </a:r>
+            <a:r>
+              <a:rPr dirty="0"/>
+              <a:t> </a:t>
+            </a:r>
+            <a:r>
+              <a:rPr dirty="0" err="1"/>
+              <a:t>lugares</a:t>
+            </a:r>
+            <a:r>
+              <a:rPr dirty="0"/>
+              <a:t> </a:t>
+            </a:r>
+            <a:r>
+              <a:rPr dirty="0" err="1"/>
+              <a:t>onde</a:t>
+            </a:r>
+            <a:r>
+              <a:rPr dirty="0"/>
+              <a:t> </a:t>
+            </a:r>
+            <a:r>
+              <a:rPr dirty="0" err="1"/>
+              <a:t>isso</a:t>
+            </a:r>
+            <a:r>
+              <a:rPr dirty="0"/>
+              <a:t> </a:t>
+            </a:r>
+            <a:r>
+              <a:rPr dirty="0" err="1"/>
+              <a:t>fica</a:t>
+            </a:r>
+            <a:r>
+              <a:rPr dirty="0"/>
+              <a:t> </a:t>
+            </a:r>
+            <a:r>
+              <a:rPr dirty="0" err="1"/>
+              <a:t>concreto</a:t>
+            </a:r>
+            <a:r>
+              <a:rPr dirty="0"/>
+              <a:t>.</a:t>
+            </a:r>
+          </a:p>
+          <a:p>
+            <a:endParaRPr dirty="0"/>
+          </a:p>
+          <a:p>
+            <a:r>
+              <a:rPr dirty="0"/>
+              <a:t>No </a:t>
+            </a:r>
+            <a:r>
+              <a:rPr dirty="0" err="1"/>
+              <a:t>atendimento</a:t>
+            </a:r>
+            <a:r>
+              <a:rPr dirty="0"/>
+              <a:t>: o </a:t>
+            </a:r>
+            <a:r>
+              <a:rPr dirty="0" err="1"/>
+              <a:t>agente</a:t>
+            </a:r>
+            <a:r>
+              <a:rPr dirty="0"/>
+              <a:t> </a:t>
+            </a:r>
+            <a:r>
+              <a:rPr dirty="0" err="1"/>
+              <a:t>responde</a:t>
+            </a:r>
+            <a:r>
+              <a:rPr dirty="0"/>
+              <a:t>, consulta as </a:t>
+            </a:r>
+            <a:r>
+              <a:rPr dirty="0" err="1"/>
+              <a:t>informações</a:t>
+            </a:r>
+            <a:r>
+              <a:rPr dirty="0"/>
+              <a:t>, </a:t>
+            </a:r>
+            <a:r>
+              <a:rPr dirty="0" err="1"/>
+              <a:t>registra</a:t>
+            </a:r>
+            <a:r>
+              <a:rPr dirty="0"/>
+              <a:t> </a:t>
+            </a:r>
+            <a:r>
+              <a:rPr dirty="0" err="1"/>
+              <a:t>tudo</a:t>
+            </a:r>
+            <a:r>
+              <a:rPr dirty="0"/>
+              <a:t> no CRM — e chama um </a:t>
+            </a:r>
+            <a:r>
+              <a:rPr dirty="0" err="1"/>
+              <a:t>humano</a:t>
+            </a:r>
+            <a:r>
+              <a:rPr dirty="0"/>
+              <a:t> </a:t>
+            </a:r>
+            <a:r>
+              <a:rPr dirty="0" err="1"/>
+              <a:t>quando</a:t>
+            </a:r>
+            <a:r>
+              <a:rPr dirty="0"/>
+              <a:t> a conversa </a:t>
+            </a:r>
+            <a:r>
+              <a:rPr dirty="0" err="1"/>
+              <a:t>pede</a:t>
+            </a:r>
+            <a:r>
+              <a:rPr dirty="0"/>
+              <a:t> um </a:t>
+            </a:r>
+            <a:r>
+              <a:rPr dirty="0" err="1"/>
+              <a:t>humano</a:t>
+            </a:r>
+            <a:r>
+              <a:rPr dirty="0"/>
+              <a:t>.</a:t>
+            </a:r>
+          </a:p>
+          <a:p>
+            <a:endParaRPr dirty="0"/>
+          </a:p>
+          <a:p>
+            <a:r>
+              <a:rPr dirty="0"/>
+              <a:t>Em </a:t>
+            </a:r>
+            <a:r>
+              <a:rPr dirty="0" err="1"/>
+              <a:t>vendas</a:t>
+            </a:r>
+            <a:r>
+              <a:rPr dirty="0"/>
+              <a:t>: </a:t>
+            </a:r>
+            <a:r>
+              <a:rPr dirty="0" err="1"/>
+              <a:t>ele</a:t>
+            </a:r>
+            <a:r>
+              <a:rPr dirty="0"/>
+              <a:t> </a:t>
+            </a:r>
+            <a:r>
+              <a:rPr dirty="0" err="1"/>
+              <a:t>pesquisa</a:t>
+            </a:r>
+            <a:r>
+              <a:rPr dirty="0"/>
+              <a:t> o lead, </a:t>
+            </a:r>
+            <a:r>
+              <a:rPr dirty="0" err="1"/>
+              <a:t>qualifica</a:t>
+            </a:r>
+            <a:r>
+              <a:rPr dirty="0"/>
+              <a:t>, </a:t>
+            </a:r>
+            <a:r>
+              <a:rPr dirty="0" err="1"/>
+              <a:t>prepara</a:t>
+            </a:r>
+            <a:r>
+              <a:rPr dirty="0"/>
+              <a:t> o follow-up — o </a:t>
+            </a:r>
+            <a:r>
+              <a:rPr dirty="0" err="1"/>
+              <a:t>vendedor</a:t>
+            </a:r>
+            <a:r>
+              <a:rPr dirty="0"/>
+              <a:t> </a:t>
+            </a:r>
+            <a:r>
+              <a:rPr dirty="0" err="1"/>
+              <a:t>chega</a:t>
+            </a:r>
+            <a:r>
+              <a:rPr dirty="0"/>
+              <a:t> </a:t>
+            </a:r>
+            <a:r>
+              <a:rPr dirty="0" err="1"/>
+              <a:t>na</a:t>
+            </a:r>
+            <a:r>
+              <a:rPr dirty="0"/>
+              <a:t> conversa pronto, </a:t>
+            </a:r>
+            <a:r>
+              <a:rPr dirty="0" err="1"/>
+              <a:t>em</a:t>
+            </a:r>
+            <a:r>
+              <a:rPr dirty="0"/>
+              <a:t> </a:t>
+            </a:r>
+            <a:r>
+              <a:rPr dirty="0" err="1"/>
+              <a:t>vez</a:t>
+            </a:r>
+            <a:r>
+              <a:rPr dirty="0"/>
+              <a:t> de </a:t>
+            </a:r>
+            <a:r>
+              <a:rPr dirty="0" err="1"/>
+              <a:t>gastar</a:t>
+            </a:r>
+            <a:r>
+              <a:rPr dirty="0"/>
+              <a:t> a </a:t>
+            </a:r>
+            <a:r>
+              <a:rPr dirty="0" err="1"/>
+              <a:t>manhã</a:t>
+            </a:r>
+            <a:r>
+              <a:rPr dirty="0"/>
+              <a:t> </a:t>
+            </a:r>
+            <a:r>
+              <a:rPr dirty="0" err="1"/>
+              <a:t>pesquisando</a:t>
+            </a:r>
+            <a:r>
+              <a:rPr dirty="0"/>
+              <a:t>.</a:t>
+            </a:r>
+          </a:p>
+          <a:p>
+            <a:endParaRPr dirty="0"/>
+          </a:p>
+          <a:p>
+            <a:r>
+              <a:rPr dirty="0"/>
+              <a:t>Na </a:t>
+            </a:r>
+            <a:r>
+              <a:rPr dirty="0" err="1"/>
+              <a:t>operação</a:t>
+            </a:r>
+            <a:r>
+              <a:rPr dirty="0"/>
+              <a:t>: </a:t>
+            </a:r>
+            <a:r>
+              <a:rPr dirty="0" err="1"/>
+              <a:t>ele</a:t>
+            </a:r>
+            <a:r>
+              <a:rPr dirty="0"/>
+              <a:t> </a:t>
+            </a:r>
+            <a:r>
+              <a:rPr dirty="0" err="1"/>
+              <a:t>lê</a:t>
+            </a:r>
+            <a:r>
+              <a:rPr dirty="0"/>
+              <a:t> </a:t>
+            </a:r>
+            <a:r>
+              <a:rPr dirty="0" err="1"/>
+              <a:t>sistemas</a:t>
+            </a:r>
+            <a:r>
+              <a:rPr dirty="0"/>
+              <a:t> e </a:t>
+            </a:r>
+            <a:r>
+              <a:rPr dirty="0" err="1"/>
+              <a:t>documentos</a:t>
+            </a:r>
+            <a:r>
+              <a:rPr dirty="0"/>
+              <a:t>, </a:t>
+            </a:r>
+            <a:r>
+              <a:rPr dirty="0" err="1"/>
+              <a:t>consolida</a:t>
+            </a:r>
+            <a:r>
+              <a:rPr dirty="0"/>
+              <a:t>, </a:t>
+            </a:r>
+            <a:r>
+              <a:rPr dirty="0" err="1"/>
+              <a:t>analisa</a:t>
+            </a:r>
+            <a:r>
+              <a:rPr dirty="0"/>
+              <a:t> e age.</a:t>
+            </a:r>
+          </a:p>
+          <a:p>
+            <a:endParaRPr dirty="0"/>
+          </a:p>
+          <a:p>
+            <a:r>
+              <a:rPr dirty="0" err="1"/>
+              <a:t>Repara</a:t>
+            </a:r>
+            <a:r>
+              <a:rPr dirty="0"/>
+              <a:t> no </a:t>
+            </a:r>
+            <a:r>
+              <a:rPr dirty="0" err="1"/>
+              <a:t>padrão</a:t>
+            </a:r>
+            <a:r>
+              <a:rPr dirty="0"/>
+              <a:t> das </a:t>
+            </a:r>
+            <a:r>
+              <a:rPr dirty="0" err="1"/>
+              <a:t>três</a:t>
+            </a:r>
+            <a:r>
+              <a:rPr dirty="0"/>
+              <a:t> </a:t>
+            </a:r>
+            <a:r>
+              <a:rPr dirty="0" err="1"/>
+              <a:t>colunas</a:t>
+            </a:r>
+            <a:r>
+              <a:rPr dirty="0"/>
+              <a:t>: o </a:t>
+            </a:r>
+            <a:r>
+              <a:rPr dirty="0" err="1"/>
+              <a:t>agente</a:t>
+            </a:r>
+            <a:r>
+              <a:rPr dirty="0"/>
+              <a:t> </a:t>
+            </a:r>
+            <a:r>
+              <a:rPr dirty="0" err="1"/>
+              <a:t>fica</a:t>
+            </a:r>
+            <a:r>
+              <a:rPr dirty="0"/>
+              <a:t> com o </a:t>
+            </a:r>
+            <a:r>
+              <a:rPr dirty="0" err="1"/>
+              <a:t>trabalho</a:t>
+            </a:r>
+            <a:r>
+              <a:rPr dirty="0"/>
+              <a:t> </a:t>
+            </a:r>
+            <a:r>
+              <a:rPr dirty="0" err="1"/>
+              <a:t>repetitivo</a:t>
+            </a:r>
+            <a:r>
+              <a:rPr dirty="0"/>
+              <a:t>; as </a:t>
+            </a:r>
+            <a:r>
+              <a:rPr dirty="0" err="1"/>
+              <a:t>pessoas</a:t>
+            </a:r>
+            <a:r>
+              <a:rPr dirty="0"/>
+              <a:t> </a:t>
+            </a:r>
+            <a:r>
+              <a:rPr dirty="0" err="1"/>
+              <a:t>ficam</a:t>
+            </a:r>
+            <a:r>
+              <a:rPr dirty="0"/>
+              <a:t> com o </a:t>
+            </a:r>
+            <a:r>
+              <a:rPr dirty="0" err="1"/>
+              <a:t>que</a:t>
+            </a:r>
+            <a:r>
+              <a:rPr dirty="0"/>
+              <a:t> </a:t>
+            </a:r>
+            <a:r>
+              <a:rPr dirty="0" err="1"/>
+              <a:t>exige</a:t>
+            </a:r>
+            <a:r>
+              <a:rPr dirty="0"/>
+              <a:t> </a:t>
+            </a:r>
+            <a:r>
+              <a:rPr dirty="0" err="1"/>
+              <a:t>gente</a:t>
+            </a:r>
+            <a:r>
+              <a:rPr dirty="0"/>
+              <a:t>.</a:t>
             </a:r>
           </a:p>
         </p:txBody>
@@ -1565,7 +6969,7 @@
             <a:spLocks noGrp="1"/>
           </p:cNvSpPr>
           <p:nvPr>
-            <p:ph type="sldNum" idx="5" sz="quarter"/>
+            <p:ph type="sldNum" sz="quarter" idx="5"/>
           </p:nvPr>
         </p:nvSpPr>
         <p:spPr/>
@@ -1616,10 +7020,9 @@
           <a:lstStyle/>
           <a:p>
             <a:r>
-              <a:rPr lang="en-US" smtClean="0"/>
+              <a:rPr lang="en-US"/>
               <a:t>Click to edit Master title style</a:t>
             </a:r>
-            <a:endParaRPr lang="en-US"/>
           </a:p>
         </p:txBody>
       </p:sp>
@@ -1735,10 +7138,9 @@
           </a:lstStyle>
           <a:p>
             <a:r>
-              <a:rPr lang="en-US" smtClean="0"/>
+              <a:rPr lang="en-US"/>
               <a:t>Click to edit Master subtitle style</a:t>
             </a:r>
-            <a:endParaRPr lang="en-US"/>
           </a:p>
         </p:txBody>
       </p:sp>
@@ -1759,7 +7161,7 @@
           <a:p>
             <a:fld id="{5BCAD085-E8A6-8845-BD4E-CB4CCA059FC4}" type="datetimeFigureOut">
               <a:rPr lang="en-US" smtClean="0"/>
-              <a:t>1/27/13</a:t>
+              <a:t>8/19/2026</a:t>
             </a:fld>
             <a:endParaRPr lang="en-US"/>
           </a:p>
@@ -1801,7 +7203,7 @@
           <a:p>
             <a:fld id="{C1FF6DA9-008F-8B48-92A6-B652298478BF}" type="slidenum">
               <a:rPr lang="en-US" smtClean="0"/>
-              <a:t>‹#›</a:t>
+              <a:t>‹nº›</a:t>
             </a:fld>
             <a:endParaRPr lang="en-US"/>
           </a:p>
@@ -1853,10 +7255,9 @@
           <a:lstStyle/>
           <a:p>
             <a:r>
-              <a:rPr lang="en-US" smtClean="0"/>
+              <a:rPr lang="en-US"/>
               <a:t>Click to edit Master title style</a:t>
             </a:r>
-            <a:endParaRPr lang="en-US"/>
           </a:p>
         </p:txBody>
       </p:sp>
@@ -1877,38 +7278,37 @@
           <a:p>
             <a:pPr lvl="0"/>
             <a:r>
-              <a:rPr lang="en-US" smtClean="0"/>
+              <a:rPr lang="en-US"/>
               <a:t>Click to edit Master text styles</a:t>
             </a:r>
           </a:p>
           <a:p>
             <a:pPr lvl="1"/>
             <a:r>
-              <a:rPr lang="en-US" smtClean="0"/>
+              <a:rPr lang="en-US"/>
               <a:t>Second level</a:t>
             </a:r>
           </a:p>
           <a:p>
             <a:pPr lvl="2"/>
             <a:r>
-              <a:rPr lang="en-US" smtClean="0"/>
+              <a:rPr lang="en-US"/>
               <a:t>Third level</a:t>
             </a:r>
           </a:p>
           <a:p>
             <a:pPr lvl="3"/>
             <a:r>
-              <a:rPr lang="en-US" smtClean="0"/>
+              <a:rPr lang="en-US"/>
               <a:t>Fourth level</a:t>
             </a:r>
           </a:p>
           <a:p>
             <a:pPr lvl="4"/>
             <a:r>
-              <a:rPr lang="en-US" smtClean="0"/>
+              <a:rPr lang="en-US"/>
               <a:t>Fifth level</a:t>
             </a:r>
-            <a:endParaRPr lang="en-US"/>
           </a:p>
         </p:txBody>
       </p:sp>
@@ -1929,7 +7329,7 @@
           <a:p>
             <a:fld id="{5BCAD085-E8A6-8845-BD4E-CB4CCA059FC4}" type="datetimeFigureOut">
               <a:rPr lang="en-US" smtClean="0"/>
-              <a:t>1/27/13</a:t>
+              <a:t>8/19/2026</a:t>
             </a:fld>
             <a:endParaRPr lang="en-US"/>
           </a:p>
@@ -1971,7 +7371,7 @@
           <a:p>
             <a:fld id="{C1FF6DA9-008F-8B48-92A6-B652298478BF}" type="slidenum">
               <a:rPr lang="en-US" smtClean="0"/>
-              <a:t>‹#›</a:t>
+              <a:t>‹nº›</a:t>
             </a:fld>
             <a:endParaRPr lang="en-US"/>
           </a:p>
@@ -2028,10 +7428,9 @@
           <a:lstStyle/>
           <a:p>
             <a:r>
-              <a:rPr lang="en-US" smtClean="0"/>
+              <a:rPr lang="en-US"/>
               <a:t>Click to edit Master title style</a:t>
             </a:r>
-            <a:endParaRPr lang="en-US"/>
           </a:p>
         </p:txBody>
       </p:sp>
@@ -2057,38 +7456,37 @@
           <a:p>
             <a:pPr lvl="0"/>
             <a:r>
-              <a:rPr lang="en-US" smtClean="0"/>
+              <a:rPr lang="en-US"/>
               <a:t>Click to edit Master text styles</a:t>
             </a:r>
           </a:p>
           <a:p>
             <a:pPr lvl="1"/>
             <a:r>
-              <a:rPr lang="en-US" smtClean="0"/>
+              <a:rPr lang="en-US"/>
               <a:t>Second level</a:t>
             </a:r>
           </a:p>
           <a:p>
             <a:pPr lvl="2"/>
             <a:r>
-              <a:rPr lang="en-US" smtClean="0"/>
+              <a:rPr lang="en-US"/>
               <a:t>Third level</a:t>
             </a:r>
           </a:p>
           <a:p>
             <a:pPr lvl="3"/>
             <a:r>
-              <a:rPr lang="en-US" smtClean="0"/>
+              <a:rPr lang="en-US"/>
               <a:t>Fourth level</a:t>
             </a:r>
           </a:p>
           <a:p>
             <a:pPr lvl="4"/>
             <a:r>
-              <a:rPr lang="en-US" smtClean="0"/>
+              <a:rPr lang="en-US"/>
               <a:t>Fifth level</a:t>
             </a:r>
-            <a:endParaRPr lang="en-US"/>
           </a:p>
         </p:txBody>
       </p:sp>
@@ -2109,7 +7507,7 @@
           <a:p>
             <a:fld id="{5BCAD085-E8A6-8845-BD4E-CB4CCA059FC4}" type="datetimeFigureOut">
               <a:rPr lang="en-US" smtClean="0"/>
-              <a:t>1/27/13</a:t>
+              <a:t>8/19/2026</a:t>
             </a:fld>
             <a:endParaRPr lang="en-US"/>
           </a:p>
@@ -2151,7 +7549,7 @@
           <a:p>
             <a:fld id="{C1FF6DA9-008F-8B48-92A6-B652298478BF}" type="slidenum">
               <a:rPr lang="en-US" smtClean="0"/>
-              <a:t>‹#›</a:t>
+              <a:t>‹nº›</a:t>
             </a:fld>
             <a:endParaRPr lang="en-US"/>
           </a:p>
@@ -2203,10 +7601,9 @@
           <a:lstStyle/>
           <a:p>
             <a:r>
-              <a:rPr lang="en-US" smtClean="0"/>
+              <a:rPr lang="en-US"/>
               <a:t>Click to edit Master title style</a:t>
             </a:r>
-            <a:endParaRPr lang="en-US"/>
           </a:p>
         </p:txBody>
       </p:sp>
@@ -2227,38 +7624,37 @@
           <a:p>
             <a:pPr lvl="0"/>
             <a:r>
-              <a:rPr lang="en-US" smtClean="0"/>
+              <a:rPr lang="en-US"/>
               <a:t>Click to edit Master text styles</a:t>
             </a:r>
           </a:p>
           <a:p>
             <a:pPr lvl="1"/>
             <a:r>
-              <a:rPr lang="en-US" smtClean="0"/>
+              <a:rPr lang="en-US"/>
               <a:t>Second level</a:t>
             </a:r>
           </a:p>
           <a:p>
             <a:pPr lvl="2"/>
             <a:r>
-              <a:rPr lang="en-US" smtClean="0"/>
+              <a:rPr lang="en-US"/>
               <a:t>Third level</a:t>
             </a:r>
           </a:p>
           <a:p>
             <a:pPr lvl="3"/>
             <a:r>
-              <a:rPr lang="en-US" smtClean="0"/>
+              <a:rPr lang="en-US"/>
               <a:t>Fourth level</a:t>
             </a:r>
           </a:p>
           <a:p>
             <a:pPr lvl="4"/>
             <a:r>
-              <a:rPr lang="en-US" smtClean="0"/>
+              <a:rPr lang="en-US"/>
               <a:t>Fifth level</a:t>
             </a:r>
-            <a:endParaRPr lang="en-US"/>
           </a:p>
         </p:txBody>
       </p:sp>
@@ -2279,7 +7675,7 @@
           <a:p>
             <a:fld id="{5BCAD085-E8A6-8845-BD4E-CB4CCA059FC4}" type="datetimeFigureOut">
               <a:rPr lang="en-US" smtClean="0"/>
-              <a:t>1/27/13</a:t>
+              <a:t>8/19/2026</a:t>
             </a:fld>
             <a:endParaRPr lang="en-US"/>
           </a:p>
@@ -2321,7 +7717,7 @@
           <a:p>
             <a:fld id="{C1FF6DA9-008F-8B48-92A6-B652298478BF}" type="slidenum">
               <a:rPr lang="en-US" smtClean="0"/>
-              <a:t>‹#›</a:t>
+              <a:t>‹nº›</a:t>
             </a:fld>
             <a:endParaRPr lang="en-US"/>
           </a:p>
@@ -2382,10 +7778,9 @@
           </a:lstStyle>
           <a:p>
             <a:r>
-              <a:rPr lang="en-US" smtClean="0"/>
+              <a:rPr lang="en-US"/>
               <a:t>Click to edit Master title style</a:t>
             </a:r>
-            <a:endParaRPr lang="en-US"/>
           </a:p>
         </p:txBody>
       </p:sp>
@@ -2502,7 +7897,7 @@
           <a:p>
             <a:pPr lvl="0"/>
             <a:r>
-              <a:rPr lang="en-US" smtClean="0"/>
+              <a:rPr lang="en-US"/>
               <a:t>Click to edit Master text styles</a:t>
             </a:r>
           </a:p>
@@ -2525,7 +7920,7 @@
           <a:p>
             <a:fld id="{5BCAD085-E8A6-8845-BD4E-CB4CCA059FC4}" type="datetimeFigureOut">
               <a:rPr lang="en-US" smtClean="0"/>
-              <a:t>1/27/13</a:t>
+              <a:t>8/19/2026</a:t>
             </a:fld>
             <a:endParaRPr lang="en-US"/>
           </a:p>
@@ -2567,7 +7962,7 @@
           <a:p>
             <a:fld id="{C1FF6DA9-008F-8B48-92A6-B652298478BF}" type="slidenum">
               <a:rPr lang="en-US" smtClean="0"/>
-              <a:t>‹#›</a:t>
+              <a:t>‹nº›</a:t>
             </a:fld>
             <a:endParaRPr lang="en-US"/>
           </a:p>
@@ -2619,10 +8014,9 @@
           <a:lstStyle/>
           <a:p>
             <a:r>
-              <a:rPr lang="en-US" smtClean="0"/>
+              <a:rPr lang="en-US"/>
               <a:t>Click to edit Master title style</a:t>
             </a:r>
-            <a:endParaRPr lang="en-US"/>
           </a:p>
         </p:txBody>
       </p:sp>
@@ -2676,38 +8070,37 @@
           <a:p>
             <a:pPr lvl="0"/>
             <a:r>
-              <a:rPr lang="en-US" smtClean="0"/>
+              <a:rPr lang="en-US"/>
               <a:t>Click to edit Master text styles</a:t>
             </a:r>
           </a:p>
           <a:p>
             <a:pPr lvl="1"/>
             <a:r>
-              <a:rPr lang="en-US" smtClean="0"/>
+              <a:rPr lang="en-US"/>
               <a:t>Second level</a:t>
             </a:r>
           </a:p>
           <a:p>
             <a:pPr lvl="2"/>
             <a:r>
-              <a:rPr lang="en-US" smtClean="0"/>
+              <a:rPr lang="en-US"/>
               <a:t>Third level</a:t>
             </a:r>
           </a:p>
           <a:p>
             <a:pPr lvl="3"/>
             <a:r>
-              <a:rPr lang="en-US" smtClean="0"/>
+              <a:rPr lang="en-US"/>
               <a:t>Fourth level</a:t>
             </a:r>
           </a:p>
           <a:p>
             <a:pPr lvl="4"/>
             <a:r>
-              <a:rPr lang="en-US" smtClean="0"/>
+              <a:rPr lang="en-US"/>
               <a:t>Fifth level</a:t>
             </a:r>
-            <a:endParaRPr lang="en-US"/>
           </a:p>
         </p:txBody>
       </p:sp>
@@ -2761,38 +8154,37 @@
           <a:p>
             <a:pPr lvl="0"/>
             <a:r>
-              <a:rPr lang="en-US" smtClean="0"/>
+              <a:rPr lang="en-US"/>
               <a:t>Click to edit Master text styles</a:t>
             </a:r>
           </a:p>
           <a:p>
             <a:pPr lvl="1"/>
             <a:r>
-              <a:rPr lang="en-US" smtClean="0"/>
+              <a:rPr lang="en-US"/>
               <a:t>Second level</a:t>
             </a:r>
           </a:p>
           <a:p>
             <a:pPr lvl="2"/>
             <a:r>
-              <a:rPr lang="en-US" smtClean="0"/>
+              <a:rPr lang="en-US"/>
               <a:t>Third level</a:t>
             </a:r>
           </a:p>
           <a:p>
             <a:pPr lvl="3"/>
             <a:r>
-              <a:rPr lang="en-US" smtClean="0"/>
+              <a:rPr lang="en-US"/>
               <a:t>Fourth level</a:t>
             </a:r>
           </a:p>
           <a:p>
             <a:pPr lvl="4"/>
             <a:r>
-              <a:rPr lang="en-US" smtClean="0"/>
+              <a:rPr lang="en-US"/>
               <a:t>Fifth level</a:t>
             </a:r>
-            <a:endParaRPr lang="en-US"/>
           </a:p>
         </p:txBody>
       </p:sp>
@@ -2813,7 +8205,7 @@
           <a:p>
             <a:fld id="{5BCAD085-E8A6-8845-BD4E-CB4CCA059FC4}" type="datetimeFigureOut">
               <a:rPr lang="en-US" smtClean="0"/>
-              <a:t>1/27/13</a:t>
+              <a:t>8/19/2026</a:t>
             </a:fld>
             <a:endParaRPr lang="en-US"/>
           </a:p>
@@ -2855,7 +8247,7 @@
           <a:p>
             <a:fld id="{C1FF6DA9-008F-8B48-92A6-B652298478BF}" type="slidenum">
               <a:rPr lang="en-US" smtClean="0"/>
-              <a:t>‹#›</a:t>
+              <a:t>‹nº›</a:t>
             </a:fld>
             <a:endParaRPr lang="en-US"/>
           </a:p>
@@ -2911,10 +8303,9 @@
           </a:lstStyle>
           <a:p>
             <a:r>
-              <a:rPr lang="en-US" smtClean="0"/>
+              <a:rPr lang="en-US"/>
               <a:t>Click to edit Master title style</a:t>
             </a:r>
-            <a:endParaRPr lang="en-US"/>
           </a:p>
         </p:txBody>
       </p:sp>
@@ -2977,7 +8368,7 @@
           <a:p>
             <a:pPr lvl="0"/>
             <a:r>
-              <a:rPr lang="en-US" smtClean="0"/>
+              <a:rPr lang="en-US"/>
               <a:t>Click to edit Master text styles</a:t>
             </a:r>
           </a:p>
@@ -3033,38 +8424,37 @@
           <a:p>
             <a:pPr lvl="0"/>
             <a:r>
-              <a:rPr lang="en-US" smtClean="0"/>
+              <a:rPr lang="en-US"/>
               <a:t>Click to edit Master text styles</a:t>
             </a:r>
           </a:p>
           <a:p>
             <a:pPr lvl="1"/>
             <a:r>
-              <a:rPr lang="en-US" smtClean="0"/>
+              <a:rPr lang="en-US"/>
               <a:t>Second level</a:t>
             </a:r>
           </a:p>
           <a:p>
             <a:pPr lvl="2"/>
             <a:r>
-              <a:rPr lang="en-US" smtClean="0"/>
+              <a:rPr lang="en-US"/>
               <a:t>Third level</a:t>
             </a:r>
           </a:p>
           <a:p>
             <a:pPr lvl="3"/>
             <a:r>
-              <a:rPr lang="en-US" smtClean="0"/>
+              <a:rPr lang="en-US"/>
               <a:t>Fourth level</a:t>
             </a:r>
           </a:p>
           <a:p>
             <a:pPr lvl="4"/>
             <a:r>
-              <a:rPr lang="en-US" smtClean="0"/>
+              <a:rPr lang="en-US"/>
               <a:t>Fifth level</a:t>
             </a:r>
-            <a:endParaRPr lang="en-US"/>
           </a:p>
         </p:txBody>
       </p:sp>
@@ -3127,7 +8517,7 @@
           <a:p>
             <a:pPr lvl="0"/>
             <a:r>
-              <a:rPr lang="en-US" smtClean="0"/>
+              <a:rPr lang="en-US"/>
               <a:t>Click to edit Master text styles</a:t>
             </a:r>
           </a:p>
@@ -3183,38 +8573,37 @@
           <a:p>
             <a:pPr lvl="0"/>
             <a:r>
-              <a:rPr lang="en-US" smtClean="0"/>
+              <a:rPr lang="en-US"/>
               <a:t>Click to edit Master text styles</a:t>
             </a:r>
           </a:p>
           <a:p>
             <a:pPr lvl="1"/>
             <a:r>
-              <a:rPr lang="en-US" smtClean="0"/>
+              <a:rPr lang="en-US"/>
               <a:t>Second level</a:t>
             </a:r>
           </a:p>
           <a:p>
             <a:pPr lvl="2"/>
             <a:r>
-              <a:rPr lang="en-US" smtClean="0"/>
+              <a:rPr lang="en-US"/>
               <a:t>Third level</a:t>
             </a:r>
           </a:p>
           <a:p>
             <a:pPr lvl="3"/>
             <a:r>
-              <a:rPr lang="en-US" smtClean="0"/>
+              <a:rPr lang="en-US"/>
               <a:t>Fourth level</a:t>
             </a:r>
           </a:p>
           <a:p>
             <a:pPr lvl="4"/>
             <a:r>
-              <a:rPr lang="en-US" smtClean="0"/>
+              <a:rPr lang="en-US"/>
               <a:t>Fifth level</a:t>
             </a:r>
-            <a:endParaRPr lang="en-US"/>
           </a:p>
         </p:txBody>
       </p:sp>
@@ -3235,7 +8624,7 @@
           <a:p>
             <a:fld id="{5BCAD085-E8A6-8845-BD4E-CB4CCA059FC4}" type="datetimeFigureOut">
               <a:rPr lang="en-US" smtClean="0"/>
-              <a:t>1/27/13</a:t>
+              <a:t>8/19/2026</a:t>
             </a:fld>
             <a:endParaRPr lang="en-US"/>
           </a:p>
@@ -3277,7 +8666,7 @@
           <a:p>
             <a:fld id="{C1FF6DA9-008F-8B48-92A6-B652298478BF}" type="slidenum">
               <a:rPr lang="en-US" smtClean="0"/>
-              <a:t>‹#›</a:t>
+              <a:t>‹nº›</a:t>
             </a:fld>
             <a:endParaRPr lang="en-US"/>
           </a:p>
@@ -3329,10 +8718,9 @@
           <a:lstStyle/>
           <a:p>
             <a:r>
-              <a:rPr lang="en-US" smtClean="0"/>
+              <a:rPr lang="en-US"/>
               <a:t>Click to edit Master title style</a:t>
             </a:r>
-            <a:endParaRPr lang="en-US"/>
           </a:p>
         </p:txBody>
       </p:sp>
@@ -3353,7 +8741,7 @@
           <a:p>
             <a:fld id="{5BCAD085-E8A6-8845-BD4E-CB4CCA059FC4}" type="datetimeFigureOut">
               <a:rPr lang="en-US" smtClean="0"/>
-              <a:t>1/27/13</a:t>
+              <a:t>8/19/2026</a:t>
             </a:fld>
             <a:endParaRPr lang="en-US"/>
           </a:p>
@@ -3395,7 +8783,7 @@
           <a:p>
             <a:fld id="{C1FF6DA9-008F-8B48-92A6-B652298478BF}" type="slidenum">
               <a:rPr lang="en-US" smtClean="0"/>
-              <a:t>‹#›</a:t>
+              <a:t>‹nº›</a:t>
             </a:fld>
             <a:endParaRPr lang="en-US"/>
           </a:p>
@@ -3448,7 +8836,7 @@
           <a:p>
             <a:fld id="{5BCAD085-E8A6-8845-BD4E-CB4CCA059FC4}" type="datetimeFigureOut">
               <a:rPr lang="en-US" smtClean="0"/>
-              <a:t>1/27/13</a:t>
+              <a:t>8/19/2026</a:t>
             </a:fld>
             <a:endParaRPr lang="en-US"/>
           </a:p>
@@ -3490,7 +8878,7 @@
           <a:p>
             <a:fld id="{C1FF6DA9-008F-8B48-92A6-B652298478BF}" type="slidenum">
               <a:rPr lang="en-US" smtClean="0"/>
-              <a:t>‹#›</a:t>
+              <a:t>‹nº›</a:t>
             </a:fld>
             <a:endParaRPr lang="en-US"/>
           </a:p>
@@ -3551,10 +8939,9 @@
           </a:lstStyle>
           <a:p>
             <a:r>
-              <a:rPr lang="en-US" smtClean="0"/>
+              <a:rPr lang="en-US"/>
               <a:t>Click to edit Master title style</a:t>
             </a:r>
-            <a:endParaRPr lang="en-US"/>
           </a:p>
         </p:txBody>
       </p:sp>
@@ -3608,38 +8995,37 @@
           <a:p>
             <a:pPr lvl="0"/>
             <a:r>
-              <a:rPr lang="en-US" smtClean="0"/>
+              <a:rPr lang="en-US"/>
               <a:t>Click to edit Master text styles</a:t>
             </a:r>
           </a:p>
           <a:p>
             <a:pPr lvl="1"/>
             <a:r>
-              <a:rPr lang="en-US" smtClean="0"/>
+              <a:rPr lang="en-US"/>
               <a:t>Second level</a:t>
             </a:r>
           </a:p>
           <a:p>
             <a:pPr lvl="2"/>
             <a:r>
-              <a:rPr lang="en-US" smtClean="0"/>
+              <a:rPr lang="en-US"/>
               <a:t>Third level</a:t>
             </a:r>
           </a:p>
           <a:p>
             <a:pPr lvl="3"/>
             <a:r>
-              <a:rPr lang="en-US" smtClean="0"/>
+              <a:rPr lang="en-US"/>
               <a:t>Fourth level</a:t>
             </a:r>
           </a:p>
           <a:p>
             <a:pPr lvl="4"/>
             <a:r>
-              <a:rPr lang="en-US" smtClean="0"/>
+              <a:rPr lang="en-US"/>
               <a:t>Fifth level</a:t>
             </a:r>
-            <a:endParaRPr lang="en-US"/>
           </a:p>
         </p:txBody>
       </p:sp>
@@ -3702,7 +9088,7 @@
           <a:p>
             <a:pPr lvl="0"/>
             <a:r>
-              <a:rPr lang="en-US" smtClean="0"/>
+              <a:rPr lang="en-US"/>
               <a:t>Click to edit Master text styles</a:t>
             </a:r>
           </a:p>
@@ -3725,7 +9111,7 @@
           <a:p>
             <a:fld id="{5BCAD085-E8A6-8845-BD4E-CB4CCA059FC4}" type="datetimeFigureOut">
               <a:rPr lang="en-US" smtClean="0"/>
-              <a:t>1/27/13</a:t>
+              <a:t>8/19/2026</a:t>
             </a:fld>
             <a:endParaRPr lang="en-US"/>
           </a:p>
@@ -3767,7 +9153,7 @@
           <a:p>
             <a:fld id="{C1FF6DA9-008F-8B48-92A6-B652298478BF}" type="slidenum">
               <a:rPr lang="en-US" smtClean="0"/>
-              <a:t>‹#›</a:t>
+              <a:t>‹nº›</a:t>
             </a:fld>
             <a:endParaRPr lang="en-US"/>
           </a:p>
@@ -3828,10 +9214,9 @@
           </a:lstStyle>
           <a:p>
             <a:r>
-              <a:rPr lang="en-US" smtClean="0"/>
+              <a:rPr lang="en-US"/>
               <a:t>Click to edit Master title style</a:t>
             </a:r>
-            <a:endParaRPr lang="en-US"/>
           </a:p>
         </p:txBody>
       </p:sp>
@@ -3955,7 +9340,7 @@
           <a:p>
             <a:pPr lvl="0"/>
             <a:r>
-              <a:rPr lang="en-US" smtClean="0"/>
+              <a:rPr lang="en-US"/>
               <a:t>Click to edit Master text styles</a:t>
             </a:r>
           </a:p>
@@ -3978,7 +9363,7 @@
           <a:p>
             <a:fld id="{5BCAD085-E8A6-8845-BD4E-CB4CCA059FC4}" type="datetimeFigureOut">
               <a:rPr lang="en-US" smtClean="0"/>
-              <a:t>1/27/13</a:t>
+              <a:t>8/19/2026</a:t>
             </a:fld>
             <a:endParaRPr lang="en-US"/>
           </a:p>
@@ -4020,7 +9405,7 @@
           <a:p>
             <a:fld id="{C1FF6DA9-008F-8B48-92A6-B652298478BF}" type="slidenum">
               <a:rPr lang="en-US" smtClean="0"/>
-              <a:t>‹#›</a:t>
+              <a:t>‹nº›</a:t>
             </a:fld>
             <a:endParaRPr lang="en-US"/>
           </a:p>
@@ -4087,10 +9472,9 @@
           <a:lstStyle/>
           <a:p>
             <a:r>
-              <a:rPr lang="en-US" smtClean="0"/>
+              <a:rPr lang="en-US"/>
               <a:t>Click to edit Master title style</a:t>
             </a:r>
-            <a:endParaRPr lang="en-US"/>
           </a:p>
         </p:txBody>
       </p:sp>
@@ -4121,38 +9505,37 @@
           <a:p>
             <a:pPr lvl="0"/>
             <a:r>
-              <a:rPr lang="en-US" smtClean="0"/>
+              <a:rPr lang="en-US"/>
               <a:t>Click to edit Master text styles</a:t>
             </a:r>
           </a:p>
           <a:p>
             <a:pPr lvl="1"/>
             <a:r>
-              <a:rPr lang="en-US" smtClean="0"/>
+              <a:rPr lang="en-US"/>
               <a:t>Second level</a:t>
             </a:r>
           </a:p>
           <a:p>
             <a:pPr lvl="2"/>
             <a:r>
-              <a:rPr lang="en-US" smtClean="0"/>
+              <a:rPr lang="en-US"/>
               <a:t>Third level</a:t>
             </a:r>
           </a:p>
           <a:p>
             <a:pPr lvl="3"/>
             <a:r>
-              <a:rPr lang="en-US" smtClean="0"/>
+              <a:rPr lang="en-US"/>
               <a:t>Fourth level</a:t>
             </a:r>
           </a:p>
           <a:p>
             <a:pPr lvl="4"/>
             <a:r>
-              <a:rPr lang="en-US" smtClean="0"/>
+              <a:rPr lang="en-US"/>
               <a:t>Fifth level</a:t>
             </a:r>
-            <a:endParaRPr lang="en-US"/>
           </a:p>
         </p:txBody>
       </p:sp>
@@ -4191,7 +9574,7 @@
           <a:p>
             <a:fld id="{5BCAD085-E8A6-8845-BD4E-CB4CCA059FC4}" type="datetimeFigureOut">
               <a:rPr lang="en-US" smtClean="0"/>
-              <a:t>1/27/13</a:t>
+              <a:t>8/19/2026</a:t>
             </a:fld>
             <a:endParaRPr lang="en-US"/>
           </a:p>
@@ -4269,7 +9652,7 @@
           <a:p>
             <a:fld id="{C1FF6DA9-008F-8B48-92A6-B652298478BF}" type="slidenum">
               <a:rPr lang="en-US" smtClean="0"/>
-              <a:t>‹#›</a:t>
+              <a:t>‹nº›</a:t>
             </a:fld>
             <a:endParaRPr lang="en-US"/>
           </a:p>
@@ -4550,7 +9933,7 @@
 </file>
 
 <file path=ppt/slides/slide1.xml><?xml version="1.0" encoding="utf-8"?>
-<p:sld xmlns:a="http://schemas.openxmlformats.org/drawingml/2006/main" xmlns:p="http://schemas.openxmlformats.org/presentationml/2006/main" xmlns:r="http://schemas.openxmlformats.org/officeDocument/2006/relationships">
+<p:sld xmlns:a="http://schemas.openxmlformats.org/drawingml/2006/main" xmlns:r="http://schemas.openxmlformats.org/officeDocument/2006/relationships" xmlns:p="http://schemas.openxmlformats.org/presentationml/2006/main">
   <p:cSld>
     <p:spTree>
       <p:nvGrpSpPr>
@@ -4558,7 +9941,14 @@
         <p:cNvGrpSpPr/>
         <p:nvPr/>
       </p:nvGrpSpPr>
-      <p:grpSpPr/>
+      <p:grpSpPr>
+        <a:xfrm>
+          <a:off x="0" y="0"/>
+          <a:ext cx="0" cy="0"/>
+          <a:chOff x="0" y="0"/>
+          <a:chExt cx="0" cy="0"/>
+        </a:xfrm>
+      </p:grpSpPr>
       <p:pic>
         <p:nvPicPr>
           <p:cNvPr id="2" name="Picture 1" descr="slide-01.png"/>
@@ -4568,7 +9958,7 @@
           <p:nvPr/>
         </p:nvPicPr>
         <p:blipFill>
-          <a:blip r:embed="rId2"/>
+          <a:blip r:embed="rId3"/>
           <a:stretch>
             <a:fillRect/>
           </a:stretch>
@@ -4592,7 +9982,7 @@
 </file>
 
 <file path=ppt/slides/slide10.xml><?xml version="1.0" encoding="utf-8"?>
-<p:sld xmlns:a="http://schemas.openxmlformats.org/drawingml/2006/main" xmlns:p="http://schemas.openxmlformats.org/presentationml/2006/main" xmlns:r="http://schemas.openxmlformats.org/officeDocument/2006/relationships">
+<p:sld xmlns:a="http://schemas.openxmlformats.org/drawingml/2006/main" xmlns:r="http://schemas.openxmlformats.org/officeDocument/2006/relationships" xmlns:p="http://schemas.openxmlformats.org/presentationml/2006/main">
   <p:cSld>
     <p:spTree>
       <p:nvGrpSpPr>
@@ -4600,7 +9990,14 @@
         <p:cNvGrpSpPr/>
         <p:nvPr/>
       </p:nvGrpSpPr>
-      <p:grpSpPr/>
+      <p:grpSpPr>
+        <a:xfrm>
+          <a:off x="0" y="0"/>
+          <a:ext cx="0" cy="0"/>
+          <a:chOff x="0" y="0"/>
+          <a:chExt cx="0" cy="0"/>
+        </a:xfrm>
+      </p:grpSpPr>
       <p:pic>
         <p:nvPicPr>
           <p:cNvPr id="2" name="Picture 1" descr="slide-10.png"/>
@@ -4610,7 +10007,7 @@
           <p:nvPr/>
         </p:nvPicPr>
         <p:blipFill>
-          <a:blip r:embed="rId2"/>
+          <a:blip r:embed="rId3"/>
           <a:stretch>
             <a:fillRect/>
           </a:stretch>
@@ -4634,7 +10031,7 @@
 </file>
 
 <file path=ppt/slides/slide11.xml><?xml version="1.0" encoding="utf-8"?>
-<p:sld xmlns:a="http://schemas.openxmlformats.org/drawingml/2006/main" xmlns:p="http://schemas.openxmlformats.org/presentationml/2006/main" xmlns:r="http://schemas.openxmlformats.org/officeDocument/2006/relationships">
+<p:sld xmlns:a="http://schemas.openxmlformats.org/drawingml/2006/main" xmlns:r="http://schemas.openxmlformats.org/officeDocument/2006/relationships" xmlns:p="http://schemas.openxmlformats.org/presentationml/2006/main">
   <p:cSld>
     <p:spTree>
       <p:nvGrpSpPr>
@@ -4642,7 +10039,14 @@
         <p:cNvGrpSpPr/>
         <p:nvPr/>
       </p:nvGrpSpPr>
-      <p:grpSpPr/>
+      <p:grpSpPr>
+        <a:xfrm>
+          <a:off x="0" y="0"/>
+          <a:ext cx="0" cy="0"/>
+          <a:chOff x="0" y="0"/>
+          <a:chExt cx="0" cy="0"/>
+        </a:xfrm>
+      </p:grpSpPr>
       <p:pic>
         <p:nvPicPr>
           <p:cNvPr id="2" name="Picture 1" descr="slide-11.png"/>
@@ -4652,7 +10056,7 @@
           <p:nvPr/>
         </p:nvPicPr>
         <p:blipFill>
-          <a:blip r:embed="rId2"/>
+          <a:blip r:embed="rId3"/>
           <a:stretch>
             <a:fillRect/>
           </a:stretch>
@@ -4676,7 +10080,7 @@
 </file>
 
 <file path=ppt/slides/slide12.xml><?xml version="1.0" encoding="utf-8"?>
-<p:sld xmlns:a="http://schemas.openxmlformats.org/drawingml/2006/main" xmlns:p="http://schemas.openxmlformats.org/presentationml/2006/main" xmlns:r="http://schemas.openxmlformats.org/officeDocument/2006/relationships">
+<p:sld xmlns:a="http://schemas.openxmlformats.org/drawingml/2006/main" xmlns:r="http://schemas.openxmlformats.org/officeDocument/2006/relationships" xmlns:p="http://schemas.openxmlformats.org/presentationml/2006/main">
   <p:cSld>
     <p:spTree>
       <p:nvGrpSpPr>
@@ -4684,7 +10088,14 @@
         <p:cNvGrpSpPr/>
         <p:nvPr/>
       </p:nvGrpSpPr>
-      <p:grpSpPr/>
+      <p:grpSpPr>
+        <a:xfrm>
+          <a:off x="0" y="0"/>
+          <a:ext cx="0" cy="0"/>
+          <a:chOff x="0" y="0"/>
+          <a:chExt cx="0" cy="0"/>
+        </a:xfrm>
+      </p:grpSpPr>
       <p:pic>
         <p:nvPicPr>
           <p:cNvPr id="2" name="Picture 1" descr="slide-12.png"/>
@@ -4694,7 +10105,7 @@
           <p:nvPr/>
         </p:nvPicPr>
         <p:blipFill>
-          <a:blip r:embed="rId2"/>
+          <a:blip r:embed="rId3"/>
           <a:stretch>
             <a:fillRect/>
           </a:stretch>
@@ -4718,7 +10129,7 @@
 </file>
 
 <file path=ppt/slides/slide2.xml><?xml version="1.0" encoding="utf-8"?>
-<p:sld xmlns:a="http://schemas.openxmlformats.org/drawingml/2006/main" xmlns:p="http://schemas.openxmlformats.org/presentationml/2006/main" xmlns:r="http://schemas.openxmlformats.org/officeDocument/2006/relationships">
+<p:sld xmlns:a="http://schemas.openxmlformats.org/drawingml/2006/main" xmlns:r="http://schemas.openxmlformats.org/officeDocument/2006/relationships" xmlns:p="http://schemas.openxmlformats.org/presentationml/2006/main">
   <p:cSld>
     <p:spTree>
       <p:nvGrpSpPr>
@@ -4726,7 +10137,14 @@
         <p:cNvGrpSpPr/>
         <p:nvPr/>
       </p:nvGrpSpPr>
-      <p:grpSpPr/>
+      <p:grpSpPr>
+        <a:xfrm>
+          <a:off x="0" y="0"/>
+          <a:ext cx="0" cy="0"/>
+          <a:chOff x="0" y="0"/>
+          <a:chExt cx="0" cy="0"/>
+        </a:xfrm>
+      </p:grpSpPr>
       <p:pic>
         <p:nvPicPr>
           <p:cNvPr id="2" name="Picture 1" descr="slide-02.png"/>
@@ -4736,7 +10154,7 @@
           <p:nvPr/>
         </p:nvPicPr>
         <p:blipFill>
-          <a:blip r:embed="rId2"/>
+          <a:blip r:embed="rId3"/>
           <a:stretch>
             <a:fillRect/>
           </a:stretch>
@@ -4760,7 +10178,7 @@
 </file>
 
 <file path=ppt/slides/slide3.xml><?xml version="1.0" encoding="utf-8"?>
-<p:sld xmlns:a="http://schemas.openxmlformats.org/drawingml/2006/main" xmlns:p="http://schemas.openxmlformats.org/presentationml/2006/main" xmlns:r="http://schemas.openxmlformats.org/officeDocument/2006/relationships">
+<p:sld xmlns:a="http://schemas.openxmlformats.org/drawingml/2006/main" xmlns:r="http://schemas.openxmlformats.org/officeDocument/2006/relationships" xmlns:p="http://schemas.openxmlformats.org/presentationml/2006/main">
   <p:cSld>
     <p:spTree>
       <p:nvGrpSpPr>
@@ -4768,7 +10186,14 @@
         <p:cNvGrpSpPr/>
         <p:nvPr/>
       </p:nvGrpSpPr>
-      <p:grpSpPr/>
+      <p:grpSpPr>
+        <a:xfrm>
+          <a:off x="0" y="0"/>
+          <a:ext cx="0" cy="0"/>
+          <a:chOff x="0" y="0"/>
+          <a:chExt cx="0" cy="0"/>
+        </a:xfrm>
+      </p:grpSpPr>
       <p:pic>
         <p:nvPicPr>
           <p:cNvPr id="2" name="Picture 1" descr="slide-03.png"/>
@@ -4778,7 +10203,7 @@
           <p:nvPr/>
         </p:nvPicPr>
         <p:blipFill>
-          <a:blip r:embed="rId2"/>
+          <a:blip r:embed="rId3"/>
           <a:stretch>
             <a:fillRect/>
           </a:stretch>
@@ -4802,7 +10227,7 @@
 </file>
 
 <file path=ppt/slides/slide4.xml><?xml version="1.0" encoding="utf-8"?>
-<p:sld xmlns:a="http://schemas.openxmlformats.org/drawingml/2006/main" xmlns:p="http://schemas.openxmlformats.org/presentationml/2006/main" xmlns:r="http://schemas.openxmlformats.org/officeDocument/2006/relationships">
+<p:sld xmlns:a="http://schemas.openxmlformats.org/drawingml/2006/main" xmlns:r="http://schemas.openxmlformats.org/officeDocument/2006/relationships" xmlns:p="http://schemas.openxmlformats.org/presentationml/2006/main">
   <p:cSld>
     <p:spTree>
       <p:nvGrpSpPr>
@@ -4810,7 +10235,14 @@
         <p:cNvGrpSpPr/>
         <p:nvPr/>
       </p:nvGrpSpPr>
-      <p:grpSpPr/>
+      <p:grpSpPr>
+        <a:xfrm>
+          <a:off x="0" y="0"/>
+          <a:ext cx="0" cy="0"/>
+          <a:chOff x="0" y="0"/>
+          <a:chExt cx="0" cy="0"/>
+        </a:xfrm>
+      </p:grpSpPr>
       <p:pic>
         <p:nvPicPr>
           <p:cNvPr id="2" name="Picture 1" descr="slide-04.png"/>
@@ -4820,7 +10252,7 @@
           <p:nvPr/>
         </p:nvPicPr>
         <p:blipFill>
-          <a:blip r:embed="rId2"/>
+          <a:blip r:embed="rId3"/>
           <a:stretch>
             <a:fillRect/>
           </a:stretch>
@@ -4844,7 +10276,7 @@
 </file>
 
 <file path=ppt/slides/slide5.xml><?xml version="1.0" encoding="utf-8"?>
-<p:sld xmlns:a="http://schemas.openxmlformats.org/drawingml/2006/main" xmlns:p="http://schemas.openxmlformats.org/presentationml/2006/main" xmlns:r="http://schemas.openxmlformats.org/officeDocument/2006/relationships">
+<p:sld xmlns:a="http://schemas.openxmlformats.org/drawingml/2006/main" xmlns:r="http://schemas.openxmlformats.org/officeDocument/2006/relationships" xmlns:p="http://schemas.openxmlformats.org/presentationml/2006/main">
   <p:cSld>
     <p:spTree>
       <p:nvGrpSpPr>
@@ -4852,7 +10284,14 @@
         <p:cNvGrpSpPr/>
         <p:nvPr/>
       </p:nvGrpSpPr>
-      <p:grpSpPr/>
+      <p:grpSpPr>
+        <a:xfrm>
+          <a:off x="0" y="0"/>
+          <a:ext cx="0" cy="0"/>
+          <a:chOff x="0" y="0"/>
+          <a:chExt cx="0" cy="0"/>
+        </a:xfrm>
+      </p:grpSpPr>
       <p:pic>
         <p:nvPicPr>
           <p:cNvPr id="2" name="Picture 1" descr="slide-05.png"/>
@@ -4862,7 +10301,7 @@
           <p:nvPr/>
         </p:nvPicPr>
         <p:blipFill>
-          <a:blip r:embed="rId2"/>
+          <a:blip r:embed="rId3"/>
           <a:stretch>
             <a:fillRect/>
           </a:stretch>
@@ -4886,7 +10325,7 @@
 </file>
 
 <file path=ppt/slides/slide6.xml><?xml version="1.0" encoding="utf-8"?>
-<p:sld xmlns:a="http://schemas.openxmlformats.org/drawingml/2006/main" xmlns:p="http://schemas.openxmlformats.org/presentationml/2006/main" xmlns:r="http://schemas.openxmlformats.org/officeDocument/2006/relationships">
+<p:sld xmlns:a="http://schemas.openxmlformats.org/drawingml/2006/main" xmlns:r="http://schemas.openxmlformats.org/officeDocument/2006/relationships" xmlns:p="http://schemas.openxmlformats.org/presentationml/2006/main">
   <p:cSld>
     <p:spTree>
       <p:nvGrpSpPr>
@@ -4894,7 +10333,14 @@
         <p:cNvGrpSpPr/>
         <p:nvPr/>
       </p:nvGrpSpPr>
-      <p:grpSpPr/>
+      <p:grpSpPr>
+        <a:xfrm>
+          <a:off x="0" y="0"/>
+          <a:ext cx="0" cy="0"/>
+          <a:chOff x="0" y="0"/>
+          <a:chExt cx="0" cy="0"/>
+        </a:xfrm>
+      </p:grpSpPr>
       <p:pic>
         <p:nvPicPr>
           <p:cNvPr id="2" name="Picture 1" descr="slide-06.png"/>
@@ -4904,7 +10350,7 @@
           <p:nvPr/>
         </p:nvPicPr>
         <p:blipFill>
-          <a:blip r:embed="rId2"/>
+          <a:blip r:embed="rId3"/>
           <a:stretch>
             <a:fillRect/>
           </a:stretch>
@@ -4928,7 +10374,7 @@
 </file>
 
 <file path=ppt/slides/slide7.xml><?xml version="1.0" encoding="utf-8"?>
-<p:sld xmlns:a="http://schemas.openxmlformats.org/drawingml/2006/main" xmlns:p="http://schemas.openxmlformats.org/presentationml/2006/main" xmlns:r="http://schemas.openxmlformats.org/officeDocument/2006/relationships">
+<p:sld xmlns:a="http://schemas.openxmlformats.org/drawingml/2006/main" xmlns:r="http://schemas.openxmlformats.org/officeDocument/2006/relationships" xmlns:p="http://schemas.openxmlformats.org/presentationml/2006/main">
   <p:cSld>
     <p:spTree>
       <p:nvGrpSpPr>
@@ -4936,7 +10382,14 @@
         <p:cNvGrpSpPr/>
         <p:nvPr/>
       </p:nvGrpSpPr>
-      <p:grpSpPr/>
+      <p:grpSpPr>
+        <a:xfrm>
+          <a:off x="0" y="0"/>
+          <a:ext cx="0" cy="0"/>
+          <a:chOff x="0" y="0"/>
+          <a:chExt cx="0" cy="0"/>
+        </a:xfrm>
+      </p:grpSpPr>
       <p:pic>
         <p:nvPicPr>
           <p:cNvPr id="2" name="Picture 1" descr="slide-07.png"/>
@@ -4946,7 +10399,7 @@
           <p:nvPr/>
         </p:nvPicPr>
         <p:blipFill>
-          <a:blip r:embed="rId2"/>
+          <a:blip r:embed="rId3"/>
           <a:stretch>
             <a:fillRect/>
           </a:stretch>
@@ -4970,7 +10423,7 @@
 </file>
 
 <file path=ppt/slides/slide8.xml><?xml version="1.0" encoding="utf-8"?>
-<p:sld xmlns:a="http://schemas.openxmlformats.org/drawingml/2006/main" xmlns:p="http://schemas.openxmlformats.org/presentationml/2006/main" xmlns:r="http://schemas.openxmlformats.org/officeDocument/2006/relationships">
+<p:sld xmlns:a="http://schemas.openxmlformats.org/drawingml/2006/main" xmlns:r="http://schemas.openxmlformats.org/officeDocument/2006/relationships" xmlns:p="http://schemas.openxmlformats.org/presentationml/2006/main">
   <p:cSld>
     <p:spTree>
       <p:nvGrpSpPr>
@@ -4978,7 +10431,14 @@
         <p:cNvGrpSpPr/>
         <p:nvPr/>
       </p:nvGrpSpPr>
-      <p:grpSpPr/>
+      <p:grpSpPr>
+        <a:xfrm>
+          <a:off x="0" y="0"/>
+          <a:ext cx="0" cy="0"/>
+          <a:chOff x="0" y="0"/>
+          <a:chExt cx="0" cy="0"/>
+        </a:xfrm>
+      </p:grpSpPr>
       <p:pic>
         <p:nvPicPr>
           <p:cNvPr id="2" name="Picture 1" descr="slide-08.png"/>
@@ -4988,7 +10448,7 @@
           <p:nvPr/>
         </p:nvPicPr>
         <p:blipFill>
-          <a:blip r:embed="rId2"/>
+          <a:blip r:embed="rId3"/>
           <a:stretch>
             <a:fillRect/>
           </a:stretch>
@@ -5012,7 +10472,7 @@
 </file>
 
 <file path=ppt/slides/slide9.xml><?xml version="1.0" encoding="utf-8"?>
-<p:sld xmlns:a="http://schemas.openxmlformats.org/drawingml/2006/main" xmlns:p="http://schemas.openxmlformats.org/presentationml/2006/main" xmlns:r="http://schemas.openxmlformats.org/officeDocument/2006/relationships">
+<p:sld xmlns:a="http://schemas.openxmlformats.org/drawingml/2006/main" xmlns:r="http://schemas.openxmlformats.org/officeDocument/2006/relationships" xmlns:p="http://schemas.openxmlformats.org/presentationml/2006/main">
   <p:cSld>
     <p:spTree>
       <p:nvGrpSpPr>
@@ -5020,7 +10480,14 @@
         <p:cNvGrpSpPr/>
         <p:nvPr/>
       </p:nvGrpSpPr>
-      <p:grpSpPr/>
+      <p:grpSpPr>
+        <a:xfrm>
+          <a:off x="0" y="0"/>
+          <a:ext cx="0" cy="0"/>
+          <a:chOff x="0" y="0"/>
+          <a:chExt cx="0" cy="0"/>
+        </a:xfrm>
+      </p:grpSpPr>
       <p:pic>
         <p:nvPicPr>
           <p:cNvPr id="2" name="Picture 1" descr="slide-09.png"/>
@@ -5030,7 +10497,7 @@
           <p:nvPr/>
         </p:nvPicPr>
         <p:blipFill>
-          <a:blip r:embed="rId2"/>
+          <a:blip r:embed="rId3"/>
           <a:stretch>
             <a:fillRect/>
           </a:stretch>
@@ -5374,7 +10841,7 @@
 </file>
 
 <file path=ppt/theme/theme2.xml><?xml version="1.0" encoding="utf-8"?>
-<a:theme xmlns:a="http://schemas.openxmlformats.org/drawingml/2006/main" name="Office Theme">
+<a:theme xmlns:a="http://schemas.openxmlformats.org/drawingml/2006/main" name="Tema do Office">
   <a:themeElements>
     <a:clrScheme name="Office">
       <a:dk1>
@@ -5384,44 +10851,44 @@
         <a:sysClr val="window" lastClr="FFFFFF"/>
       </a:lt1>
       <a:dk2>
-        <a:srgbClr val="1F497D"/>
+        <a:srgbClr val="0E2841"/>
       </a:dk2>
       <a:lt2>
-        <a:srgbClr val="EEECE1"/>
+        <a:srgbClr val="E8E8E8"/>
       </a:lt2>
       <a:accent1>
-        <a:srgbClr val="4F81BD"/>
+        <a:srgbClr val="156082"/>
       </a:accent1>
       <a:accent2>
-        <a:srgbClr val="C0504D"/>
+        <a:srgbClr val="E97132"/>
       </a:accent2>
       <a:accent3>
-        <a:srgbClr val="9BBB59"/>
+        <a:srgbClr val="196B24"/>
       </a:accent3>
       <a:accent4>
-        <a:srgbClr val="8064A2"/>
+        <a:srgbClr val="0F9ED5"/>
       </a:accent4>
       <a:accent5>
-        <a:srgbClr val="4BACC6"/>
+        <a:srgbClr val="A02B93"/>
       </a:accent5>
       <a:accent6>
-        <a:srgbClr val="F79646"/>
+        <a:srgbClr val="4EA72E"/>
       </a:accent6>
       <a:hlink>
-        <a:srgbClr val="0000FF"/>
+        <a:srgbClr val="467886"/>
       </a:hlink>
       <a:folHlink>
-        <a:srgbClr val="800080"/>
+        <a:srgbClr val="96607D"/>
       </a:folHlink>
     </a:clrScheme>
     <a:fontScheme name="Office">
       <a:majorFont>
-        <a:latin typeface="Calibri"/>
+        <a:latin typeface="Aptos Display" panose="02110004020202020204"/>
         <a:ea typeface=""/>
         <a:cs typeface=""/>
-        <a:font script="Jpan" typeface="ＭＳ Ｐゴシック"/>
+        <a:font script="Jpan" typeface="游ゴシック Light"/>
         <a:font script="Hang" typeface="맑은 고딕"/>
-        <a:font script="Hans" typeface="宋体"/>
+        <a:font script="Hans" typeface="等线 Light"/>
         <a:font script="Hant" typeface="新細明體"/>
         <a:font script="Arab" typeface="Times New Roman"/>
         <a:font script="Hebr" typeface="Times New Roman"/>
@@ -5449,14 +10916,31 @@
         <a:font script="Viet" typeface="Times New Roman"/>
         <a:font script="Uigh" typeface="Microsoft Uighur"/>
         <a:font script="Geor" typeface="Sylfaen"/>
+        <a:font script="Armn" typeface="Arial"/>
+        <a:font script="Bugi" typeface="Leelawadee UI"/>
+        <a:font script="Bopo" typeface="Microsoft JhengHei"/>
+        <a:font script="Java" typeface="Javanese Text"/>
+        <a:font script="Lisu" typeface="Segoe UI"/>
+        <a:font script="Mymr" typeface="Myanmar Text"/>
+        <a:font script="Nkoo" typeface="Ebrima"/>
+        <a:font script="Olck" typeface="Nirmala UI"/>
+        <a:font script="Osma" typeface="Ebrima"/>
+        <a:font script="Phag" typeface="Phagspa"/>
+        <a:font script="Syrn" typeface="Estrangelo Edessa"/>
+        <a:font script="Syrj" typeface="Estrangelo Edessa"/>
+        <a:font script="Syre" typeface="Estrangelo Edessa"/>
+        <a:font script="Sora" typeface="Nirmala UI"/>
+        <a:font script="Tale" typeface="Microsoft Tai Le"/>
+        <a:font script="Talu" typeface="Microsoft New Tai Lue"/>
+        <a:font script="Tfng" typeface="Ebrima"/>
       </a:majorFont>
       <a:minorFont>
-        <a:latin typeface="Calibri"/>
+        <a:latin typeface="Aptos" panose="02110004020202020204"/>
         <a:ea typeface=""/>
         <a:cs typeface=""/>
-        <a:font script="Jpan" typeface="ＭＳ Ｐゴシック"/>
+        <a:font script="Jpan" typeface="游ゴシック"/>
         <a:font script="Hang" typeface="맑은 고딕"/>
-        <a:font script="Hans" typeface="宋体"/>
+        <a:font script="Hans" typeface="等线"/>
         <a:font script="Hant" typeface="新細明體"/>
         <a:font script="Arab" typeface="Arial"/>
         <a:font script="Hebr" typeface="Arial"/>
@@ -5484,6 +10968,23 @@
         <a:font script="Viet" typeface="Arial"/>
         <a:font script="Uigh" typeface="Microsoft Uighur"/>
         <a:font script="Geor" typeface="Sylfaen"/>
+        <a:font script="Armn" typeface="Arial"/>
+        <a:font script="Bugi" typeface="Leelawadee UI"/>
+        <a:font script="Bopo" typeface="Microsoft JhengHei"/>
+        <a:font script="Java" typeface="Javanese Text"/>
+        <a:font script="Lisu" typeface="Segoe UI"/>
+        <a:font script="Mymr" typeface="Myanmar Text"/>
+        <a:font script="Nkoo" typeface="Ebrima"/>
+        <a:font script="Olck" typeface="Nirmala UI"/>
+        <a:font script="Osma" typeface="Ebrima"/>
+        <a:font script="Phag" typeface="Phagspa"/>
+        <a:font script="Syrn" typeface="Estrangelo Edessa"/>
+        <a:font script="Syrj" typeface="Estrangelo Edessa"/>
+        <a:font script="Syre" typeface="Estrangelo Edessa"/>
+        <a:font script="Sora" typeface="Nirmala UI"/>
+        <a:font script="Tale" typeface="Microsoft Tai Le"/>
+        <a:font script="Talu" typeface="Microsoft New Tai Lue"/>
+        <a:font script="Tfng" typeface="Ebrima"/>
       </a:minorFont>
     </a:fontScheme>
     <a:fmtScheme name="Office">
@@ -5495,180 +10996,136 @@
           <a:gsLst>
             <a:gs pos="0">
               <a:schemeClr val="phClr">
-                <a:tint val="50000"/>
-                <a:satMod val="300000"/>
+                <a:lumMod val="110000"/>
+                <a:satMod val="105000"/>
+                <a:tint val="67000"/>
               </a:schemeClr>
             </a:gs>
-            <a:gs pos="35000">
+            <a:gs pos="50000">
               <a:schemeClr val="phClr">
-                <a:tint val="37000"/>
-                <a:satMod val="300000"/>
+                <a:lumMod val="105000"/>
+                <a:satMod val="103000"/>
+                <a:tint val="73000"/>
               </a:schemeClr>
             </a:gs>
             <a:gs pos="100000">
               <a:schemeClr val="phClr">
-                <a:tint val="15000"/>
-                <a:satMod val="350000"/>
+                <a:lumMod val="105000"/>
+                <a:satMod val="109000"/>
+                <a:tint val="81000"/>
               </a:schemeClr>
             </a:gs>
           </a:gsLst>
-          <a:lin ang="16200000" scaled="1"/>
+          <a:lin ang="5400000" scaled="0"/>
         </a:gradFill>
         <a:gradFill rotWithShape="1">
           <a:gsLst>
             <a:gs pos="0">
               <a:schemeClr val="phClr">
-                <a:tint val="100000"/>
+                <a:satMod val="103000"/>
+                <a:lumMod val="102000"/>
+                <a:tint val="94000"/>
+              </a:schemeClr>
+            </a:gs>
+            <a:gs pos="50000">
+              <a:schemeClr val="phClr">
+                <a:satMod val="110000"/>
+                <a:lumMod val="100000"/>
                 <a:shade val="100000"/>
-                <a:satMod val="130000"/>
               </a:schemeClr>
             </a:gs>
             <a:gs pos="100000">
               <a:schemeClr val="phClr">
-                <a:tint val="50000"/>
-                <a:shade val="100000"/>
-                <a:satMod val="350000"/>
+                <a:lumMod val="99000"/>
+                <a:satMod val="120000"/>
+                <a:shade val="78000"/>
               </a:schemeClr>
             </a:gs>
           </a:gsLst>
-          <a:lin ang="16200000" scaled="0"/>
+          <a:lin ang="5400000" scaled="0"/>
         </a:gradFill>
       </a:fillStyleLst>
       <a:lnStyleLst>
-        <a:ln w="9525" cap="flat" cmpd="sng" algn="ctr">
+        <a:ln w="12700" cap="flat" cmpd="sng" algn="ctr">
           <a:solidFill>
-            <a:schemeClr val="phClr">
-              <a:shade val="95000"/>
-              <a:satMod val="105000"/>
-            </a:schemeClr>
+            <a:schemeClr val="phClr"/>
           </a:solidFill>
           <a:prstDash val="solid"/>
+          <a:miter lim="800000"/>
+        </a:ln>
+        <a:ln w="19050" cap="flat" cmpd="sng" algn="ctr">
+          <a:solidFill>
+            <a:schemeClr val="phClr"/>
+          </a:solidFill>
+          <a:prstDash val="solid"/>
+          <a:miter lim="800000"/>
         </a:ln>
         <a:ln w="25400" cap="flat" cmpd="sng" algn="ctr">
           <a:solidFill>
             <a:schemeClr val="phClr"/>
           </a:solidFill>
           <a:prstDash val="solid"/>
-        </a:ln>
-        <a:ln w="38100" cap="flat" cmpd="sng" algn="ctr">
-          <a:solidFill>
-            <a:schemeClr val="phClr"/>
-          </a:solidFill>
-          <a:prstDash val="solid"/>
+          <a:miter lim="800000"/>
         </a:ln>
       </a:lnStyleLst>
       <a:effectStyleLst>
         <a:effectStyle>
+          <a:effectLst/>
+        </a:effectStyle>
+        <a:effectStyle>
+          <a:effectLst/>
+        </a:effectStyle>
+        <a:effectStyle>
           <a:effectLst>
-            <a:outerShdw blurRad="40000" dist="20000" dir="5400000" rotWithShape="0">
+            <a:outerShdw blurRad="57150" dist="19050" dir="5400000" algn="ctr" rotWithShape="0">
               <a:srgbClr val="000000">
-                <a:alpha val="38000"/>
+                <a:alpha val="63000"/>
               </a:srgbClr>
             </a:outerShdw>
           </a:effectLst>
-        </a:effectStyle>
-        <a:effectStyle>
-          <a:effectLst>
-            <a:outerShdw blurRad="40000" dist="23000" dir="5400000" rotWithShape="0">
-              <a:srgbClr val="000000">
-                <a:alpha val="35000"/>
-              </a:srgbClr>
-            </a:outerShdw>
-          </a:effectLst>
-        </a:effectStyle>
-        <a:effectStyle>
-          <a:effectLst>
-            <a:outerShdw blurRad="40000" dist="23000" dir="5400000" rotWithShape="0">
-              <a:srgbClr val="000000">
-                <a:alpha val="35000"/>
-              </a:srgbClr>
-            </a:outerShdw>
-          </a:effectLst>
-          <a:scene3d>
-            <a:camera prst="orthographicFront">
-              <a:rot lat="0" lon="0" rev="0"/>
-            </a:camera>
-            <a:lightRig rig="threePt" dir="t">
-              <a:rot lat="0" lon="0" rev="1200000"/>
-            </a:lightRig>
-          </a:scene3d>
-          <a:sp3d>
-            <a:bevelT w="63500" h="25400"/>
-          </a:sp3d>
         </a:effectStyle>
       </a:effectStyleLst>
       <a:bgFillStyleLst>
         <a:solidFill>
           <a:schemeClr val="phClr"/>
         </a:solidFill>
+        <a:solidFill>
+          <a:schemeClr val="phClr">
+            <a:tint val="95000"/>
+            <a:satMod val="170000"/>
+          </a:schemeClr>
+        </a:solidFill>
         <a:gradFill rotWithShape="1">
           <a:gsLst>
             <a:gs pos="0">
               <a:schemeClr val="phClr">
-                <a:tint val="40000"/>
-                <a:satMod val="350000"/>
+                <a:tint val="93000"/>
+                <a:satMod val="150000"/>
+                <a:shade val="98000"/>
+                <a:lumMod val="102000"/>
               </a:schemeClr>
             </a:gs>
-            <a:gs pos="40000">
+            <a:gs pos="50000">
               <a:schemeClr val="phClr">
-                <a:tint val="45000"/>
-                <a:shade val="99000"/>
-                <a:satMod val="350000"/>
+                <a:tint val="98000"/>
+                <a:satMod val="130000"/>
+                <a:shade val="90000"/>
+                <a:lumMod val="103000"/>
               </a:schemeClr>
             </a:gs>
             <a:gs pos="100000">
               <a:schemeClr val="phClr">
-                <a:shade val="20000"/>
-                <a:satMod val="255000"/>
+                <a:shade val="63000"/>
+                <a:satMod val="120000"/>
               </a:schemeClr>
             </a:gs>
           </a:gsLst>
-          <a:path path="circle">
-            <a:fillToRect l="50000" t="-80000" r="50000" b="180000"/>
-          </a:path>
-        </a:gradFill>
-        <a:gradFill rotWithShape="1">
-          <a:gsLst>
-            <a:gs pos="0">
-              <a:schemeClr val="phClr">
-                <a:tint val="80000"/>
-                <a:satMod val="300000"/>
-              </a:schemeClr>
-            </a:gs>
-            <a:gs pos="100000">
-              <a:schemeClr val="phClr">
-                <a:shade val="30000"/>
-                <a:satMod val="200000"/>
-              </a:schemeClr>
-            </a:gs>
-          </a:gsLst>
-          <a:path path="circle">
-            <a:fillToRect l="50000" t="50000" r="50000" b="50000"/>
-          </a:path>
+          <a:lin ang="5400000" scaled="0"/>
         </a:gradFill>
       </a:bgFillStyleLst>
     </a:fmtScheme>
   </a:themeElements>
   <a:objectDefaults>
-    <a:spDef>
-      <a:spPr/>
-      <a:bodyPr/>
-      <a:lstStyle/>
-      <a:style>
-        <a:lnRef idx="1">
-          <a:schemeClr val="accent1"/>
-        </a:lnRef>
-        <a:fillRef idx="3">
-          <a:schemeClr val="accent1"/>
-        </a:fillRef>
-        <a:effectRef idx="2">
-          <a:schemeClr val="accent1"/>
-        </a:effectRef>
-        <a:fontRef idx="minor">
-          <a:schemeClr val="lt1"/>
-        </a:fontRef>
-      </a:style>
-    </a:spDef>
     <a:lnDef>
       <a:spPr/>
       <a:bodyPr/>
@@ -5690,5 +11147,10 @@
     </a:lnDef>
   </a:objectDefaults>
   <a:extraClrSchemeLst/>
+  <a:extLst>
+    <a:ext uri="{05A4C25C-085E-4340-85A3-A5531E510DB2}">
+      <thm15:themeFamily xmlns:thm15="http://schemas.microsoft.com/office/thememl/2012/main" name="Office Theme" id="{2E142A2C-CD16-42D6-873A-C26D2A0506FA}" vid="{1BDDFF52-6CD6-40A5-AB3C-68EB2F1E4D0A}"/>
+    </a:ext>
+  </a:extLst>
 </a:theme>
 </file>
--- a/docs/apresentacao/Dreamy — Apresentação Institucional.pptx
+++ b/docs/apresentacao/Dreamy — Apresentação Institucional.pptx
@@ -17,6 +17,7 @@
     <p:sldId id="265" r:id="rId17"/>
     <p:sldId id="266" r:id="rId18"/>
     <p:sldId id="267" r:id="rId19"/>
+    <p:sldId id="268" r:id="rId20"/>
   </p:sldIdLst>
   <p:sldSz cx="12192000" cy="6858000" type="screen4x3"/>
   <p:notesSz cx="6858000" cy="9144000"/>
@@ -601,25 +602,37 @@
           <a:lstStyle/>
           <a:p>
             <a:r>
-              <a:t>Objetivo: reduzir o risco percebido — processo claro, ciclos curtos, sem sumiço. ≈ 45s</a:t>
+              <a:t>Objetivo: tornar concreto — três cenas do dia a dia que a plateia reconhece. ≈ 50s</a:t>
             </a:r>
           </a:p>
           <a:p/>
           <a:p>
             <a:r>
-              <a:t>E como é trabalhar com a gente? Cinco passos, sem mistério.</a:t>
+              <a:t>Três lugares onde isso fica concreto.</a:t>
             </a:r>
           </a:p>
           <a:p/>
           <a:p>
             <a:r>
-              <a:t>Entender: a gente senta junto e mapeia problema, impacto e contexto. Desenhar: solução, experiência, arquitetura. Construir: em ciclos curtos — você vê o software crescendo e valida no caminho; a gente não some seis meses para voltar com uma surpresa. Implantar: na operação real, com quem usa de verdade. E evoluir: porque software bom não termina — acompanha o negócio.</a:t>
+              <a:t>No atendimento: o agente responde, consulta as informações, registra tudo no CRM — e chama um humano quando a conversa pede um humano.</a:t>
             </a:r>
           </a:p>
           <a:p/>
           <a:p>
             <a:r>
-              <a:t>Em cada ciclo você sabe o que está sendo feito, por quê, e o que vem depois.</a:t>
+              <a:t>Em vendas: ele pesquisa o lead, qualifica, prepara o follow-up — o vendedor chega na conversa pronto, em vez de gastar a manhã pesquisando.</a:t>
+            </a:r>
+          </a:p>
+          <a:p/>
+          <a:p>
+            <a:r>
+              <a:t>Na operação: ele lê sistemas e documentos, consolida, analisa e age.</a:t>
+            </a:r>
+          </a:p>
+          <a:p/>
+          <a:p>
+            <a:r>
+              <a:t>Repara no padrão das três colunas: o agente fica com o trabalho repetitivo; as pessoas ficam com o que exige gente.</a:t>
             </a:r>
           </a:p>
         </p:txBody>
@@ -689,25 +702,25 @@
           <a:lstStyle/>
           <a:p>
             <a:r>
-              <a:t>Objetivo: qualificar com franqueza — quem tem fit se reconhece e se inclina. ≈ 40s</a:t>
+              <a:t>Objetivo: reduzir o risco percebido — processo claro, ciclos curtos, sem sumiço. ≈ 45s</a:t>
             </a:r>
           </a:p>
           <a:p/>
           <a:p>
             <a:r>
-              <a:t>Sendo bem direto sobre para quem isso funciona: o nosso trabalho rende mais em empresa que já funciona.</a:t>
+              <a:t>E como é trabalhar com a gente? Cinco passos, sem mistério.</a:t>
             </a:r>
           </a:p>
           <a:p/>
           <a:p>
             <a:r>
-              <a:t>Que já tem operação, clientes, time — e sente que a tecnologia virou o freio, e não o motor.</a:t>
+              <a:t>Entender: a gente senta junto e mapeia problema, impacto e contexto. Desenhar: solução, experiência, arquitetura. Construir: em ciclos curtos — você vê o software crescendo e valida no caminho; a gente não some seis meses para voltar com uma surpresa. Implantar: na operação real, com quem usa de verdade. E evoluir: porque software bom não termina — acompanha o negócio.</a:t>
             </a:r>
           </a:p>
           <a:p/>
           <a:p>
             <a:r>
-              <a:t>Se, enquanto eu falava, você lembrou de um processo que não escala, de sistemas que não conversam, de dados espalhados por aí... provavelmente existe algo que a gente pode construir juntos.</a:t>
+              <a:t>Em cada ciclo você sabe o que está sendo feito, por quê, e o que vem depois.</a:t>
             </a:r>
           </a:p>
         </p:txBody>
@@ -777,6 +790,94 @@
           <a:lstStyle/>
           <a:p>
             <a:r>
+              <a:t>Objetivo: qualificar com franqueza — quem tem fit se reconhece e se inclina. ≈ 40s</a:t>
+            </a:r>
+          </a:p>
+          <a:p/>
+          <a:p>
+            <a:r>
+              <a:t>Sendo bem direto sobre para quem isso funciona: o nosso trabalho rende mais em empresa que já funciona.</a:t>
+            </a:r>
+          </a:p>
+          <a:p/>
+          <a:p>
+            <a:r>
+              <a:t>Que já tem operação, clientes, time — e sente que a tecnologia virou o freio, e não o motor.</a:t>
+            </a:r>
+          </a:p>
+          <a:p/>
+          <a:p>
+            <a:r>
+              <a:t>Se, enquanto eu falava, você lembrou de um processo que não escala, de sistemas que não conversam, de dados espalhados por aí... provavelmente existe algo que a gente pode construir juntos.</a:t>
+            </a:r>
+          </a:p>
+        </p:txBody>
+      </p:sp>
+      <p:sp>
+        <p:nvSpPr>
+          <p:cNvPr id="4" name="Slide Number Placeholder 3"/>
+          <p:cNvSpPr>
+            <a:spLocks noGrp="1"/>
+          </p:cNvSpPr>
+          <p:nvPr>
+            <p:ph type="sldNum" idx="5" sz="quarter"/>
+          </p:nvPr>
+        </p:nvSpPr>
+        <p:spPr/>
+      </p:sp>
+    </p:spTree>
+  </p:cSld>
+  <p:clrMapOvr>
+    <a:masterClrMapping/>
+  </p:clrMapOvr>
+</p:notes>
+</file>
+
+<file path=ppt/notesSlides/notesSlide13.xml><?xml version="1.0" encoding="utf-8"?>
+<p:notes xmlns:a="http://schemas.openxmlformats.org/drawingml/2006/main" xmlns:p="http://schemas.openxmlformats.org/presentationml/2006/main" xmlns:r="http://schemas.openxmlformats.org/officeDocument/2006/relationships">
+  <p:cSld>
+    <p:spTree>
+      <p:nvGrpSpPr>
+        <p:cNvPr id="1" name=""/>
+        <p:cNvGrpSpPr/>
+        <p:nvPr/>
+      </p:nvGrpSpPr>
+      <p:grpSpPr>
+        <a:xfrm>
+          <a:off x="0" y="0"/>
+          <a:ext cx="0" cy="0"/>
+          <a:chOff x="0" y="0"/>
+          <a:chExt cx="0" cy="0"/>
+        </a:xfrm>
+      </p:grpSpPr>
+      <p:sp>
+        <p:nvSpPr>
+          <p:cNvPr id="2" name="Slide Image Placeholder 1"/>
+          <p:cNvSpPr>
+            <a:spLocks noGrp="1"/>
+          </p:cNvSpPr>
+          <p:nvPr>
+            <p:ph type="sldImg" idx="2"/>
+          </p:nvPr>
+        </p:nvSpPr>
+        <p:spPr/>
+      </p:sp>
+      <p:sp>
+        <p:nvSpPr>
+          <p:cNvPr id="3" name="Notes Placeholder 2"/>
+          <p:cNvSpPr>
+            <a:spLocks noGrp="1"/>
+          </p:cNvSpPr>
+          <p:nvPr>
+            <p:ph type="body" idx="3" sz="quarter"/>
+          </p:nvPr>
+        </p:nvSpPr>
+        <p:spPr/>
+        <p:txBody>
+          <a:bodyPr/>
+          <a:lstStyle/>
+          <a:p>
+            <a:r>
               <a:t>Objetivo: uma única pergunta + próximo passo simples. Termine e deixe a plateia falar. ≈ 40s</a:t>
             </a:r>
           </a:p>
@@ -883,31 +984,31 @@
           <a:lstStyle/>
           <a:p>
             <a:r>
-              <a:t>Objetivo: gerar identificação — a plateia precisa se reconhecer na cena. ≈ 60s</a:t>
+              <a:t>Urgência com dados de mercado — deixe os números falarem e não se alongue. ≈ 40s</a:t>
             </a:r>
           </a:p>
           <a:p/>
           <a:p>
             <a:r>
-              <a:t>Deixa eu descrever uma empresa, e você me diz se soa familiar.</a:t>
+              <a:t>Antes de falar da Dreamy, trinta segundos sobre o momento.</a:t>
             </a:r>
           </a:p>
           <a:p/>
           <a:p>
             <a:r>
-              <a:t>A empresa cresce. Os processos vão ficando cada vez mais específicos. Os sistemas param de conversar entre si. Alguma planilha — geralmente uma que só uma pessoa entende — passa a sustentar decisões importantes. E lá no comercial, leads esfriam sem ninguém perceber.</a:t>
+              <a:t>88% das empresas no mundo já usam IA em pelo menos uma função — eram 78% há um ano. Só em 2024, foram 252 bilhões de dólares investidos em IA. E quem investe está tendo retorno: em média, 3,7 dólares de volta para cada 1 investido.</a:t>
             </a:r>
           </a:p>
           <a:p/>
           <a:p>
             <a:r>
-              <a:t>[pausa — deixe a cena assentar]</a:t>
+              <a:t>[pausa curta]</a:t>
             </a:r>
           </a:p>
           <a:p/>
           <a:p>
             <a:r>
-              <a:t>Nada disso é falta de competência. É que a empresa cresceu mais rápido do que a tecnologia dela. E software pronto, de prateleira, não foi feito para o SEU processo — foi feito para a média.</a:t>
+              <a:t>Ou seja: a pergunta deixou de ser SE vale a pena. A pergunta agora é ONDE — no seu negócio. E é exatamente isso que a gente veio responder.</a:t>
             </a:r>
           </a:p>
         </p:txBody>
@@ -977,25 +1078,31 @@
           <a:lstStyle/>
           <a:p>
             <a:r>
-              <a:t>Objetivo: a virada. Slide quase vazio de propósito — a força está na pausa. ≈ 15s</a:t>
+              <a:t>Objetivo: gerar identificação — a plateia precisa se reconhecer na cena. ≈ 60s</a:t>
             </a:r>
           </a:p>
           <a:p/>
           <a:p>
             <a:r>
-              <a:t>E é exatamente nesse ponto que a gente entra.</a:t>
+              <a:t>Deixa eu descrever uma empresa, e você me diz se soa familiar.</a:t>
             </a:r>
           </a:p>
           <a:p/>
           <a:p>
             <a:r>
-              <a:t>[pausa longa — não corra este slide]</a:t>
+              <a:t>A empresa cresce. Os processos vão ficando cada vez mais específicos. Os sistemas param de conversar entre si. Alguma planilha — geralmente uma que só uma pessoa entende — passa a sustentar decisões importantes. E lá no comercial, leads esfriam sem ninguém perceber.</a:t>
             </a:r>
           </a:p>
           <a:p/>
           <a:p>
             <a:r>
-              <a:t>Quando o software pronto acaba e o seu problema continua — esse é o nosso território.</a:t>
+              <a:t>[pausa — deixe a cena assentar]</a:t>
+            </a:r>
+          </a:p>
+          <a:p/>
+          <a:p>
+            <a:r>
+              <a:t>Nada disso é falta de competência. É que a empresa cresceu mais rápido do que a tecnologia dela. E software pronto, de prateleira, não foi feito para o SEU processo — foi feito para a média.</a:t>
             </a:r>
           </a:p>
         </p:txBody>
@@ -1065,25 +1172,25 @@
           <a:lstStyle/>
           <a:p>
             <a:r>
-              <a:t>Objetivo: remover a maior objeção ('não sei o que pedir') e mostrar honestidade. ≈ 50s</a:t>
+              <a:t>Objetivo: a virada. Slide quase vazio de propósito — a força está na pausa. ≈ 15s</a:t>
             </a:r>
           </a:p>
           <a:p/>
           <a:p>
             <a:r>
-              <a:t>Uma coisa importante: você não precisa chegar para a gente sabendo o que construir.</a:t>
+              <a:t>E é exatamente nesse ponto que a gente entra.</a:t>
             </a:r>
           </a:p>
           <a:p/>
           <a:p>
             <a:r>
-              <a:t>Nenhum cliente nosso chegou com uma especificação técnica. Eles chegam com uma dor: "isso aqui demora demais", "estou desperdiçando oportunidade comercial", "não consigo enxergar a minha operação".</a:t>
+              <a:t>[pausa longa — não corra este slide]</a:t>
             </a:r>
           </a:p>
           <a:p/>
           <a:p>
             <a:r>
-              <a:t>O nosso trabalho começa aí — nessa régua do slide: entender a dor, medir o impacto, achar a oportunidade, desenhar a solução, e só então escolher a tecnologia. E às vezes a resposta honesta do diagnóstico é: não vale a pena construir nada. Essa honestidade faz parte do serviço — ninguém aqui quer vender software que não devolve resultado.</a:t>
+              <a:t>Quando o software pronto acaba e o seu problema continua — esse é o nosso território.</a:t>
             </a:r>
           </a:p>
         </p:txBody>
@@ -1153,25 +1260,25 @@
           <a:lstStyle/>
           <a:p>
             <a:r>
-              <a:t>Objetivo: dar o mapa da conversa e convidar a interrupção (engajamento). ≈ 40s</a:t>
+              <a:t>Objetivo: remover a maior objeção ('não sei o que pedir') e mostrar honestidade. ≈ 50s</a:t>
             </a:r>
           </a:p>
           <a:p/>
           <a:p>
             <a:r>
-              <a:t>Na prática, o que a gente constrói se organiza em três frentes.</a:t>
+              <a:t>Uma coisa importante: você não precisa chegar para a gente sabendo o que construir.</a:t>
             </a:r>
           </a:p>
           <a:p/>
           <a:p>
             <a:r>
-              <a:t>Um: receita nova — transformar o que a empresa já tem em um produto digital que os clientes dela pagariam para usar. Dois: operação — sistemas construídos em volta do seu processo, e não o contrário. Três: agentes de IA — colocar a IA para executar trabalho de verdade dentro da empresa.</a:t>
+              <a:t>Nenhum cliente nosso chegou com uma especificação técnica. Eles chegam com uma dor: "isso aqui demora demais", "estou desperdiçando oportunidade comercial", "não consigo enxergar a minha operação".</a:t>
             </a:r>
           </a:p>
           <a:p/>
           <a:p>
             <a:r>
-              <a:t>Vou passar rápido pelas três. E pode me interromper na hora em que alguma fizer clique com algo que vocês vivem aí dentro — essa é a parte boa da conversa.</a:t>
+              <a:t>O nosso trabalho começa aí — nessa régua do slide: entender a dor, medir o impacto, achar a oportunidade, desenhar a solução, e só então escolher a tecnologia. E às vezes a resposta honesta do diagnóstico é: não vale a pena construir nada. Essa honestidade faz parte do serviço — ninguém aqui quer vender software que não devolve resultado.</a:t>
             </a:r>
           </a:p>
         </p:txBody>
@@ -1241,31 +1348,25 @@
           <a:lstStyle/>
           <a:p>
             <a:r>
-              <a:t>Objetivo: plantar a pergunta que fica na cabeça depois da reunião. ≈ 60s</a:t>
+              <a:t>Objetivo: dar o mapa da conversa e convidar a interrupção (engajamento). ≈ 40s</a:t>
             </a:r>
           </a:p>
           <a:p/>
           <a:p>
             <a:r>
-              <a:t>Primeira frente.</a:t>
+              <a:t>Na prática, o que a gente constrói se organiza em três frentes.</a:t>
             </a:r>
           </a:p>
           <a:p/>
           <a:p>
             <a:r>
-              <a:t>A sua empresa já conquistou o mais difícil: clientes, confiança, conhecimento, distribuição. Isso levou anos. A pergunta que a gente faz é: o que MAIS essas pessoas comprariam de você?</a:t>
+              <a:t>Um: receita nova — transformar o que a empresa já tem em um produto digital que os clientes dela pagariam para usar. Dois: operação — sistemas construídos em volta do seu processo, e não o contrário. Três: agentes de IA — colocar a IA para executar trabalho de verdade dentro da empresa.</a:t>
             </a:r>
           </a:p>
           <a:p/>
           <a:p>
             <a:r>
-              <a:t>Pode ser um portal, uma assinatura, uma ferramenta que resolve uma dor do seu cliente. Cada produto nasce da base que já existe — por isso esse gráfico é conceitual, sem números: os números vêm do diagnóstico, do SEU caso, não de uma promessa genérica minha.</a:t>
-            </a:r>
-          </a:p>
-          <a:p/>
-          <a:p>
-            <a:r>
-              <a:t>Mas leva essa pergunta para casa: se uma parte dos seus clientes pagasse por um novo produto digital seu... o que valeria a pena construir?</a:t>
+              <a:t>Vou passar rápido pelas três. E pode me interromper na hora em que alguma fizer clique com algo que vocês vivem aí dentro — essa é a parte boa da conversa.</a:t>
             </a:r>
           </a:p>
         </p:txBody>
@@ -1335,31 +1436,31 @@
           <a:lstStyle/>
           <a:p>
             <a:r>
-              <a:t>Objetivo: inverter a lógica 'empresa se adapta ao software' e reforçar a parceria. ≈ 50s</a:t>
+              <a:t>Objetivo: plantar a pergunta que fica na cabeça depois da reunião. ≈ 60s</a:t>
             </a:r>
           </a:p>
           <a:p/>
           <a:p>
             <a:r>
-              <a:t>Segunda frente.</a:t>
+              <a:t>Primeira frente.</a:t>
             </a:r>
           </a:p>
           <a:p/>
           <a:p>
             <a:r>
-              <a:t>Hoje, a informação da sua operação mora em lugares demais — está aí no slide: planilha, ERP, e-mail, documento... e na cabeça de gente boa. Software genérico obriga a SUA empresa a se adaptar a ELE. A gente inverte isso: constrói o sistema em volta do seu processo.</a:t>
+              <a:t>A sua empresa já conquistou o mais difícil: clientes, confiança, conhecimento, distribuição. Isso levou anos. A pergunta que a gente faz é: o que MAIS essas pessoas comprariam de você?</a:t>
             </a:r>
           </a:p>
           <a:p/>
           <a:p>
             <a:r>
-              <a:t>O resultado é um lugar só, com a informação consolidada — e decisão com visibilidade, não no feeling.</a:t>
+              <a:t>Pode ser um portal, uma assinatura, uma ferramenta que resolve uma dor do seu cliente. Cada produto nasce da base que já existe — por isso esse gráfico é conceitual, sem números: os números vêm do diagnóstico, do SEU caso, não de uma promessa genérica minha.</a:t>
             </a:r>
           </a:p>
           <a:p/>
           <a:p>
             <a:r>
-              <a:t>E vale repetir: você não precisa trazer a solução pronta. Você conhece o seu negócio; nós conhecemos tecnologia. O desenho a gente faz junto.</a:t>
+              <a:t>Mas leva essa pergunta para casa: se uma parte dos seus clientes pagasse por um novo produto digital seu... o que valeria a pena construir?</a:t>
             </a:r>
           </a:p>
         </p:txBody>
@@ -1429,31 +1530,31 @@
           <a:lstStyle/>
           <a:p>
             <a:r>
-              <a:t>Objetivo: desfazer o mal-entendido 'agente = chatbot' e tranquilizar sobre controle. ≈ 50s</a:t>
+              <a:t>Objetivo: inverter a lógica 'empresa se adapta ao software' e reforçar a parceria. ≈ 50s</a:t>
             </a:r>
           </a:p>
           <a:p/>
           <a:p>
             <a:r>
-              <a:t>Terceira frente — e aqui eu preciso desfazer um mal-entendido.</a:t>
+              <a:t>Segunda frente.</a:t>
             </a:r>
           </a:p>
           <a:p/>
           <a:p>
             <a:r>
-              <a:t>Agente de IA não é chatbot. É software que executa etapas de um processo: interpreta informação, acessa as ferramentas que VOCÊ autorizar — CRM, ERP, WhatsApp, e-mail, documentos — e faz o trabalho.</a:t>
+              <a:t>Hoje, a informação da sua operação mora em lugares demais — está aí no slide: planilha, ERP, e-mail, documento... e na cabeça de gente boa. Software genérico obriga a SUA empresa a se adaptar a ELE. A gente inverte isso: constrói o sistema em volta do seu processo.</a:t>
             </a:r>
           </a:p>
           <a:p/>
           <a:p>
             <a:r>
-              <a:t>Com escopo definido, com regras, com permissões. E quando o assunto precisa de gente, ele passa para gente — está aí na saída de baixo do diagrama.</a:t>
+              <a:t>O resultado é um lugar só, com a informação consolidada — e decisão com visibilidade, não no feeling.</a:t>
             </a:r>
           </a:p>
           <a:p/>
           <a:p>
             <a:r>
-              <a:t>Autonomia com controle. Sempre nessa ordem.</a:t>
+              <a:t>E vale repetir: você não precisa trazer a solução pronta. Você conhece o seu negócio; nós conhecemos tecnologia. O desenho a gente faz junto.</a:t>
             </a:r>
           </a:p>
         </p:txBody>
@@ -1523,37 +1624,31 @@
           <a:lstStyle/>
           <a:p>
             <a:r>
-              <a:t>Objetivo: tornar concreto — três cenas do dia a dia que a plateia reconhece. ≈ 50s</a:t>
+              <a:t>Objetivo: desfazer o mal-entendido 'agente = chatbot' e tranquilizar sobre controle. ≈ 50s</a:t>
             </a:r>
           </a:p>
           <a:p/>
           <a:p>
             <a:r>
-              <a:t>Três lugares onde isso fica concreto.</a:t>
+              <a:t>Terceira frente — e aqui eu preciso desfazer um mal-entendido.</a:t>
             </a:r>
           </a:p>
           <a:p/>
           <a:p>
             <a:r>
-              <a:t>No atendimento: o agente responde, consulta as informações, registra tudo no CRM — e chama um humano quando a conversa pede um humano.</a:t>
+              <a:t>Agente de IA não é chatbot. É software que executa etapas de um processo: interpreta informação, acessa as ferramentas que VOCÊ autorizar — CRM, ERP, WhatsApp, e-mail, documentos — e faz o trabalho.</a:t>
             </a:r>
           </a:p>
           <a:p/>
           <a:p>
             <a:r>
-              <a:t>Em vendas: ele pesquisa o lead, qualifica, prepara o follow-up — o vendedor chega na conversa pronto, em vez de gastar a manhã pesquisando.</a:t>
+              <a:t>Com escopo definido, com regras, com permissões. E quando o assunto precisa de gente, ele passa para gente — está aí na saída de baixo do diagrama.</a:t>
             </a:r>
           </a:p>
           <a:p/>
           <a:p>
             <a:r>
-              <a:t>Na operação: ele lê sistemas e documentos, consolida, analisa e age.</a:t>
-            </a:r>
-          </a:p>
-          <a:p/>
-          <a:p>
-            <a:r>
-              <a:t>Repara no padrão das três colunas: o agente fica com o trabalho repetitivo; as pessoas ficam com o que exige gente.</a:t>
+              <a:t>Autonomia com controle. Sempre nessa ordem.</a:t>
             </a:r>
           </a:p>
         </p:txBody>
@@ -4688,6 +4783,48 @@
       <p:pic>
         <p:nvPicPr>
           <p:cNvPr id="2" name="Picture 1" descr="slide-12.png"/>
+          <p:cNvPicPr>
+            <a:picLocks noChangeAspect="1"/>
+          </p:cNvPicPr>
+          <p:nvPr/>
+        </p:nvPicPr>
+        <p:blipFill>
+          <a:blip r:embed="rId2"/>
+          <a:stretch>
+            <a:fillRect/>
+          </a:stretch>
+        </p:blipFill>
+        <p:spPr>
+          <a:xfrm>
+            <a:off x="0" y="0"/>
+            <a:ext cx="12192000" cy="6858000"/>
+          </a:xfrm>
+          <a:prstGeom prst="rect">
+            <a:avLst/>
+          </a:prstGeom>
+        </p:spPr>
+      </p:pic>
+    </p:spTree>
+  </p:cSld>
+  <p:clrMapOvr>
+    <a:masterClrMapping/>
+  </p:clrMapOvr>
+</p:sld>
+</file>
+
+<file path=ppt/slides/slide13.xml><?xml version="1.0" encoding="utf-8"?>
+<p:sld xmlns:a="http://schemas.openxmlformats.org/drawingml/2006/main" xmlns:p="http://schemas.openxmlformats.org/presentationml/2006/main" xmlns:r="http://schemas.openxmlformats.org/officeDocument/2006/relationships">
+  <p:cSld>
+    <p:spTree>
+      <p:nvGrpSpPr>
+        <p:cNvPr id="1" name=""/>
+        <p:cNvGrpSpPr/>
+        <p:nvPr/>
+      </p:nvGrpSpPr>
+      <p:grpSpPr/>
+      <p:pic>
+        <p:nvPicPr>
+          <p:cNvPr id="2" name="Picture 1" descr="slide-13.png"/>
           <p:cNvPicPr>
             <a:picLocks noChangeAspect="1"/>
           </p:cNvPicPr>

--- a/docs/apresentacao/Dreamy — Apresentação Institucional.pptx
+++ b/docs/apresentacao/Dreamy — Apresentação Institucional.pptx
@@ -18,6 +18,7 @@
     <p:sldId id="266" r:id="rId18"/>
     <p:sldId id="267" r:id="rId19"/>
     <p:sldId id="268" r:id="rId20"/>
+    <p:sldId id="269" r:id="rId21"/>
   </p:sldIdLst>
   <p:sldSz cx="12192000" cy="6858000" type="screen4x3"/>
   <p:notesSz cx="6858000" cy="9144000"/>
@@ -602,37 +603,31 @@
           <a:lstStyle/>
           <a:p>
             <a:r>
-              <a:t>Objetivo: tornar concreto — três cenas do dia a dia que a plateia reconhece. ≈ 50s</a:t>
+              <a:t>Objetivo: desfazer o mal-entendido 'agente = chatbot' e tranquilizar sobre controle. ≈ 50s</a:t>
             </a:r>
           </a:p>
           <a:p/>
           <a:p>
             <a:r>
-              <a:t>Três lugares onde isso fica concreto.</a:t>
+              <a:t>Terceira frente — e aqui eu preciso desfazer um mal-entendido.</a:t>
             </a:r>
           </a:p>
           <a:p/>
           <a:p>
             <a:r>
-              <a:t>No atendimento: o agente responde, consulta as informações, registra tudo no CRM — e chama um humano quando a conversa pede um humano.</a:t>
+              <a:t>Agente de IA não é chatbot. É software que executa etapas de um processo: interpreta informação, acessa as ferramentas que VOCÊ autorizar — CRM, ERP, WhatsApp, e-mail, documentos — e faz o trabalho.</a:t>
             </a:r>
           </a:p>
           <a:p/>
           <a:p>
             <a:r>
-              <a:t>Em vendas: ele pesquisa o lead, qualifica, prepara o follow-up — o vendedor chega na conversa pronto, em vez de gastar a manhã pesquisando.</a:t>
+              <a:t>Com escopo definido, com regras, com permissões. E quando o assunto precisa de gente, ele passa para gente — está aí na saída de baixo do diagrama.</a:t>
             </a:r>
           </a:p>
           <a:p/>
           <a:p>
             <a:r>
-              <a:t>Na operação: ele lê sistemas e documentos, consolida, analisa e age.</a:t>
-            </a:r>
-          </a:p>
-          <a:p/>
-          <a:p>
-            <a:r>
-              <a:t>Repara no padrão das três colunas: o agente fica com o trabalho repetitivo; as pessoas ficam com o que exige gente.</a:t>
+              <a:t>Autonomia com controle. Sempre nessa ordem.</a:t>
             </a:r>
           </a:p>
         </p:txBody>
@@ -702,25 +697,37 @@
           <a:lstStyle/>
           <a:p>
             <a:r>
-              <a:t>Objetivo: reduzir o risco percebido — processo claro, ciclos curtos, sem sumiço. ≈ 45s</a:t>
+              <a:t>Objetivo: tornar concreto — três cenas do dia a dia que a plateia reconhece. ≈ 50s</a:t>
             </a:r>
           </a:p>
           <a:p/>
           <a:p>
             <a:r>
-              <a:t>E como é trabalhar com a gente? Cinco passos, sem mistério.</a:t>
+              <a:t>Três lugares onde isso fica concreto.</a:t>
             </a:r>
           </a:p>
           <a:p/>
           <a:p>
             <a:r>
-              <a:t>Entender: a gente senta junto e mapeia problema, impacto e contexto. Desenhar: solução, experiência, arquitetura. Construir: em ciclos curtos — você vê o software crescendo e valida no caminho; a gente não some seis meses para voltar com uma surpresa. Implantar: na operação real, com quem usa de verdade. E evoluir: porque software bom não termina — acompanha o negócio.</a:t>
+              <a:t>No atendimento: o agente responde, consulta as informações, registra tudo no CRM — e chama um humano quando a conversa pede um humano.</a:t>
             </a:r>
           </a:p>
           <a:p/>
           <a:p>
             <a:r>
-              <a:t>Em cada ciclo você sabe o que está sendo feito, por quê, e o que vem depois.</a:t>
+              <a:t>Em vendas: ele pesquisa o lead, qualifica, prepara o follow-up — o vendedor chega na conversa pronto, em vez de gastar a manhã pesquisando.</a:t>
+            </a:r>
+          </a:p>
+          <a:p/>
+          <a:p>
+            <a:r>
+              <a:t>Na operação: ele lê sistemas e documentos, consolida, analisa e age.</a:t>
+            </a:r>
+          </a:p>
+          <a:p/>
+          <a:p>
+            <a:r>
+              <a:t>Repara no padrão das três colunas: o agente fica com o trabalho repetitivo; as pessoas ficam com o que exige gente.</a:t>
             </a:r>
           </a:p>
         </p:txBody>
@@ -790,25 +797,25 @@
           <a:lstStyle/>
           <a:p>
             <a:r>
-              <a:t>Objetivo: qualificar com franqueza — quem tem fit se reconhece e se inclina. ≈ 40s</a:t>
+              <a:t>Objetivo: reduzir o risco percebido — processo claro, ciclos curtos, sem sumiço. ≈ 45s</a:t>
             </a:r>
           </a:p>
           <a:p/>
           <a:p>
             <a:r>
-              <a:t>Sendo bem direto sobre para quem isso funciona: o nosso trabalho rende mais em empresa que já funciona.</a:t>
+              <a:t>E como é trabalhar com a gente? Cinco passos, sem mistério.</a:t>
             </a:r>
           </a:p>
           <a:p/>
           <a:p>
             <a:r>
-              <a:t>Que já tem operação, clientes, time — e sente que a tecnologia virou o freio, e não o motor.</a:t>
+              <a:t>Entender: a gente senta junto e mapeia problema, impacto e contexto. Desenhar: solução, experiência, arquitetura. Construir: em ciclos curtos — você vê o software crescendo e valida no caminho; a gente não some seis meses para voltar com uma surpresa. Implantar: na operação real, com quem usa de verdade. E evoluir: porque software bom não termina — acompanha o negócio.</a:t>
             </a:r>
           </a:p>
           <a:p/>
           <a:p>
             <a:r>
-              <a:t>Se, enquanto eu falava, você lembrou de um processo que não escala, de sistemas que não conversam, de dados espalhados por aí... provavelmente existe algo que a gente pode construir juntos.</a:t>
+              <a:t>Em cada ciclo você sabe o que está sendo feito, por quê, e o que vem depois.</a:t>
             </a:r>
           </a:p>
         </p:txBody>
@@ -878,6 +885,94 @@
           <a:lstStyle/>
           <a:p>
             <a:r>
+              <a:t>Objetivo: qualificar com franqueza — quem tem fit se reconhece e se inclina. ≈ 40s</a:t>
+            </a:r>
+          </a:p>
+          <a:p/>
+          <a:p>
+            <a:r>
+              <a:t>Sendo bem direto sobre para quem isso funciona: o nosso trabalho rende mais em empresa que já funciona.</a:t>
+            </a:r>
+          </a:p>
+          <a:p/>
+          <a:p>
+            <a:r>
+              <a:t>Que já tem operação, clientes, time — e sente que a tecnologia virou o freio, e não o motor.</a:t>
+            </a:r>
+          </a:p>
+          <a:p/>
+          <a:p>
+            <a:r>
+              <a:t>Se, enquanto eu falava, você lembrou de um processo que não escala, de sistemas que não conversam, de dados espalhados por aí... provavelmente existe algo que a gente pode construir juntos.</a:t>
+            </a:r>
+          </a:p>
+        </p:txBody>
+      </p:sp>
+      <p:sp>
+        <p:nvSpPr>
+          <p:cNvPr id="4" name="Slide Number Placeholder 3"/>
+          <p:cNvSpPr>
+            <a:spLocks noGrp="1"/>
+          </p:cNvSpPr>
+          <p:nvPr>
+            <p:ph type="sldNum" idx="5" sz="quarter"/>
+          </p:nvPr>
+        </p:nvSpPr>
+        <p:spPr/>
+      </p:sp>
+    </p:spTree>
+  </p:cSld>
+  <p:clrMapOvr>
+    <a:masterClrMapping/>
+  </p:clrMapOvr>
+</p:notes>
+</file>
+
+<file path=ppt/notesSlides/notesSlide14.xml><?xml version="1.0" encoding="utf-8"?>
+<p:notes xmlns:a="http://schemas.openxmlformats.org/drawingml/2006/main" xmlns:p="http://schemas.openxmlformats.org/presentationml/2006/main" xmlns:r="http://schemas.openxmlformats.org/officeDocument/2006/relationships">
+  <p:cSld>
+    <p:spTree>
+      <p:nvGrpSpPr>
+        <p:cNvPr id="1" name=""/>
+        <p:cNvGrpSpPr/>
+        <p:nvPr/>
+      </p:nvGrpSpPr>
+      <p:grpSpPr>
+        <a:xfrm>
+          <a:off x="0" y="0"/>
+          <a:ext cx="0" cy="0"/>
+          <a:chOff x="0" y="0"/>
+          <a:chExt cx="0" cy="0"/>
+        </a:xfrm>
+      </p:grpSpPr>
+      <p:sp>
+        <p:nvSpPr>
+          <p:cNvPr id="2" name="Slide Image Placeholder 1"/>
+          <p:cNvSpPr>
+            <a:spLocks noGrp="1"/>
+          </p:cNvSpPr>
+          <p:nvPr>
+            <p:ph type="sldImg" idx="2"/>
+          </p:nvPr>
+        </p:nvSpPr>
+        <p:spPr/>
+      </p:sp>
+      <p:sp>
+        <p:nvSpPr>
+          <p:cNvPr id="3" name="Notes Placeholder 2"/>
+          <p:cNvSpPr>
+            <a:spLocks noGrp="1"/>
+          </p:cNvSpPr>
+          <p:nvPr>
+            <p:ph type="body" idx="3" sz="quarter"/>
+          </p:nvPr>
+        </p:nvSpPr>
+        <p:spPr/>
+        <p:txBody>
+          <a:bodyPr/>
+          <a:lstStyle/>
+          <a:p>
+            <a:r>
               <a:t>Objetivo: uma única pergunta + próximo passo simples. Termine e deixe a plateia falar. ≈ 40s</a:t>
             </a:r>
           </a:p>
@@ -1530,31 +1625,25 @@
           <a:lstStyle/>
           <a:p>
             <a:r>
-              <a:t>Objetivo: inverter a lógica 'empresa se adapta ao software' e reforçar a parceria. ≈ 50s</a:t>
+              <a:t>No material enviado, este slide se explica sozinho. Ao vivo, prefira o simulador interativo do pitch HTML. ≈ 30s</a:t>
             </a:r>
           </a:p>
           <a:p/>
           <a:p>
             <a:r>
-              <a:t>Segunda frente.</a:t>
+              <a:t>Um exemplo com números redondos: uma empresa com 500 clientes ativos, um produto digital de R$ 149 por mês, e um cenário conservador — só 30% da base aderindo.</a:t>
             </a:r>
           </a:p>
           <a:p/>
           <a:p>
             <a:r>
-              <a:t>Hoje, a informação da sua operação mora em lugares demais — está aí no slide: planilha, ERP, e-mail, documento... e na cabeça de gente boa. Software genérico obriga a SUA empresa a se adaptar a ELE. A gente inverte isso: constrói o sistema em volta do seu processo.</a:t>
+              <a:t>Isso já significa R$ 22.350 novos por mês — R$ 268.200 por ano. E cada mês sem o produto no ar é esse valor que fica na mesa.</a:t>
             </a:r>
           </a:p>
           <a:p/>
           <a:p>
             <a:r>
-              <a:t>O resultado é um lugar só, com a informação consolidada — e decisão com visibilidade, não no feeling.</a:t>
-            </a:r>
-          </a:p>
-          <a:p/>
-          <a:p>
-            <a:r>
-              <a:t>E vale repetir: você não precisa trazer a solução pronta. Você conhece o seu negócio; nós conhecemos tecnologia. O desenho a gente faz junto.</a:t>
+              <a:t>No diagnóstico, a simulação é refeita com os números reais da empresa.</a:t>
             </a:r>
           </a:p>
         </p:txBody>
@@ -1624,31 +1713,31 @@
           <a:lstStyle/>
           <a:p>
             <a:r>
-              <a:t>Objetivo: desfazer o mal-entendido 'agente = chatbot' e tranquilizar sobre controle. ≈ 50s</a:t>
+              <a:t>Objetivo: inverter a lógica 'empresa se adapta ao software' e reforçar a parceria. ≈ 50s</a:t>
             </a:r>
           </a:p>
           <a:p/>
           <a:p>
             <a:r>
-              <a:t>Terceira frente — e aqui eu preciso desfazer um mal-entendido.</a:t>
+              <a:t>Segunda frente.</a:t>
             </a:r>
           </a:p>
           <a:p/>
           <a:p>
             <a:r>
-              <a:t>Agente de IA não é chatbot. É software que executa etapas de um processo: interpreta informação, acessa as ferramentas que VOCÊ autorizar — CRM, ERP, WhatsApp, e-mail, documentos — e faz o trabalho.</a:t>
+              <a:t>Hoje, a informação da sua operação mora em lugares demais — está aí no slide: planilha, ERP, e-mail, documento... e na cabeça de gente boa. Software genérico obriga a SUA empresa a se adaptar a ELE. A gente inverte isso: constrói o sistema em volta do seu processo.</a:t>
             </a:r>
           </a:p>
           <a:p/>
           <a:p>
             <a:r>
-              <a:t>Com escopo definido, com regras, com permissões. E quando o assunto precisa de gente, ele passa para gente — está aí na saída de baixo do diagrama.</a:t>
+              <a:t>O resultado é um lugar só, com a informação consolidada — e decisão com visibilidade, não no feeling.</a:t>
             </a:r>
           </a:p>
           <a:p/>
           <a:p>
             <a:r>
-              <a:t>Autonomia com controle. Sempre nessa ordem.</a:t>
+              <a:t>E vale repetir: você não precisa trazer a solução pronta. Você conhece o seu negócio; nós conhecemos tecnologia. O desenho a gente faz junto.</a:t>
             </a:r>
           </a:p>
         </p:txBody>
@@ -4825,6 +4914,48 @@
       <p:pic>
         <p:nvPicPr>
           <p:cNvPr id="2" name="Picture 1" descr="slide-13.png"/>
+          <p:cNvPicPr>
+            <a:picLocks noChangeAspect="1"/>
+          </p:cNvPicPr>
+          <p:nvPr/>
+        </p:nvPicPr>
+        <p:blipFill>
+          <a:blip r:embed="rId2"/>
+          <a:stretch>
+            <a:fillRect/>
+          </a:stretch>
+        </p:blipFill>
+        <p:spPr>
+          <a:xfrm>
+            <a:off x="0" y="0"/>
+            <a:ext cx="12192000" cy="6858000"/>
+          </a:xfrm>
+          <a:prstGeom prst="rect">
+            <a:avLst/>
+          </a:prstGeom>
+        </p:spPr>
+      </p:pic>
+    </p:spTree>
+  </p:cSld>
+  <p:clrMapOvr>
+    <a:masterClrMapping/>
+  </p:clrMapOvr>
+</p:sld>
+</file>
+
+<file path=ppt/slides/slide14.xml><?xml version="1.0" encoding="utf-8"?>
+<p:sld xmlns:a="http://schemas.openxmlformats.org/drawingml/2006/main" xmlns:p="http://schemas.openxmlformats.org/presentationml/2006/main" xmlns:r="http://schemas.openxmlformats.org/officeDocument/2006/relationships">
+  <p:cSld>
+    <p:spTree>
+      <p:nvGrpSpPr>
+        <p:cNvPr id="1" name=""/>
+        <p:cNvGrpSpPr/>
+        <p:nvPr/>
+      </p:nvGrpSpPr>
+      <p:grpSpPr/>
+      <p:pic>
+        <p:nvPicPr>
+          <p:cNvPr id="2" name="Picture 1" descr="slide-14.png"/>
           <p:cNvPicPr>
             <a:picLocks noChangeAspect="1"/>
           </p:cNvPicPr>
